--- a/Speech Emotion Recognition/Speech_Emotion_Recognition_Presentation.pptx
+++ b/Speech Emotion Recognition/Speech_Emotion_Recognition_Presentation.pptx
@@ -17,7 +17,6 @@
     <p:sldId id="265" r:id="rId17"/>
     <p:sldId id="266" r:id="rId18"/>
     <p:sldId id="267" r:id="rId19"/>
-    <p:sldId id="268" r:id="rId20"/>
   </p:sldIdLst>
   <p:sldSz cx="12191695" cy="6858000" type="screen4x3"/>
   <p:notesSz cx="6858000" cy="9144000"/>
@@ -137,53 +136,56 @@
               <c:strCache>
                 <c:ptCount val="1"/>
                 <c:pt idx="0">
-                  <c:v>SVM baseline</c:v>
+                  <c:v>Validation Macro F1</c:v>
                 </c:pt>
               </c:strCache>
             </c:strRef>
           </c:tx>
           <c:spPr>
             <a:solidFill>
-              <a:srgbClr val="94A3B8"/>
+              <a:srgbClr val="F59E0B"/>
             </a:solidFill>
           </c:spPr>
           <c:cat>
             <c:strRef>
-              <c:f>Sheet1!$A$2:$A$5</c:f>
+              <c:f>Sheet1!$A$2:$A$6</c:f>
               <c:strCache>
-                <c:ptCount val="4"/>
+                <c:ptCount val="5"/>
                 <c:pt idx="0">
-                  <c:v>Macro-F1</c:v>
+                  <c:v>Exp 1</c:v>
                 </c:pt>
                 <c:pt idx="1">
-                  <c:v>Weighted-F1</c:v>
+                  <c:v>Exp 2</c:v>
                 </c:pt>
                 <c:pt idx="2">
-                  <c:v>Micro-F1</c:v>
+                  <c:v>Exp 3</c:v>
                 </c:pt>
                 <c:pt idx="3">
-                  <c:v>Accuracy</c:v>
+                  <c:v>Exp 4</c:v>
+                </c:pt>
+                <c:pt idx="4">
+                  <c:v>SVM</c:v>
                 </c:pt>
               </c:strCache>
             </c:strRef>
           </c:cat>
           <c:val>
             <c:numRef>
-              <c:f>Sheet1!$B$2:$B$5</c:f>
+              <c:f>Sheet1!$B$2:$B$6</c:f>
               <c:numCache>
                 <c:formatCode>General</c:formatCode>
-                <c:ptCount val="4"/>
+                <c:ptCount val="5"/>
                 <c:pt idx="0">
-                  <c:v>0.8524217328565156</c:v>
+                  <c:v>0.4484</c:v>
                 </c:pt>
                 <c:pt idx="1">
-                  <c:v>0.8524217328565155</c:v>
+                  <c:v>0.4873</c:v>
                 </c:pt>
                 <c:pt idx="2">
-                  <c:v>0.8541666666666666</c:v>
+                  <c:v>0.5161</c:v>
                 </c:pt>
                 <c:pt idx="3">
-                  <c:v>0.8541666666666666</c:v>
+                  <c:v>0.4794</c:v>
                 </c:pt>
               </c:numCache>
             </c:numRef>
@@ -198,7 +200,7 @@
               <c:strCache>
                 <c:ptCount val="1"/>
                 <c:pt idx="0">
-                  <c:v>CNN-BiLSTM-Attention</c:v>
+                  <c:v>Test Macro F1</c:v>
                 </c:pt>
               </c:strCache>
             </c:strRef>
@@ -210,41 +212,47 @@
           </c:spPr>
           <c:cat>
             <c:strRef>
-              <c:f>Sheet1!$A$2:$A$5</c:f>
+              <c:f>Sheet1!$A$2:$A$6</c:f>
               <c:strCache>
-                <c:ptCount val="4"/>
+                <c:ptCount val="5"/>
                 <c:pt idx="0">
-                  <c:v>Macro-F1</c:v>
+                  <c:v>Exp 1</c:v>
                 </c:pt>
                 <c:pt idx="1">
-                  <c:v>Weighted-F1</c:v>
+                  <c:v>Exp 2</c:v>
                 </c:pt>
                 <c:pt idx="2">
-                  <c:v>Micro-F1</c:v>
+                  <c:v>Exp 3</c:v>
                 </c:pt>
                 <c:pt idx="3">
-                  <c:v>Accuracy</c:v>
+                  <c:v>Exp 4</c:v>
+                </c:pt>
+                <c:pt idx="4">
+                  <c:v>SVM</c:v>
                 </c:pt>
               </c:strCache>
             </c:strRef>
           </c:cat>
           <c:val>
             <c:numRef>
-              <c:f>Sheet1!$C$2:$C$5</c:f>
+              <c:f>Sheet1!$C$2:$C$6</c:f>
               <c:numCache>
                 <c:formatCode>General</c:formatCode>
-                <c:ptCount val="4"/>
+                <c:ptCount val="5"/>
                 <c:pt idx="0">
-                  <c:v>0.8795135898584174</c:v>
+                  <c:v>0.4292</c:v>
                 </c:pt>
                 <c:pt idx="1">
-                  <c:v>0.8795135898584174</c:v>
+                  <c:v>0.5231</c:v>
                 </c:pt>
                 <c:pt idx="2">
-                  <c:v>0.875</c:v>
+                  <c:v>0.5307</c:v>
                 </c:pt>
                 <c:pt idx="3">
-                  <c:v>0.875</c:v>
+                  <c:v>0.4783</c:v>
+                </c:pt>
+                <c:pt idx="4">
+                  <c:v>0.4464</c:v>
                 </c:pt>
               </c:numCache>
             </c:numRef>
@@ -270,279 +278,6 @@
           <c:showBubbleSize val="0"/>
           <c:showLeaderLines val="1"/>
         </c:dLbls>
-        <c:gapWidth val="70"/>
-        <c:axId val="-2068027336"/>
-        <c:axId val="-2113994440"/>
-      </c:barChart>
-      <c:catAx>
-        <c:axId val="-2068027336"/>
-        <c:scaling>
-          <c:orientation val="minMax"/>
-        </c:scaling>
-        <c:delete val="0"/>
-        <c:axPos val="b"/>
-        <c:majorTickMark val="out"/>
-        <c:minorTickMark val="none"/>
-        <c:tickLblPos val="nextTo"/>
-        <c:txPr>
-          <a:bodyPr/>
-          <a:lstStyle/>
-          <a:p>
-            <a:pPr>
-              <a:defRPr sz="1200"/>
-            </a:pPr>
-          </a:p>
-        </c:txPr>
-        <c:crossAx val="-2113994440"/>
-        <c:crosses val="autoZero"/>
-        <c:auto val="1"/>
-        <c:lblAlgn val="ctr"/>
-        <c:lblOffset val="100"/>
-        <c:noMultiLvlLbl val="0"/>
-      </c:catAx>
-      <c:valAx>
-        <c:axId val="-2113994440"/>
-        <c:scaling>
-          <c:max val="1.0"/>
-          <c:min val="0.0"/>
-        </c:scaling>
-        <c:delete val="0"/>
-        <c:axPos val="l"/>
-        <c:majorGridlines>
-          <c:spPr>
-            <a:ln>
-              <a:solidFill>
-                <a:srgbClr val="E2E8F0"/>
-              </a:solidFill>
-            </a:ln>
-          </c:spPr>
-        </c:majorGridlines>
-        <c:majorTickMark val="out"/>
-        <c:minorTickMark val="none"/>
-        <c:tickLblPos val="nextTo"/>
-        <c:txPr>
-          <a:bodyPr/>
-          <a:lstStyle/>
-          <a:p>
-            <a:pPr>
-              <a:defRPr sz="1100"/>
-            </a:pPr>
-          </a:p>
-        </c:txPr>
-        <c:crossAx val="-2068027336"/>
-        <c:crosses val="autoZero"/>
-      </c:valAx>
-    </c:plotArea>
-    <c:legend>
-      <c:legendPos val="t"/>
-      <c:overlay val="0"/>
-      <c:txPr>
-        <a:bodyPr/>
-        <a:lstStyle/>
-        <a:p>
-          <a:pPr>
-            <a:defRPr sz="1200"/>
-          </a:pPr>
-        </a:p>
-      </c:txPr>
-    </c:legend>
-    <c:dispBlanksAs val="gap"/>
-  </c:chart>
-  <c:txPr>
-    <a:bodyPr/>
-    <a:lstStyle/>
-    <a:p>
-      <a:pPr>
-        <a:defRPr sz="1800"/>
-      </a:pPr>
-      <a:endParaRPr lang="en-US"/>
-    </a:p>
-  </c:txPr>
-  <c:externalData r:id="rId1">
-    <c:autoUpdate val="0"/>
-  </c:externalData>
-</c:chartSpace>
-</file>
-
-<file path=ppt/charts/chart2.xml><?xml version="1.0" encoding="utf-8"?>
-<c:chartSpace xmlns:c="http://schemas.openxmlformats.org/drawingml/2006/chart" xmlns:a="http://schemas.openxmlformats.org/drawingml/2006/main" xmlns:r="http://schemas.openxmlformats.org/officeDocument/2006/relationships">
-  <c:date1904 val="0"/>
-  <c:chart>
-    <c:autoTitleDeleted val="0"/>
-    <c:plotArea>
-      <c:barChart>
-        <c:barDir val="col"/>
-        <c:grouping val="clustered"/>
-        <c:ser>
-          <c:idx val="0"/>
-          <c:order val="0"/>
-          <c:tx>
-            <c:strRef>
-              <c:f>Sheet1!$B$1</c:f>
-              <c:strCache>
-                <c:ptCount val="1"/>
-                <c:pt idx="0">
-                  <c:v>SVM baseline</c:v>
-                </c:pt>
-              </c:strCache>
-            </c:strRef>
-          </c:tx>
-          <c:spPr>
-            <a:solidFill>
-              <a:srgbClr val="94A3B8"/>
-            </a:solidFill>
-          </c:spPr>
-          <c:cat>
-            <c:strRef>
-              <c:f>Sheet1!$A$2:$A$9</c:f>
-              <c:strCache>
-                <c:ptCount val="8"/>
-                <c:pt idx="0">
-                  <c:v>neutral</c:v>
-                </c:pt>
-                <c:pt idx="1">
-                  <c:v>calm</c:v>
-                </c:pt>
-                <c:pt idx="2">
-                  <c:v>happy</c:v>
-                </c:pt>
-                <c:pt idx="3">
-                  <c:v>sad</c:v>
-                </c:pt>
-                <c:pt idx="4">
-                  <c:v>angry</c:v>
-                </c:pt>
-                <c:pt idx="5">
-                  <c:v>fearful</c:v>
-                </c:pt>
-                <c:pt idx="6">
-                  <c:v>disgust</c:v>
-                </c:pt>
-                <c:pt idx="7">
-                  <c:v>surprised</c:v>
-                </c:pt>
-              </c:strCache>
-            </c:strRef>
-          </c:cat>
-          <c:val>
-            <c:numRef>
-              <c:f>Sheet1!$B$2:$B$9</c:f>
-              <c:numCache>
-                <c:formatCode>General</c:formatCode>
-                <c:ptCount val="8"/>
-                <c:pt idx="0">
-                  <c:v>0.8333333333333334</c:v>
-                </c:pt>
-                <c:pt idx="1">
-                  <c:v>0.8571428571428571</c:v>
-                </c:pt>
-                <c:pt idx="2">
-                  <c:v>0.6086956521739131</c:v>
-                </c:pt>
-                <c:pt idx="3">
-                  <c:v>1.0</c:v>
-                </c:pt>
-                <c:pt idx="4">
-                  <c:v>0.8333333333333334</c:v>
-                </c:pt>
-                <c:pt idx="5">
-                  <c:v>0.8888888888888888</c:v>
-                </c:pt>
-                <c:pt idx="6">
-                  <c:v>0.8888888888888888</c:v>
-                </c:pt>
-                <c:pt idx="7">
-                  <c:v>0.9090909090909091</c:v>
-                </c:pt>
-              </c:numCache>
-            </c:numRef>
-          </c:val>
-        </c:ser>
-        <c:ser>
-          <c:idx val="1"/>
-          <c:order val="1"/>
-          <c:tx>
-            <c:strRef>
-              <c:f>Sheet1!$C$1</c:f>
-              <c:strCache>
-                <c:ptCount val="1"/>
-                <c:pt idx="0">
-                  <c:v>CNN-BiLSTM-Attention</c:v>
-                </c:pt>
-              </c:strCache>
-            </c:strRef>
-          </c:tx>
-          <c:spPr>
-            <a:solidFill>
-              <a:srgbClr val="4F46E5"/>
-            </a:solidFill>
-          </c:spPr>
-          <c:cat>
-            <c:strRef>
-              <c:f>Sheet1!$A$2:$A$9</c:f>
-              <c:strCache>
-                <c:ptCount val="8"/>
-                <c:pt idx="0">
-                  <c:v>neutral</c:v>
-                </c:pt>
-                <c:pt idx="1">
-                  <c:v>calm</c:v>
-                </c:pt>
-                <c:pt idx="2">
-                  <c:v>happy</c:v>
-                </c:pt>
-                <c:pt idx="3">
-                  <c:v>sad</c:v>
-                </c:pt>
-                <c:pt idx="4">
-                  <c:v>angry</c:v>
-                </c:pt>
-                <c:pt idx="5">
-                  <c:v>fearful</c:v>
-                </c:pt>
-                <c:pt idx="6">
-                  <c:v>disgust</c:v>
-                </c:pt>
-                <c:pt idx="7">
-                  <c:v>surprised</c:v>
-                </c:pt>
-              </c:strCache>
-            </c:strRef>
-          </c:cat>
-          <c:val>
-            <c:numRef>
-              <c:f>Sheet1!$C$2:$C$9</c:f>
-              <c:numCache>
-                <c:formatCode>General</c:formatCode>
-                <c:ptCount val="8"/>
-                <c:pt idx="0">
-                  <c:v>0.9230769230769231</c:v>
-                </c:pt>
-                <c:pt idx="1">
-                  <c:v>1.0</c:v>
-                </c:pt>
-                <c:pt idx="2">
-                  <c:v>0.6896551724137931</c:v>
-                </c:pt>
-                <c:pt idx="3">
-                  <c:v>1.0</c:v>
-                </c:pt>
-                <c:pt idx="4">
-                  <c:v>0.8571428571428571</c:v>
-                </c:pt>
-                <c:pt idx="5">
-                  <c:v>0.8571428571428571</c:v>
-                </c:pt>
-                <c:pt idx="6">
-                  <c:v>0.9090909090909091</c:v>
-                </c:pt>
-                <c:pt idx="7">
-                  <c:v>0.8</c:v>
-                </c:pt>
-              </c:numCache>
-            </c:numRef>
-          </c:val>
-        </c:ser>
         <c:gapWidth val="60"/>
         <c:axId val="-2068027336"/>
         <c:axId val="-2113994440"/>
@@ -562,7 +297,7 @@
           <a:lstStyle/>
           <a:p>
             <a:pPr>
-              <a:defRPr sz="1000"/>
+              <a:defRPr sz="1200"/>
             </a:pPr>
           </a:p>
         </c:txPr>
@@ -576,20 +311,11 @@
       <c:valAx>
         <c:axId val="-2113994440"/>
         <c:scaling>
-          <c:max val="1.0"/>
+          <c:max val="0.7"/>
           <c:min val="0.0"/>
         </c:scaling>
         <c:delete val="0"/>
         <c:axPos val="l"/>
-        <c:majorGridlines>
-          <c:spPr>
-            <a:ln>
-              <a:solidFill>
-                <a:srgbClr val="E2E8F0"/>
-              </a:solidFill>
-            </a:ln>
-          </c:spPr>
-        </c:majorGridlines>
         <c:majorTickMark val="out"/>
         <c:minorTickMark val="none"/>
         <c:tickLblPos val="nextTo"/>
@@ -598,7 +324,7 @@
           <a:lstStyle/>
           <a:p>
             <a:pPr>
-              <a:defRPr sz="1000"/>
+              <a:defRPr sz="1100"/>
             </a:pPr>
           </a:p>
         </c:txPr>
@@ -607,14 +333,14 @@
       </c:valAx>
     </c:plotArea>
     <c:legend>
-      <c:legendPos val="t"/>
+      <c:legendPos val="b"/>
       <c:overlay val="0"/>
       <c:txPr>
         <a:bodyPr/>
         <a:lstStyle/>
         <a:p>
           <a:pPr>
-            <a:defRPr sz="1100"/>
+            <a:defRPr sz="1200"/>
           </a:pPr>
         </a:p>
       </c:txPr>
@@ -1032,7 +758,7 @@
           <a:lstStyle/>
           <a:p>
             <a:r>
-              <a:t>Introduce the project: recognise emotion from speech using MFCC features and a deep network, evaluated with F1-score.</a:t>
+              <a:t>Introduce the project: recognise 8 emotions from speech using MFCC features and a CNN-BiLSTM-Attention network. Headline numbers are on unseen test actors.</a:t>
             </a:r>
           </a:p>
         </p:txBody>
@@ -1102,7 +828,7 @@
           <a:lstStyle/>
           <a:p>
             <a:r>
-              <a:t>Point out the best and worst classes and where the confusion matrix shows systematic mistakes.</a:t>
+              <a:t>Observed errors (counts from the test confusion matrix). Explanations are hypotheses, not proven.</a:t>
             </a:r>
           </a:p>
         </p:txBody>
@@ -1172,7 +898,7 @@
           <a:lstStyle/>
           <a:p>
             <a:r>
-              <a:t>Be upfront about limitations: acted speech, few test speakers, MFCC-only features.</a:t>
+              <a:t>State clearly: acted speech, 4 test actors, one split. The model must not be presented as understanding human emotion in general.</a:t>
             </a:r>
           </a:p>
         </p:txBody>
@@ -1242,7 +968,7 @@
           <a:lstStyle/>
           <a:p>
             <a:r>
-              <a:t>Summarise delivered work, then future work: cross-corpus evaluation, SpecAugment, pretrained speech encoders, real-time demo.</a:t>
+              <a:t>Complete pipeline: data -&gt; MFCC -&gt; CNN-BiLSTM-Attention -&gt; F1 evaluation, with tests, inference script and documentation.</a:t>
             </a:r>
           </a:p>
         </p:txBody>
@@ -1312,7 +1038,7 @@
           <a:lstStyle/>
           <a:p>
             <a:r>
-              <a:t>Emotion matters in call-centre analytics, tutoring, wellbeing apps and HRI. State the assigned problem statement.</a:t>
+              <a:t>Emotion is carried by how we speak (pitch, energy, timbre, rhythm), not only by words. The task: classify a speech clip into one of 8 emotions.</a:t>
             </a:r>
           </a:p>
         </p:txBody>
@@ -1382,7 +1108,7 @@
           <a:lstStyle/>
           <a:p>
             <a:r>
-              <a:t>Walk through the six stages left to right. Each stage is a separate tested module.</a:t>
+              <a:t>Each objective maps to a module of the code base and is covered by automated tests.</a:t>
             </a:r>
           </a:p>
         </p:txBody>
@@ -1452,7 +1178,7 @@
           <a:lstStyle/>
           <a:p>
             <a:r>
-              <a:t>RAVDESS speech: 1,440 clips, 24 actors, 8 emotions. Labels are in the filename. Actors are split so no voice is shared across partitions.</a:t>
+              <a:t>1,440 clips, 24 actors (12F/12M), 2 sentences, 8 emotions. Neutral has a single intensity, so 96 clips; others have 192. Split is by actor to avoid speaker leakage.</a:t>
             </a:r>
           </a:p>
         </p:txBody>
@@ -1522,7 +1248,7 @@
           <a:lstStyle/>
           <a:p>
             <a:r>
-              <a:t>Explain trimming, fixed window, augmentation (train only), and MFCC + deltas giving a 130 x 120 matrix.</a:t>
+              <a:t>Raw audio -&gt; preprocessing -&gt; MFCC -&gt; normalisation -&gt; CNN-BiLSTM-Attention -&gt; emotion. Each stage is a tested Python module.</a:t>
             </a:r>
           </a:p>
         </p:txBody>
@@ -1592,7 +1318,7 @@
           <a:lstStyle/>
           <a:p>
             <a:r>
-              <a:t>Three conv blocks reduce 130 frames to 16; BiLSTM adds temporal context; attention pools frames. 341,064 parameters.</a:t>
+              <a:t>MFCC describe the voice timbre per frame; delta features add how it changes; delta-delta adds how that change accelerates.</a:t>
             </a:r>
           </a:p>
         </p:txBody>
@@ -1662,7 +1388,7 @@
           <a:lstStyle/>
           <a:p>
             <a:r>
-              <a:t>Adam with LR scheduling, early stopping on validation loss, class weights. SVM baseline tuned on validation actors.</a:t>
+              <a:t>Compact network with 79,080 parameters. CNN finds local spectral patterns, BiLSTM models context both ways, attention weights the most informative frames.</a:t>
             </a:r>
           </a:p>
         </p:txBody>
@@ -1732,7 +1458,7 @@
           <a:lstStyle/>
           <a:p>
             <a:r>
-              <a:t>Macro-F1 is primary because it weights every emotion equally. Test actors are untouched during training and tuning.</a:t>
+              <a:t>Class weights compensate for fewer neutral clips. The best checkpoint is the epoch with the highest validation Macro F1.</a:t>
             </a:r>
           </a:p>
         </p:txBody>
@@ -1802,7 +1528,7 @@
           <a:lstStyle/>
           <a:p>
             <a:r>
-              <a:t>Report macro-F1 for deep vs baseline, then discuss the difference. These numbers are from the synthetic smoke test only.</a:t>
+              <a:t>Test set = 4 unseen actors (240 clips). Validation Macro F1 was used to choose the final model. Experiment 4 (stronger dropout) was trained once on the real data and is included in the comparison.</a:t>
             </a:r>
           </a:p>
         </p:txBody>
@@ -4823,50 +4549,6 @@
             <a:avLst/>
           </a:prstGeom>
           <a:solidFill>
-            <a:srgbClr val="0F172A"/>
-          </a:solidFill>
-          <a:ln>
-            <a:noFill/>
-          </a:ln>
-          <a:effectLst/>
-        </p:spPr>
-        <p:style>
-          <a:lnRef idx="1">
-            <a:schemeClr val="accent1"/>
-          </a:lnRef>
-          <a:fillRef idx="3">
-            <a:schemeClr val="accent1"/>
-          </a:fillRef>
-          <a:effectRef idx="2">
-            <a:schemeClr val="accent1"/>
-          </a:effectRef>
-          <a:fontRef idx="minor">
-            <a:schemeClr val="lt1"/>
-          </a:fontRef>
-        </p:style>
-        <p:txBody>
-          <a:bodyPr rtlCol="0" anchor="ctr"/>
-          <a:lstStyle/>
-          <a:p>
-            <a:pPr algn="ctr"/>
-          </a:p>
-        </p:txBody>
-      </p:sp>
-      <p:sp>
-        <p:nvSpPr>
-          <p:cNvPr id="3" name="Rectangle 2"/>
-          <p:cNvSpPr/>
-          <p:nvPr/>
-        </p:nvSpPr>
-        <p:spPr>
-          <a:xfrm>
-            <a:off x="0" y="0"/>
-            <a:ext cx="320040" cy="6858000"/>
-          </a:xfrm>
-          <a:prstGeom prst="rect">
-            <a:avLst/>
-          </a:prstGeom>
-          <a:solidFill>
             <a:srgbClr val="4F46E5"/>
           </a:solidFill>
           <a:ln>
@@ -4898,14 +4580,14 @@
       </p:sp>
       <p:sp>
         <p:nvSpPr>
-          <p:cNvPr id="4" name="Rectangle 3"/>
+          <p:cNvPr id="3" name="Rectangle 2"/>
           <p:cNvSpPr/>
           <p:nvPr/>
         </p:nvSpPr>
         <p:spPr>
           <a:xfrm>
-            <a:off x="822960" y="3246120"/>
-            <a:ext cx="1463040" cy="64008"/>
+            <a:off x="0" y="4617720"/>
+            <a:ext cx="12191695" cy="73152"/>
           </a:xfrm>
           <a:prstGeom prst="rect">
             <a:avLst/>
@@ -4942,13 +4624,13 @@
       </p:sp>
       <p:sp>
         <p:nvSpPr>
-          <p:cNvPr id="5" name="TextBox 4"/>
+          <p:cNvPr id="4" name="TextBox 3"/>
           <p:cNvSpPr txBox="1"/>
           <p:nvPr/>
         </p:nvSpPr>
         <p:spPr>
           <a:xfrm>
-            <a:off x="822960" y="1371600"/>
+            <a:off x="822960" y="822960"/>
             <a:ext cx="10058400" cy="365760"/>
           </a:xfrm>
           <a:prstGeom prst="rect">
@@ -4966,7 +4648,7 @@
             <a:r>
               <a:rPr sz="1400" b="1">
                 <a:solidFill>
-                  <a:srgbClr val="06B6D4"/>
+                  <a:srgbClr val="C7D2FE"/>
                 </a:solidFill>
                 <a:latin typeface="Calibri"/>
               </a:rPr>
@@ -4977,14 +4659,14 @@
       </p:sp>
       <p:sp>
         <p:nvSpPr>
-          <p:cNvPr id="6" name="TextBox 5"/>
+          <p:cNvPr id="5" name="TextBox 4"/>
           <p:cNvSpPr txBox="1"/>
           <p:nvPr/>
         </p:nvSpPr>
         <p:spPr>
           <a:xfrm>
-            <a:off x="822960" y="1828800"/>
-            <a:ext cx="10515600" cy="1371600"/>
+            <a:off x="822960" y="1371600"/>
+            <a:ext cx="10607040" cy="1828800"/>
           </a:xfrm>
           <a:prstGeom prst="rect">
             <a:avLst/>
@@ -4999,27 +4681,39 @@
           <a:p>
             <a:pPr algn="l"/>
             <a:r>
-              <a:rPr sz="5400" b="1">
+              <a:rPr sz="4200" b="1">
                 <a:solidFill>
                   <a:srgbClr val="FFFFFF"/>
                 </a:solidFill>
                 <a:latin typeface="Calibri"/>
               </a:rPr>
-              <a:t>Speech Emotion Recognition</a:t>
-            </a:r>
-          </a:p>
-        </p:txBody>
-      </p:sp>
-      <p:sp>
-        <p:nvSpPr>
-          <p:cNvPr id="7" name="TextBox 6"/>
+              <a:t>Emotion Recognition in Speech</a:t>
+            </a:r>
+          </a:p>
+          <a:p>
+            <a:pPr algn="l"/>
+            <a:r>
+              <a:rPr sz="4200" b="1">
+                <a:solidFill>
+                  <a:srgbClr val="FFFFFF"/>
+                </a:solidFill>
+                <a:latin typeface="Calibri"/>
+              </a:rPr>
+              <a:t>using MFCC Features and Deep Learning</a:t>
+            </a:r>
+          </a:p>
+        </p:txBody>
+      </p:sp>
+      <p:sp>
+        <p:nvSpPr>
+          <p:cNvPr id="6" name="TextBox 5"/>
           <p:cNvSpPr txBox="1"/>
           <p:nvPr/>
         </p:nvSpPr>
         <p:spPr>
           <a:xfrm>
-            <a:off x="822960" y="3520440"/>
-            <a:ext cx="10058400" cy="822960"/>
+            <a:off x="822960" y="3246120"/>
+            <a:ext cx="10515600" cy="822960"/>
           </a:xfrm>
           <a:prstGeom prst="rect">
             <a:avLst/>
@@ -5034,14 +4728,58 @@
           <a:p>
             <a:pPr algn="l"/>
             <a:r>
-              <a:rPr sz="2200" b="0">
-                <a:solidFill>
-                  <a:srgbClr val="CBD5E1"/>
-                </a:solidFill>
-                <a:latin typeface="Calibri"/>
-              </a:rPr>
-              <a:t>MFCC features + CNN-BiLSTM-Attention deep learning model, evaluated with F1-score</a:t>
-            </a:r>
+              <a:rPr sz="2000" b="0">
+                <a:solidFill>
+                  <a:srgbClr val="E0E7FF"/>
+                </a:solidFill>
+                <a:latin typeface="Calibri"/>
+              </a:rPr>
+              <a:t>CNN-BiLSTM-Attention model  |  RAVDESS  |  evaluated with Macro F1 on unseen actors</a:t>
+            </a:r>
+          </a:p>
+        </p:txBody>
+      </p:sp>
+      <p:sp>
+        <p:nvSpPr>
+          <p:cNvPr id="7" name="Rounded Rectangle 6"/>
+          <p:cNvSpPr/>
+          <p:nvPr/>
+        </p:nvSpPr>
+        <p:spPr>
+          <a:xfrm>
+            <a:off x="822960" y="4983480"/>
+            <a:ext cx="2286000" cy="1097280"/>
+          </a:xfrm>
+          <a:prstGeom prst="roundRect">
+            <a:avLst/>
+          </a:prstGeom>
+          <a:solidFill>
+            <a:srgbClr val="4338CA"/>
+          </a:solidFill>
+          <a:ln>
+            <a:noFill/>
+          </a:ln>
+          <a:effectLst/>
+        </p:spPr>
+        <p:style>
+          <a:lnRef idx="1">
+            <a:schemeClr val="accent1"/>
+          </a:lnRef>
+          <a:fillRef idx="3">
+            <a:schemeClr val="accent1"/>
+          </a:fillRef>
+          <a:effectRef idx="2">
+            <a:schemeClr val="accent1"/>
+          </a:effectRef>
+          <a:fontRef idx="minor">
+            <a:schemeClr val="lt1"/>
+          </a:fontRef>
+        </p:style>
+        <p:txBody>
+          <a:bodyPr rtlCol="0" anchor="ctr"/>
+          <a:lstStyle/>
+          <a:p>
+            <a:pPr algn="ctr"/>
           </a:p>
         </p:txBody>
       </p:sp>
@@ -5053,8 +4791,8 @@
         </p:nvSpPr>
         <p:spPr>
           <a:xfrm>
-            <a:off x="822960" y="5120640"/>
-            <a:ext cx="7315200" cy="365760"/>
+            <a:off x="822960" y="5074920"/>
+            <a:ext cx="2286000" cy="548640"/>
           </a:xfrm>
           <a:prstGeom prst="rect">
             <a:avLst/>
@@ -5067,15 +4805,15 @@
           </a:bodyPr>
           <a:lstStyle/>
           <a:p>
-            <a:pPr algn="l"/>
-            <a:r>
-              <a:rPr sz="2000" b="1">
+            <a:pPr algn="ctr"/>
+            <a:r>
+              <a:rPr sz="3000" b="1">
                 <a:solidFill>
                   <a:srgbClr val="FFFFFF"/>
                 </a:solidFill>
                 <a:latin typeface="Calibri"/>
               </a:rPr>
-              <a:t>Ronia</a:t>
+              <a:t>0.531</a:t>
             </a:r>
           </a:p>
         </p:txBody>
@@ -5088,8 +4826,8 @@
         </p:nvSpPr>
         <p:spPr>
           <a:xfrm>
-            <a:off x="822960" y="5532120"/>
-            <a:ext cx="7315200" cy="365760"/>
+            <a:off x="822960" y="5623560"/>
+            <a:ext cx="2286000" cy="320040"/>
           </a:xfrm>
           <a:prstGeom prst="rect">
             <a:avLst/>
@@ -5102,15 +4840,290 @@
           </a:bodyPr>
           <a:lstStyle/>
           <a:p>
-            <a:pPr algn="l"/>
-            <a:r>
-              <a:rPr sz="1400" b="0">
-                <a:solidFill>
-                  <a:srgbClr val="94A3B8"/>
-                </a:solidFill>
-                <a:latin typeface="Calibri"/>
-              </a:rPr>
-              <a:t>Dataset: Synthetic smoke-test audio</a:t>
+            <a:pPr algn="ctr"/>
+            <a:r>
+              <a:rPr sz="1300" b="0">
+                <a:solidFill>
+                  <a:srgbClr val="C7D2FE"/>
+                </a:solidFill>
+                <a:latin typeface="Calibri"/>
+              </a:rPr>
+              <a:t>test Macro F1</a:t>
+            </a:r>
+          </a:p>
+        </p:txBody>
+      </p:sp>
+      <p:sp>
+        <p:nvSpPr>
+          <p:cNvPr id="10" name="Rounded Rectangle 9"/>
+          <p:cNvSpPr/>
+          <p:nvPr/>
+        </p:nvSpPr>
+        <p:spPr>
+          <a:xfrm>
+            <a:off x="3337560" y="4983480"/>
+            <a:ext cx="2286000" cy="1097280"/>
+          </a:xfrm>
+          <a:prstGeom prst="roundRect">
+            <a:avLst/>
+          </a:prstGeom>
+          <a:solidFill>
+            <a:srgbClr val="4338CA"/>
+          </a:solidFill>
+          <a:ln>
+            <a:noFill/>
+          </a:ln>
+          <a:effectLst/>
+        </p:spPr>
+        <p:style>
+          <a:lnRef idx="1">
+            <a:schemeClr val="accent1"/>
+          </a:lnRef>
+          <a:fillRef idx="3">
+            <a:schemeClr val="accent1"/>
+          </a:fillRef>
+          <a:effectRef idx="2">
+            <a:schemeClr val="accent1"/>
+          </a:effectRef>
+          <a:fontRef idx="minor">
+            <a:schemeClr val="lt1"/>
+          </a:fontRef>
+        </p:style>
+        <p:txBody>
+          <a:bodyPr rtlCol="0" anchor="ctr"/>
+          <a:lstStyle/>
+          <a:p>
+            <a:pPr algn="ctr"/>
+          </a:p>
+        </p:txBody>
+      </p:sp>
+      <p:sp>
+        <p:nvSpPr>
+          <p:cNvPr id="11" name="TextBox 10"/>
+          <p:cNvSpPr txBox="1"/>
+          <p:nvPr/>
+        </p:nvSpPr>
+        <p:spPr>
+          <a:xfrm>
+            <a:off x="3337560" y="5074920"/>
+            <a:ext cx="2286000" cy="548640"/>
+          </a:xfrm>
+          <a:prstGeom prst="rect">
+            <a:avLst/>
+          </a:prstGeom>
+          <a:noFill/>
+        </p:spPr>
+        <p:txBody>
+          <a:bodyPr wrap="square" anchor="t" lIns="0" rIns="0" tIns="0" bIns="0">
+            <a:spAutoFit/>
+          </a:bodyPr>
+          <a:lstStyle/>
+          <a:p>
+            <a:pPr algn="ctr"/>
+            <a:r>
+              <a:rPr sz="3000" b="1">
+                <a:solidFill>
+                  <a:srgbClr val="FFFFFF"/>
+                </a:solidFill>
+                <a:latin typeface="Calibri"/>
+              </a:rPr>
+              <a:t>56.7%</a:t>
+            </a:r>
+          </a:p>
+        </p:txBody>
+      </p:sp>
+      <p:sp>
+        <p:nvSpPr>
+          <p:cNvPr id="12" name="TextBox 11"/>
+          <p:cNvSpPr txBox="1"/>
+          <p:nvPr/>
+        </p:nvSpPr>
+        <p:spPr>
+          <a:xfrm>
+            <a:off x="3337560" y="5623560"/>
+            <a:ext cx="2286000" cy="320040"/>
+          </a:xfrm>
+          <a:prstGeom prst="rect">
+            <a:avLst/>
+          </a:prstGeom>
+          <a:noFill/>
+        </p:spPr>
+        <p:txBody>
+          <a:bodyPr wrap="square" anchor="t" lIns="0" rIns="0" tIns="0" bIns="0">
+            <a:spAutoFit/>
+          </a:bodyPr>
+          <a:lstStyle/>
+          <a:p>
+            <a:pPr algn="ctr"/>
+            <a:r>
+              <a:rPr sz="1300" b="0">
+                <a:solidFill>
+                  <a:srgbClr val="C7D2FE"/>
+                </a:solidFill>
+                <a:latin typeface="Calibri"/>
+              </a:rPr>
+              <a:t>test accuracy</a:t>
+            </a:r>
+          </a:p>
+        </p:txBody>
+      </p:sp>
+      <p:sp>
+        <p:nvSpPr>
+          <p:cNvPr id="13" name="Rounded Rectangle 12"/>
+          <p:cNvSpPr/>
+          <p:nvPr/>
+        </p:nvSpPr>
+        <p:spPr>
+          <a:xfrm>
+            <a:off x="5852160" y="4983480"/>
+            <a:ext cx="2286000" cy="1097280"/>
+          </a:xfrm>
+          <a:prstGeom prst="roundRect">
+            <a:avLst/>
+          </a:prstGeom>
+          <a:solidFill>
+            <a:srgbClr val="4338CA"/>
+          </a:solidFill>
+          <a:ln>
+            <a:noFill/>
+          </a:ln>
+          <a:effectLst/>
+        </p:spPr>
+        <p:style>
+          <a:lnRef idx="1">
+            <a:schemeClr val="accent1"/>
+          </a:lnRef>
+          <a:fillRef idx="3">
+            <a:schemeClr val="accent1"/>
+          </a:fillRef>
+          <a:effectRef idx="2">
+            <a:schemeClr val="accent1"/>
+          </a:effectRef>
+          <a:fontRef idx="minor">
+            <a:schemeClr val="lt1"/>
+          </a:fontRef>
+        </p:style>
+        <p:txBody>
+          <a:bodyPr rtlCol="0" anchor="ctr"/>
+          <a:lstStyle/>
+          <a:p>
+            <a:pPr algn="ctr"/>
+          </a:p>
+        </p:txBody>
+      </p:sp>
+      <p:sp>
+        <p:nvSpPr>
+          <p:cNvPr id="14" name="TextBox 13"/>
+          <p:cNvSpPr txBox="1"/>
+          <p:nvPr/>
+        </p:nvSpPr>
+        <p:spPr>
+          <a:xfrm>
+            <a:off x="5852160" y="5074920"/>
+            <a:ext cx="2286000" cy="548640"/>
+          </a:xfrm>
+          <a:prstGeom prst="rect">
+            <a:avLst/>
+          </a:prstGeom>
+          <a:noFill/>
+        </p:spPr>
+        <p:txBody>
+          <a:bodyPr wrap="square" anchor="t" lIns="0" rIns="0" tIns="0" bIns="0">
+            <a:spAutoFit/>
+          </a:bodyPr>
+          <a:lstStyle/>
+          <a:p>
+            <a:pPr algn="ctr"/>
+            <a:r>
+              <a:rPr sz="3000" b="1">
+                <a:solidFill>
+                  <a:srgbClr val="FFFFFF"/>
+                </a:solidFill>
+                <a:latin typeface="Calibri"/>
+              </a:rPr>
+              <a:t>79,080</a:t>
+            </a:r>
+          </a:p>
+        </p:txBody>
+      </p:sp>
+      <p:sp>
+        <p:nvSpPr>
+          <p:cNvPr id="15" name="TextBox 14"/>
+          <p:cNvSpPr txBox="1"/>
+          <p:nvPr/>
+        </p:nvSpPr>
+        <p:spPr>
+          <a:xfrm>
+            <a:off x="5852160" y="5623560"/>
+            <a:ext cx="2286000" cy="320040"/>
+          </a:xfrm>
+          <a:prstGeom prst="rect">
+            <a:avLst/>
+          </a:prstGeom>
+          <a:noFill/>
+        </p:spPr>
+        <p:txBody>
+          <a:bodyPr wrap="square" anchor="t" lIns="0" rIns="0" tIns="0" bIns="0">
+            <a:spAutoFit/>
+          </a:bodyPr>
+          <a:lstStyle/>
+          <a:p>
+            <a:pPr algn="ctr"/>
+            <a:r>
+              <a:rPr sz="1300" b="0">
+                <a:solidFill>
+                  <a:srgbClr val="C7D2FE"/>
+                </a:solidFill>
+                <a:latin typeface="Calibri"/>
+              </a:rPr>
+              <a:t>parameters</a:t>
+            </a:r>
+          </a:p>
+        </p:txBody>
+      </p:sp>
+      <p:sp>
+        <p:nvSpPr>
+          <p:cNvPr id="16" name="TextBox 15"/>
+          <p:cNvSpPr txBox="1"/>
+          <p:nvPr/>
+        </p:nvSpPr>
+        <p:spPr>
+          <a:xfrm>
+            <a:off x="8503920" y="5074920"/>
+            <a:ext cx="3108960" cy="822960"/>
+          </a:xfrm>
+          <a:prstGeom prst="rect">
+            <a:avLst/>
+          </a:prstGeom>
+          <a:noFill/>
+        </p:spPr>
+        <p:txBody>
+          <a:bodyPr wrap="square" anchor="t" lIns="0" rIns="0" tIns="0" bIns="0">
+            <a:spAutoFit/>
+          </a:bodyPr>
+          <a:lstStyle/>
+          <a:p>
+            <a:pPr algn="r"/>
+            <a:r>
+              <a:rPr sz="1600" b="0">
+                <a:solidFill>
+                  <a:srgbClr val="FFFFFF"/>
+                </a:solidFill>
+                <a:latin typeface="Calibri"/>
+              </a:rPr>
+              <a:t>Presented by Ronia Rosario K</a:t>
+            </a:r>
+          </a:p>
+          <a:p>
+            <a:pPr algn="r"/>
+            <a:r>
+              <a:rPr sz="1600" b="0">
+                <a:solidFill>
+                  <a:srgbClr val="FFFFFF"/>
+                </a:solidFill>
+                <a:latin typeface="Calibri"/>
+              </a:rPr>
+              <a:t>Machine Learning Internship</a:t>
             </a:r>
           </a:p>
         </p:txBody>
@@ -5242,7 +5255,7 @@
                 </a:solidFill>
                 <a:latin typeface="Calibri"/>
               </a:rPr>
-              <a:t>Results: per-class F1 and errors</a:t>
+              <a:t>Confusion matrix and error analysis</a:t>
             </a:r>
           </a:p>
         </p:txBody>
@@ -5317,129 +5330,354 @@
           </a:p>
         </p:txBody>
       </p:sp>
-      <p:sp>
-        <p:nvSpPr>
-          <p:cNvPr id="7" name="Rounded Rectangle 6"/>
-          <p:cNvSpPr/>
-          <p:nvPr/>
-        </p:nvSpPr>
-        <p:spPr>
-          <a:xfrm>
-            <a:off x="6583680" y="347472"/>
-            <a:ext cx="4983480" cy="310896"/>
-          </a:xfrm>
-          <a:prstGeom prst="roundRect">
-            <a:avLst/>
-          </a:prstGeom>
-          <a:solidFill>
-            <a:srgbClr val="FEF3C7"/>
-          </a:solidFill>
-          <a:ln w="15875">
-            <a:solidFill>
-              <a:srgbClr val="F59E0B"/>
-            </a:solidFill>
-          </a:ln>
-          <a:effectLst/>
-        </p:spPr>
-        <p:style>
-          <a:lnRef idx="1">
-            <a:schemeClr val="accent1"/>
-          </a:lnRef>
-          <a:fillRef idx="3">
-            <a:schemeClr val="accent1"/>
-          </a:fillRef>
-          <a:effectRef idx="2">
-            <a:schemeClr val="accent1"/>
-          </a:effectRef>
-          <a:fontRef idx="minor">
-            <a:schemeClr val="lt1"/>
-          </a:fontRef>
-        </p:style>
-        <p:txBody>
-          <a:bodyPr rtlCol="0" anchor="ctr"/>
-          <a:lstStyle/>
-          <a:p>
-            <a:pPr algn="ctr"/>
-          </a:p>
-        </p:txBody>
-      </p:sp>
-      <p:sp>
-        <p:nvSpPr>
-          <p:cNvPr id="8" name="TextBox 7"/>
-          <p:cNvSpPr txBox="1"/>
-          <p:nvPr/>
-        </p:nvSpPr>
-        <p:spPr>
-          <a:xfrm>
-            <a:off x="6583680" y="347472"/>
-            <a:ext cx="4983480" cy="310896"/>
-          </a:xfrm>
-          <a:prstGeom prst="rect">
-            <a:avLst/>
-          </a:prstGeom>
-          <a:noFill/>
-        </p:spPr>
-        <p:txBody>
-          <a:bodyPr wrap="square" anchor="ctr" lIns="0" rIns="0" tIns="0" bIns="0">
-            <a:spAutoFit/>
-          </a:bodyPr>
-          <a:lstStyle/>
-          <a:p>
-            <a:pPr algn="ctr"/>
-            <a:r>
-              <a:rPr sz="1100" b="1">
-                <a:solidFill>
-                  <a:srgbClr val="92400E"/>
-                </a:solidFill>
-                <a:latin typeface="Calibri"/>
-              </a:rPr>
-              <a:t>SYNTHETIC SMOKE-TEST DATA - NOT RAVDESS RESULTS</a:t>
-            </a:r>
-          </a:p>
-        </p:txBody>
-      </p:sp>
-      <p:graphicFrame>
-        <p:nvGraphicFramePr>
-          <p:cNvPr id="9" name="Chart 8"/>
-          <p:cNvGraphicFramePr>
-            <a:graphicFrameLocks noGrp="1"/>
-          </p:cNvGraphicFramePr>
-          <p:nvPr/>
-        </p:nvGraphicFramePr>
-        <p:xfrm>
-          <a:off x="457200" y="1554480"/>
-          <a:ext cx="6492240" cy="4663440"/>
-        </p:xfrm>
-        <a:graphic>
-          <a:graphicData uri="http://schemas.openxmlformats.org/drawingml/2006/chart">
-            <c:chart xmlns:c="http://schemas.openxmlformats.org/drawingml/2006/chart" r:id="rId3"/>
-          </a:graphicData>
-        </a:graphic>
-      </p:graphicFrame>
       <p:pic>
         <p:nvPicPr>
-          <p:cNvPr id="10" name="Picture 9" descr="confusion_matrix.png"/>
+          <p:cNvPr id="7" name="Picture 6" descr="final_confusion_matrix.png"/>
           <p:cNvPicPr>
             <a:picLocks noChangeAspect="1"/>
           </p:cNvPicPr>
           <p:nvPr/>
         </p:nvPicPr>
         <p:blipFill>
-          <a:blip r:embed="rId4"/>
+          <a:blip r:embed="rId3"/>
           <a:stretch>
             <a:fillRect/>
           </a:stretch>
         </p:blipFill>
         <p:spPr>
           <a:xfrm>
-            <a:off x="7086600" y="1600200"/>
-            <a:ext cx="5596128" cy="4663440"/>
+            <a:off x="548640" y="1508760"/>
+            <a:ext cx="5815584" cy="4846320"/>
           </a:xfrm>
           <a:prstGeom prst="rect">
             <a:avLst/>
           </a:prstGeom>
         </p:spPr>
       </p:pic>
+      <p:sp>
+        <p:nvSpPr>
+          <p:cNvPr id="8" name="TextBox 7"/>
+          <p:cNvSpPr txBox="1"/>
+          <p:nvPr/>
+        </p:nvSpPr>
+        <p:spPr>
+          <a:xfrm>
+            <a:off x="6309360" y="1554480"/>
+            <a:ext cx="5303520" cy="365760"/>
+          </a:xfrm>
+          <a:prstGeom prst="rect">
+            <a:avLst/>
+          </a:prstGeom>
+          <a:noFill/>
+        </p:spPr>
+        <p:txBody>
+          <a:bodyPr wrap="square" anchor="t" lIns="0" rIns="0" tIns="0" bIns="0">
+            <a:spAutoFit/>
+          </a:bodyPr>
+          <a:lstStyle/>
+          <a:p>
+            <a:pPr algn="l"/>
+            <a:r>
+              <a:rPr sz="1800" b="1">
+                <a:solidFill>
+                  <a:srgbClr val="0F172A"/>
+                </a:solidFill>
+                <a:latin typeface="Calibri"/>
+              </a:rPr>
+              <a:t>What the model gets right and wrong</a:t>
+            </a:r>
+          </a:p>
+        </p:txBody>
+      </p:sp>
+      <p:sp>
+        <p:nvSpPr>
+          <p:cNvPr id="9" name="TextBox 8"/>
+          <p:cNvSpPr txBox="1"/>
+          <p:nvPr/>
+        </p:nvSpPr>
+        <p:spPr>
+          <a:xfrm>
+            <a:off x="6309360" y="2011680"/>
+            <a:ext cx="5394960" cy="457200"/>
+          </a:xfrm>
+          <a:prstGeom prst="rect">
+            <a:avLst/>
+          </a:prstGeom>
+          <a:noFill/>
+        </p:spPr>
+        <p:txBody>
+          <a:bodyPr wrap="square" lIns="0" rIns="0" tIns="0">
+            <a:spAutoFit/>
+          </a:bodyPr>
+          <a:lstStyle/>
+          <a:p>
+            <a:pPr>
+              <a:spcAft>
+                <a:spcPts val="700"/>
+              </a:spcAft>
+            </a:pPr>
+            <a:r>
+              <a:rPr sz="800">
+                <a:solidFill>
+                  <a:srgbClr val="4F46E5"/>
+                </a:solidFill>
+              </a:rPr>
+              <a:t>■  </a:t>
+            </a:r>
+            <a:r>
+              <a:rPr b="1" sz="1400">
+                <a:solidFill>
+                  <a:srgbClr val="1E293B"/>
+                </a:solidFill>
+                <a:latin typeface="Calibri"/>
+              </a:rPr>
+              <a:t>Best:</a:t>
+            </a:r>
+            <a:r>
+              <a:rPr sz="1400">
+                <a:solidFill>
+                  <a:srgbClr val="1E293B"/>
+                </a:solidFill>
+                <a:latin typeface="Calibri"/>
+              </a:rPr>
+              <a:t>  surprised (F1 0.806), angry recall 0.906</a:t>
+            </a:r>
+          </a:p>
+          <a:p>
+            <a:pPr>
+              <a:spcAft>
+                <a:spcPts val="700"/>
+              </a:spcAft>
+            </a:pPr>
+            <a:r>
+              <a:rPr sz="800">
+                <a:solidFill>
+                  <a:srgbClr val="4F46E5"/>
+                </a:solidFill>
+              </a:rPr>
+              <a:t>■  </a:t>
+            </a:r>
+            <a:r>
+              <a:rPr b="1" sz="1400">
+                <a:solidFill>
+                  <a:srgbClr val="1E293B"/>
+                </a:solidFill>
+                <a:latin typeface="Calibri"/>
+              </a:rPr>
+              <a:t>Lowest recall:</a:t>
+            </a:r>
+            <a:r>
+              <a:rPr sz="1400">
+                <a:solidFill>
+                  <a:srgbClr val="1E293B"/>
+                </a:solidFill>
+                <a:latin typeface="Calibri"/>
+              </a:rPr>
+              <a:t>  sad 0.156, fearful 0.250, happy 0.344</a:t>
+            </a:r>
+          </a:p>
+          <a:p>
+            <a:pPr>
+              <a:spcAft>
+                <a:spcPts val="700"/>
+              </a:spcAft>
+            </a:pPr>
+            <a:r>
+              <a:rPr sz="800">
+                <a:solidFill>
+                  <a:srgbClr val="4F46E5"/>
+                </a:solidFill>
+              </a:rPr>
+              <a:t>■  </a:t>
+            </a:r>
+            <a:r>
+              <a:rPr b="1" sz="1400">
+                <a:solidFill>
+                  <a:srgbClr val="1E293B"/>
+                </a:solidFill>
+                <a:latin typeface="Calibri"/>
+              </a:rPr>
+              <a:t>Neutral over-predicted:</a:t>
+            </a:r>
+            <a:r>
+              <a:rPr sz="1400">
+                <a:solidFill>
+                  <a:srgbClr val="1E293B"/>
+                </a:solidFill>
+                <a:latin typeface="Calibri"/>
+              </a:rPr>
+              <a:t>  precision only 0.297</a:t>
+            </a:r>
+          </a:p>
+          <a:p>
+            <a:pPr>
+              <a:spcAft>
+                <a:spcPts val="700"/>
+              </a:spcAft>
+            </a:pPr>
+            <a:r>
+              <a:rPr sz="800">
+                <a:solidFill>
+                  <a:srgbClr val="4F46E5"/>
+                </a:solidFill>
+              </a:rPr>
+              <a:t>■  </a:t>
+            </a:r>
+            <a:r>
+              <a:rPr b="1" sz="1400">
+                <a:solidFill>
+                  <a:srgbClr val="1E293B"/>
+                </a:solidFill>
+                <a:latin typeface="Calibri"/>
+              </a:rPr>
+              <a:t>sad -&gt; calm</a:t>
+            </a:r>
+            <a:r>
+              <a:rPr sz="1400">
+                <a:solidFill>
+                  <a:srgbClr val="1E293B"/>
+                </a:solidFill>
+                <a:latin typeface="Calibri"/>
+              </a:rPr>
+              <a:t>  12 clips (38%)</a:t>
+            </a:r>
+          </a:p>
+          <a:p>
+            <a:pPr>
+              <a:spcAft>
+                <a:spcPts val="700"/>
+              </a:spcAft>
+            </a:pPr>
+            <a:r>
+              <a:rPr sz="800">
+                <a:solidFill>
+                  <a:srgbClr val="4F46E5"/>
+                </a:solidFill>
+              </a:rPr>
+              <a:t>■  </a:t>
+            </a:r>
+            <a:r>
+              <a:rPr b="1" sz="1400">
+                <a:solidFill>
+                  <a:srgbClr val="1E293B"/>
+                </a:solidFill>
+                <a:latin typeface="Calibri"/>
+              </a:rPr>
+              <a:t>happy -&gt; neutral</a:t>
+            </a:r>
+            <a:r>
+              <a:rPr sz="1400">
+                <a:solidFill>
+                  <a:srgbClr val="1E293B"/>
+                </a:solidFill>
+                <a:latin typeface="Calibri"/>
+              </a:rPr>
+              <a:t>  8 clips (25%)</a:t>
+            </a:r>
+          </a:p>
+          <a:p>
+            <a:pPr>
+              <a:spcAft>
+                <a:spcPts val="700"/>
+              </a:spcAft>
+            </a:pPr>
+            <a:r>
+              <a:rPr sz="800">
+                <a:solidFill>
+                  <a:srgbClr val="4F46E5"/>
+                </a:solidFill>
+              </a:rPr>
+              <a:t>■  </a:t>
+            </a:r>
+            <a:r>
+              <a:rPr b="1" sz="1400">
+                <a:solidFill>
+                  <a:srgbClr val="1E293B"/>
+                </a:solidFill>
+                <a:latin typeface="Calibri"/>
+              </a:rPr>
+              <a:t>happy -&gt; surprised</a:t>
+            </a:r>
+            <a:r>
+              <a:rPr sz="1400">
+                <a:solidFill>
+                  <a:srgbClr val="1E293B"/>
+                </a:solidFill>
+                <a:latin typeface="Calibri"/>
+              </a:rPr>
+              <a:t>  8 clips (25%)</a:t>
+            </a:r>
+          </a:p>
+          <a:p>
+            <a:pPr>
+              <a:spcAft>
+                <a:spcPts val="700"/>
+              </a:spcAft>
+            </a:pPr>
+            <a:r>
+              <a:rPr sz="800">
+                <a:solidFill>
+                  <a:srgbClr val="4F46E5"/>
+                </a:solidFill>
+              </a:rPr>
+              <a:t>■  </a:t>
+            </a:r>
+            <a:r>
+              <a:rPr b="1" sz="1400">
+                <a:solidFill>
+                  <a:srgbClr val="1E293B"/>
+                </a:solidFill>
+                <a:latin typeface="Calibri"/>
+              </a:rPr>
+              <a:t>sad -&gt; neutral</a:t>
+            </a:r>
+            <a:r>
+              <a:rPr sz="1400">
+                <a:solidFill>
+                  <a:srgbClr val="1E293B"/>
+                </a:solidFill>
+                <a:latin typeface="Calibri"/>
+              </a:rPr>
+              <a:t>  8 clips (25%)</a:t>
+            </a:r>
+          </a:p>
+        </p:txBody>
+      </p:sp>
+      <p:sp>
+        <p:nvSpPr>
+          <p:cNvPr id="10" name="TextBox 9"/>
+          <p:cNvSpPr txBox="1"/>
+          <p:nvPr/>
+        </p:nvSpPr>
+        <p:spPr>
+          <a:xfrm>
+            <a:off x="6309360" y="5486400"/>
+            <a:ext cx="5303520" cy="822960"/>
+          </a:xfrm>
+          <a:prstGeom prst="rect">
+            <a:avLst/>
+          </a:prstGeom>
+          <a:noFill/>
+        </p:spPr>
+        <p:txBody>
+          <a:bodyPr wrap="square" anchor="t" lIns="0" rIns="0" tIns="0" bIns="0">
+            <a:spAutoFit/>
+          </a:bodyPr>
+          <a:lstStyle/>
+          <a:p>
+            <a:pPr algn="l"/>
+            <a:r>
+              <a:rPr sz="1200" b="0">
+                <a:solidFill>
+                  <a:srgbClr val="64748B"/>
+                </a:solidFill>
+                <a:latin typeface="Calibri"/>
+              </a:rPr>
+              <a:t>Possible reasons (untested): similar low-energy delivery in sad / calm / neutral, shared high arousal between fearful / angry / happy, few training actors.</a:t>
+            </a:r>
+          </a:p>
+        </p:txBody>
+      </p:sp>
     </p:spTree>
   </p:cSld>
   <p:clrMapOvr>
@@ -5532,7 +5770,7 @@
                 </a:solidFill>
                 <a:latin typeface="Calibri"/>
               </a:rPr>
-              <a:t>ANALYSIS</a:t>
+              <a:t>HONEST ASSESSMENT</a:t>
             </a:r>
           </a:p>
         </p:txBody>
@@ -5567,7 +5805,7 @@
                 </a:solidFill>
                 <a:latin typeface="Calibri"/>
               </a:rPr>
-              <a:t>Discussion and limitations</a:t>
+              <a:t>Limitations and future work</a:t>
             </a:r>
           </a:p>
         </p:txBody>
@@ -5650,8 +5888,8 @@
         </p:nvSpPr>
         <p:spPr>
           <a:xfrm>
-            <a:off x="640080" y="1737360"/>
-            <a:ext cx="5394960" cy="1828800"/>
+            <a:off x="640080" y="1600200"/>
+            <a:ext cx="5486400" cy="4572000"/>
           </a:xfrm>
           <a:prstGeom prst="roundRect">
             <a:avLst/>
@@ -5694,14 +5932,14 @@
         </p:nvSpPr>
         <p:spPr>
           <a:xfrm>
-            <a:off x="640080" y="1901952"/>
-            <a:ext cx="73152" cy="1499616"/>
+            <a:off x="640080" y="1764792"/>
+            <a:ext cx="73152" cy="4242816"/>
           </a:xfrm>
           <a:prstGeom prst="rect">
             <a:avLst/>
           </a:prstGeom>
           <a:solidFill>
-            <a:srgbClr val="4F46E5"/>
+            <a:srgbClr val="F59E0B"/>
           </a:solidFill>
           <a:ln>
             <a:noFill/>
@@ -5738,8 +5976,8 @@
         </p:nvSpPr>
         <p:spPr>
           <a:xfrm>
-            <a:off x="914400" y="1920240"/>
-            <a:ext cx="4937760" cy="365760"/>
+            <a:off x="914400" y="1783080"/>
+            <a:ext cx="5029200" cy="365760"/>
           </a:xfrm>
           <a:prstGeom prst="rect">
             <a:avLst/>
@@ -5760,7 +5998,7 @@
                 </a:solidFill>
                 <a:latin typeface="Calibri"/>
               </a:rPr>
-              <a:t>Findings</a:t>
+              <a:t>Limitations</a:t>
             </a:r>
           </a:p>
         </p:txBody>
@@ -5773,8 +6011,8 @@
         </p:nvSpPr>
         <p:spPr>
           <a:xfrm>
-            <a:off x="914400" y="2359152"/>
-            <a:ext cx="4937760" cy="1097280"/>
+            <a:off x="914400" y="2221992"/>
+            <a:ext cx="5029200" cy="3840480"/>
           </a:xfrm>
           <a:prstGeom prst="rect">
             <a:avLst/>
@@ -5789,13 +6027,73 @@
           <a:p>
             <a:pPr algn="l"/>
             <a:r>
-              <a:rPr sz="1400" b="0">
+              <a:rPr sz="1900" b="0">
                 <a:solidFill>
                   <a:srgbClr val="1E293B"/>
                 </a:solidFill>
                 <a:latin typeface="Calibri"/>
               </a:rPr>
-              <a:t>Best class: calm (F1 1.000). Weakest: happy (F1 0.690). Check the confusion matrix for arousal-similar pairs.</a:t>
+              <a:t>Small, acted dataset (24 actors, 2 sentences)</a:t>
+            </a:r>
+          </a:p>
+          <a:p>
+            <a:pPr algn="l"/>
+            <a:r>
+              <a:rPr sz="1900" b="0">
+                <a:solidFill>
+                  <a:srgbClr val="1E293B"/>
+                </a:solidFill>
+                <a:latin typeface="Calibri"/>
+              </a:rPr>
+              <a:t>Only 4 test actors: noisy estimate</a:t>
+            </a:r>
+          </a:p>
+          <a:p>
+            <a:pPr algn="l"/>
+            <a:r>
+              <a:rPr sz="1900" b="0">
+                <a:solidFill>
+                  <a:srgbClr val="1E293B"/>
+                </a:solidFill>
+                <a:latin typeface="Calibri"/>
+              </a:rPr>
+              <a:t>Neutral class has half the clips</a:t>
+            </a:r>
+          </a:p>
+          <a:p>
+            <a:pPr algn="l"/>
+            <a:r>
+              <a:rPr sz="1900" b="0">
+                <a:solidFill>
+                  <a:srgbClr val="1E293B"/>
+                </a:solidFill>
+                <a:latin typeface="Calibri"/>
+              </a:rPr>
+              <a:t>Experiments 1-3 compared with test scores visible: mildly optimistic</a:t>
+            </a:r>
+          </a:p>
+          <a:p>
+            <a:pPr algn="l"/>
+            <a:r>
+              <a:rPr sz="1900" b="0">
+                <a:solidFill>
+                  <a:srgbClr val="1E293B"/>
+                </a:solidFill>
+                <a:latin typeface="Calibri"/>
+              </a:rPr>
+              <a:t>No noise / cross-corpus / fairness tests</a:t>
+            </a:r>
+          </a:p>
+          <a:p>
+            <a:pPr algn="l"/>
+            <a:r>
+              <a:rPr sz="1900" b="0">
+                <a:solidFill>
+                  <a:srgbClr val="1E293B"/>
+                </a:solidFill>
+                <a:latin typeface="Calibri"/>
+              </a:rPr>
+              <a:t>Experiment 4 is a single run (one seed)</a:t>
             </a:r>
           </a:p>
         </p:txBody>
@@ -5808,8 +6106,8 @@
         </p:nvSpPr>
         <p:spPr>
           <a:xfrm>
-            <a:off x="640080" y="3794760"/>
-            <a:ext cx="5394960" cy="2286000"/>
+            <a:off x="6309360" y="1600200"/>
+            <a:ext cx="5303520" cy="4572000"/>
           </a:xfrm>
           <a:prstGeom prst="roundRect">
             <a:avLst/>
@@ -5852,8 +6150,8 @@
         </p:nvSpPr>
         <p:spPr>
           <a:xfrm>
-            <a:off x="640080" y="3959352"/>
-            <a:ext cx="73152" cy="1956816"/>
+            <a:off x="6309360" y="1764792"/>
+            <a:ext cx="73152" cy="4242816"/>
           </a:xfrm>
           <a:prstGeom prst="rect">
             <a:avLst/>
@@ -5896,8 +6194,8 @@
         </p:nvSpPr>
         <p:spPr>
           <a:xfrm>
-            <a:off x="914400" y="3977640"/>
-            <a:ext cx="4937760" cy="365760"/>
+            <a:off x="6583680" y="1783080"/>
+            <a:ext cx="4846320" cy="365760"/>
           </a:xfrm>
           <a:prstGeom prst="rect">
             <a:avLst/>
@@ -5918,7 +6216,7 @@
                 </a:solidFill>
                 <a:latin typeface="Calibri"/>
               </a:rPr>
-              <a:t>Why speaker-independent matters</a:t>
+              <a:t>Future work</a:t>
             </a:r>
           </a:p>
         </p:txBody>
@@ -5931,8 +6229,8 @@
         </p:nvSpPr>
         <p:spPr>
           <a:xfrm>
-            <a:off x="914400" y="4416552"/>
-            <a:ext cx="4937760" cy="1554480"/>
+            <a:off x="6583680" y="2221992"/>
+            <a:ext cx="4846320" cy="3840480"/>
           </a:xfrm>
           <a:prstGeom prst="rect">
             <a:avLst/>
@@ -5947,207 +6245,61 @@
           <a:p>
             <a:pPr algn="l"/>
             <a:r>
-              <a:rPr sz="1400" b="0">
+              <a:rPr sz="1900" b="0">
                 <a:solidFill>
                   <a:srgbClr val="1E293B"/>
                 </a:solidFill>
                 <a:latin typeface="Calibri"/>
               </a:rPr>
-              <a:t>A clip-level random split lets the model recognise the voice, inflating scores. Our actor-level split measures generalisation to new speakers.</a:t>
-            </a:r>
-          </a:p>
-        </p:txBody>
-      </p:sp>
-      <p:sp>
-        <p:nvSpPr>
-          <p:cNvPr id="15" name="Rounded Rectangle 14"/>
-          <p:cNvSpPr/>
-          <p:nvPr/>
-        </p:nvSpPr>
-        <p:spPr>
-          <a:xfrm>
-            <a:off x="6309360" y="1737360"/>
-            <a:ext cx="5257800" cy="4343400"/>
-          </a:xfrm>
-          <a:prstGeom prst="roundRect">
-            <a:avLst/>
-          </a:prstGeom>
-          <a:solidFill>
-            <a:srgbClr val="EEF2FF"/>
-          </a:solidFill>
-          <a:ln>
-            <a:noFill/>
-          </a:ln>
-          <a:effectLst/>
-        </p:spPr>
-        <p:style>
-          <a:lnRef idx="1">
-            <a:schemeClr val="accent1"/>
-          </a:lnRef>
-          <a:fillRef idx="3">
-            <a:schemeClr val="accent1"/>
-          </a:fillRef>
-          <a:effectRef idx="2">
-            <a:schemeClr val="accent1"/>
-          </a:effectRef>
-          <a:fontRef idx="minor">
-            <a:schemeClr val="lt1"/>
-          </a:fontRef>
-        </p:style>
-        <p:txBody>
-          <a:bodyPr rtlCol="0" anchor="ctr"/>
-          <a:lstStyle/>
-          <a:p>
-            <a:pPr algn="ctr"/>
-          </a:p>
-        </p:txBody>
-      </p:sp>
-      <p:sp>
-        <p:nvSpPr>
-          <p:cNvPr id="16" name="Rectangle 15"/>
-          <p:cNvSpPr/>
-          <p:nvPr/>
-        </p:nvSpPr>
-        <p:spPr>
-          <a:xfrm>
-            <a:off x="6309360" y="1901952"/>
-            <a:ext cx="73152" cy="4014215"/>
-          </a:xfrm>
-          <a:prstGeom prst="rect">
-            <a:avLst/>
-          </a:prstGeom>
-          <a:solidFill>
-            <a:srgbClr val="F59E0B"/>
-          </a:solidFill>
-          <a:ln>
-            <a:noFill/>
-          </a:ln>
-          <a:effectLst/>
-        </p:spPr>
-        <p:style>
-          <a:lnRef idx="1">
-            <a:schemeClr val="accent1"/>
-          </a:lnRef>
-          <a:fillRef idx="3">
-            <a:schemeClr val="accent1"/>
-          </a:fillRef>
-          <a:effectRef idx="2">
-            <a:schemeClr val="accent1"/>
-          </a:effectRef>
-          <a:fontRef idx="minor">
-            <a:schemeClr val="lt1"/>
-          </a:fontRef>
-        </p:style>
-        <p:txBody>
-          <a:bodyPr rtlCol="0" anchor="ctr"/>
-          <a:lstStyle/>
-          <a:p>
-            <a:pPr algn="ctr"/>
-          </a:p>
-        </p:txBody>
-      </p:sp>
-      <p:sp>
-        <p:nvSpPr>
-          <p:cNvPr id="17" name="TextBox 16"/>
-          <p:cNvSpPr txBox="1"/>
-          <p:nvPr/>
-        </p:nvSpPr>
-        <p:spPr>
-          <a:xfrm>
-            <a:off x="6583680" y="1920240"/>
-            <a:ext cx="4800600" cy="365760"/>
-          </a:xfrm>
-          <a:prstGeom prst="rect">
-            <a:avLst/>
-          </a:prstGeom>
-          <a:noFill/>
-        </p:spPr>
-        <p:txBody>
-          <a:bodyPr wrap="square" anchor="t" lIns="0" rIns="0" tIns="0" bIns="0">
-            <a:spAutoFit/>
-          </a:bodyPr>
-          <a:lstStyle/>
+              <a:t>Repeat Exp 3 vs 4 with several seeds</a:t>
+            </a:r>
+          </a:p>
           <a:p>
             <a:pPr algn="l"/>
             <a:r>
-              <a:rPr sz="1700" b="1">
-                <a:solidFill>
-                  <a:srgbClr val="0F172A"/>
-                </a:solidFill>
-                <a:latin typeface="Calibri"/>
-              </a:rPr>
-              <a:t>Limitations</a:t>
-            </a:r>
-          </a:p>
-        </p:txBody>
-      </p:sp>
-      <p:sp>
-        <p:nvSpPr>
-          <p:cNvPr id="18" name="TextBox 17"/>
-          <p:cNvSpPr txBox="1"/>
-          <p:nvPr/>
-        </p:nvSpPr>
-        <p:spPr>
-          <a:xfrm>
-            <a:off x="6583680" y="2359152"/>
-            <a:ext cx="4800600" cy="3611880"/>
-          </a:xfrm>
-          <a:prstGeom prst="rect">
-            <a:avLst/>
-          </a:prstGeom>
-          <a:noFill/>
-        </p:spPr>
-        <p:txBody>
-          <a:bodyPr wrap="square" anchor="t" lIns="0" rIns="0" tIns="0" bIns="0">
-            <a:spAutoFit/>
-          </a:bodyPr>
-          <a:lstStyle/>
+              <a:rPr sz="1900" b="0">
+                <a:solidFill>
+                  <a:srgbClr val="1E293B"/>
+                </a:solidFill>
+                <a:latin typeface="Calibri"/>
+              </a:rPr>
+              <a:t>Actor-grouped cross-validation</a:t>
+            </a:r>
+          </a:p>
           <a:p>
             <a:pPr algn="l"/>
             <a:r>
-              <a:rPr sz="1500" b="0">
+              <a:rPr sz="1900" b="0">
                 <a:solidFill>
                   <a:srgbClr val="1E293B"/>
                 </a:solidFill>
                 <a:latin typeface="Calibri"/>
               </a:rPr>
-              <a:t>Acted speech, 24 speakers, two sentences</a:t>
+              <a:t>SpecAugment, mixup, more corpora (TESS, CREMA-D)</a:t>
             </a:r>
           </a:p>
           <a:p>
             <a:pPr algn="l"/>
             <a:r>
-              <a:rPr sz="1500" b="0">
+              <a:rPr sz="1900" b="0">
                 <a:solidFill>
                   <a:srgbClr val="1E293B"/>
                 </a:solidFill>
                 <a:latin typeface="Calibri"/>
               </a:rPr>
-              <a:t>Four test actors -&gt; high variance; use speaker-grouped k-fold</a:t>
+              <a:t>Prosodic features / pre-trained speech encoders</a:t>
             </a:r>
           </a:p>
           <a:p>
             <a:pPr algn="l"/>
             <a:r>
-              <a:rPr sz="1500" b="0">
+              <a:rPr sz="1900" b="0">
                 <a:solidFill>
                   <a:srgbClr val="1E293B"/>
                 </a:solidFill>
                 <a:latin typeface="Calibri"/>
               </a:rPr>
-              <a:t>MFCC-only: weak on valence</a:t>
-            </a:r>
-          </a:p>
-          <a:p>
-            <a:pPr algn="l"/>
-            <a:r>
-              <a:rPr sz="1500" b="0">
-                <a:solidFill>
-                  <a:srgbClr val="1E293B"/>
-                </a:solidFill>
-                <a:latin typeface="Calibri"/>
-              </a:rPr>
-              <a:t>No fairness / demographic analysis</a:t>
+              <a:t>Real-time demo with privacy safeguards</a:t>
             </a:r>
           </a:p>
         </p:txBody>
@@ -6244,7 +6396,7 @@
                 </a:solidFill>
                 <a:latin typeface="Calibri"/>
               </a:rPr>
-              <a:t>WRAP-UP</a:t>
+              <a:t>SUMMARY</a:t>
             </a:r>
           </a:p>
         </p:txBody>
@@ -6279,7 +6431,7 @@
                 </a:solidFill>
                 <a:latin typeface="Calibri"/>
               </a:rPr>
-              <a:t>Conclusion and future work</a:t>
+              <a:t>Conclusion</a:t>
             </a:r>
           </a:p>
         </p:txBody>
@@ -6356,60 +6508,237 @@
       </p:sp>
       <p:sp>
         <p:nvSpPr>
-          <p:cNvPr id="7" name="Rounded Rectangle 6"/>
+          <p:cNvPr id="7" name="TextBox 6"/>
+          <p:cNvSpPr txBox="1"/>
+          <p:nvPr/>
+        </p:nvSpPr>
+        <p:spPr>
+          <a:xfrm>
+            <a:off x="640080" y="1645920"/>
+            <a:ext cx="6766560" cy="457200"/>
+          </a:xfrm>
+          <a:prstGeom prst="rect">
+            <a:avLst/>
+          </a:prstGeom>
+          <a:noFill/>
+        </p:spPr>
+        <p:txBody>
+          <a:bodyPr wrap="square" lIns="0" rIns="0" tIns="0">
+            <a:spAutoFit/>
+          </a:bodyPr>
+          <a:lstStyle/>
+          <a:p>
+            <a:pPr>
+              <a:spcAft>
+                <a:spcPts val="1200"/>
+              </a:spcAft>
+            </a:pPr>
+            <a:r>
+              <a:rPr sz="1100">
+                <a:solidFill>
+                  <a:srgbClr val="4F46E5"/>
+                </a:solidFill>
+              </a:rPr>
+              <a:t>■  </a:t>
+            </a:r>
+            <a:r>
+              <a:rPr b="1" sz="1700">
+                <a:solidFill>
+                  <a:srgbClr val="1E293B"/>
+                </a:solidFill>
+                <a:latin typeface="Calibri"/>
+              </a:rPr>
+              <a:t>Delivered</a:t>
+            </a:r>
+            <a:r>
+              <a:rPr sz="1700">
+                <a:solidFill>
+                  <a:srgbClr val="1E293B"/>
+                </a:solidFill>
+                <a:latin typeface="Calibri"/>
+              </a:rPr>
+              <a:t>  every requirement: data, preprocessing, MFCC, deep model, F1 evaluation</a:t>
+            </a:r>
+          </a:p>
+          <a:p>
+            <a:pPr>
+              <a:spcAft>
+                <a:spcPts val="1200"/>
+              </a:spcAft>
+            </a:pPr>
+            <a:r>
+              <a:rPr sz="1100">
+                <a:solidFill>
+                  <a:srgbClr val="4F46E5"/>
+                </a:solidFill>
+              </a:rPr>
+              <a:t>■  </a:t>
+            </a:r>
+            <a:r>
+              <a:rPr b="1" sz="1700">
+                <a:solidFill>
+                  <a:srgbClr val="1E293B"/>
+                </a:solidFill>
+                <a:latin typeface="Calibri"/>
+              </a:rPr>
+              <a:t>Selected model</a:t>
+            </a:r>
+            <a:r>
+              <a:rPr sz="1700">
+                <a:solidFill>
+                  <a:srgbClr val="1E293B"/>
+                </a:solidFill>
+                <a:latin typeface="Calibri"/>
+              </a:rPr>
+              <a:t>  Experiment 3 (79,080 parameters), chosen by validation Macro F1</a:t>
+            </a:r>
+          </a:p>
+          <a:p>
+            <a:pPr>
+              <a:spcAft>
+                <a:spcPts val="1200"/>
+              </a:spcAft>
+            </a:pPr>
+            <a:r>
+              <a:rPr sz="1100">
+                <a:solidFill>
+                  <a:srgbClr val="4F46E5"/>
+                </a:solidFill>
+              </a:rPr>
+              <a:t>■  </a:t>
+            </a:r>
+            <a:r>
+              <a:rPr b="1" sz="1700">
+                <a:solidFill>
+                  <a:srgbClr val="1E293B"/>
+                </a:solidFill>
+                <a:latin typeface="Calibri"/>
+              </a:rPr>
+              <a:t>Test result</a:t>
+            </a:r>
+            <a:r>
+              <a:rPr sz="1700">
+                <a:solidFill>
+                  <a:srgbClr val="1E293B"/>
+                </a:solidFill>
+                <a:latin typeface="Calibri"/>
+              </a:rPr>
+              <a:t>  Macro F1 0.531, accuracy 56.7% on unseen actors</a:t>
+            </a:r>
+          </a:p>
+          <a:p>
+            <a:pPr>
+              <a:spcAft>
+                <a:spcPts val="1200"/>
+              </a:spcAft>
+            </a:pPr>
+            <a:r>
+              <a:rPr sz="1100">
+                <a:solidFill>
+                  <a:srgbClr val="4F46E5"/>
+                </a:solidFill>
+              </a:rPr>
+              <a:t>■  </a:t>
+            </a:r>
+            <a:r>
+              <a:rPr b="1" sz="1700">
+                <a:solidFill>
+                  <a:srgbClr val="1E293B"/>
+                </a:solidFill>
+                <a:latin typeface="Calibri"/>
+              </a:rPr>
+              <a:t>Baseline</a:t>
+            </a:r>
+            <a:r>
+              <a:rPr sz="1700">
+                <a:solidFill>
+                  <a:srgbClr val="1E293B"/>
+                </a:solidFill>
+                <a:latin typeface="Calibri"/>
+              </a:rPr>
+              <a:t>  beats the tuned SVM (0.446) by +0.084 Macro F1</a:t>
+            </a:r>
+          </a:p>
+          <a:p>
+            <a:pPr>
+              <a:spcAft>
+                <a:spcPts val="1200"/>
+              </a:spcAft>
+            </a:pPr>
+            <a:r>
+              <a:rPr sz="1100">
+                <a:solidFill>
+                  <a:srgbClr val="4F46E5"/>
+                </a:solidFill>
+              </a:rPr>
+              <a:t>■  </a:t>
+            </a:r>
+            <a:r>
+              <a:rPr b="1" sz="1700">
+                <a:solidFill>
+                  <a:srgbClr val="1E293B"/>
+                </a:solidFill>
+                <a:latin typeface="Calibri"/>
+              </a:rPr>
+              <a:t>Honest view</a:t>
+            </a:r>
+            <a:r>
+              <a:rPr sz="1700">
+                <a:solidFill>
+                  <a:srgbClr val="1E293B"/>
+                </a:solidFill>
+                <a:latin typeface="Calibri"/>
+              </a:rPr>
+              <a:t>  uneven across emotions; sad and fearful remain hard</a:t>
+            </a:r>
+          </a:p>
+          <a:p>
+            <a:pPr>
+              <a:spcAft>
+                <a:spcPts val="1200"/>
+              </a:spcAft>
+            </a:pPr>
+            <a:r>
+              <a:rPr sz="1100">
+                <a:solidFill>
+                  <a:srgbClr val="4F46E5"/>
+                </a:solidFill>
+              </a:rPr>
+              <a:t>■  </a:t>
+            </a:r>
+            <a:r>
+              <a:rPr b="1" sz="1700">
+                <a:solidFill>
+                  <a:srgbClr val="1E293B"/>
+                </a:solidFill>
+                <a:latin typeface="Calibri"/>
+              </a:rPr>
+              <a:t>Reproducible</a:t>
+            </a:r>
+            <a:r>
+              <a:rPr sz="1700">
+                <a:solidFill>
+                  <a:srgbClr val="1E293B"/>
+                </a:solidFill>
+                <a:latin typeface="Calibri"/>
+              </a:rPr>
+              <a:t>  seeds, tests, one-command evaluation and prediction</a:t>
+            </a:r>
+          </a:p>
+        </p:txBody>
+      </p:sp>
+      <p:sp>
+        <p:nvSpPr>
+          <p:cNvPr id="8" name="Rounded Rectangle 7"/>
           <p:cNvSpPr/>
           <p:nvPr/>
         </p:nvSpPr>
         <p:spPr>
           <a:xfrm>
-            <a:off x="640080" y="1737360"/>
-            <a:ext cx="5394960" cy="4343400"/>
+            <a:off x="7863840" y="1645920"/>
+            <a:ext cx="3749039" cy="4206240"/>
           </a:xfrm>
           <a:prstGeom prst="roundRect">
-            <a:avLst/>
-          </a:prstGeom>
-          <a:solidFill>
-            <a:srgbClr val="EEF2FF"/>
-          </a:solidFill>
-          <a:ln>
-            <a:noFill/>
-          </a:ln>
-          <a:effectLst/>
-        </p:spPr>
-        <p:style>
-          <a:lnRef idx="1">
-            <a:schemeClr val="accent1"/>
-          </a:lnRef>
-          <a:fillRef idx="3">
-            <a:schemeClr val="accent1"/>
-          </a:fillRef>
-          <a:effectRef idx="2">
-            <a:schemeClr val="accent1"/>
-          </a:effectRef>
-          <a:fontRef idx="minor">
-            <a:schemeClr val="lt1"/>
-          </a:fontRef>
-        </p:style>
-        <p:txBody>
-          <a:bodyPr rtlCol="0" anchor="ctr"/>
-          <a:lstStyle/>
-          <a:p>
-            <a:pPr algn="ctr"/>
-          </a:p>
-        </p:txBody>
-      </p:sp>
-      <p:sp>
-        <p:nvSpPr>
-          <p:cNvPr id="8" name="Rectangle 7"/>
-          <p:cNvSpPr/>
-          <p:nvPr/>
-        </p:nvSpPr>
-        <p:spPr>
-          <a:xfrm>
-            <a:off x="640080" y="1901952"/>
-            <a:ext cx="73152" cy="4014215"/>
-          </a:xfrm>
-          <a:prstGeom prst="rect">
             <a:avLst/>
           </a:prstGeom>
           <a:solidFill>
@@ -6450,8 +6779,8 @@
         </p:nvSpPr>
         <p:spPr>
           <a:xfrm>
-            <a:off x="914400" y="1920240"/>
-            <a:ext cx="4937760" cy="365760"/>
+            <a:off x="7863840" y="2286000"/>
+            <a:ext cx="3749039" cy="822960"/>
           </a:xfrm>
           <a:prstGeom prst="rect">
             <a:avLst/>
@@ -6464,15 +6793,15 @@
           </a:bodyPr>
           <a:lstStyle/>
           <a:p>
-            <a:pPr algn="l"/>
-            <a:r>
-              <a:rPr sz="1700" b="1">
-                <a:solidFill>
-                  <a:srgbClr val="0F172A"/>
-                </a:solidFill>
-                <a:latin typeface="Calibri"/>
-              </a:rPr>
-              <a:t>Delivered</a:t>
+            <a:pPr algn="ctr"/>
+            <a:r>
+              <a:rPr sz="3600" b="1">
+                <a:solidFill>
+                  <a:srgbClr val="FFFFFF"/>
+                </a:solidFill>
+                <a:latin typeface="Calibri"/>
+              </a:rPr>
+              <a:t>Thank you</a:t>
             </a:r>
           </a:p>
         </p:txBody>
@@ -6485,8 +6814,8 @@
         </p:nvSpPr>
         <p:spPr>
           <a:xfrm>
-            <a:off x="914400" y="2359152"/>
-            <a:ext cx="4937760" cy="3611880"/>
+            <a:off x="7863840" y="3291840"/>
+            <a:ext cx="3749039" cy="548640"/>
           </a:xfrm>
           <a:prstGeom prst="rect">
             <a:avLst/>
@@ -6499,165 +6828,29 @@
           </a:bodyPr>
           <a:lstStyle/>
           <a:p>
-            <a:pPr algn="l"/>
-            <a:r>
-              <a:rPr sz="1500" b="0">
-                <a:solidFill>
-                  <a:srgbClr val="1E293B"/>
-                </a:solidFill>
-                <a:latin typeface="Calibri"/>
-              </a:rPr>
-              <a:t>Data collection, preprocessing, MFCC pipeline</a:t>
-            </a:r>
-          </a:p>
-          <a:p>
-            <a:pPr algn="l"/>
-            <a:r>
-              <a:rPr sz="1500" b="0">
-                <a:solidFill>
-                  <a:srgbClr val="1E293B"/>
-                </a:solidFill>
-                <a:latin typeface="Calibri"/>
-              </a:rPr>
-              <a:t>CNN-BiLSTM-Attention model + SVM baseline</a:t>
-            </a:r>
-          </a:p>
-          <a:p>
-            <a:pPr algn="l"/>
-            <a:r>
-              <a:rPr sz="1500" b="0">
-                <a:solidFill>
-                  <a:srgbClr val="1E293B"/>
-                </a:solidFill>
-                <a:latin typeface="Calibri"/>
-              </a:rPr>
-              <a:t>F1-based evaluation, speaker-independent</a:t>
-            </a:r>
-          </a:p>
-          <a:p>
-            <a:pPr algn="l"/>
-            <a:r>
-              <a:rPr sz="1500" b="0">
-                <a:solidFill>
-                  <a:srgbClr val="1E293B"/>
-                </a:solidFill>
-                <a:latin typeface="Calibri"/>
-              </a:rPr>
-              <a:t>Unit tests, one-command reproducibility</a:t>
-            </a:r>
-          </a:p>
-          <a:p>
-            <a:pPr algn="l"/>
-            <a:r>
-              <a:rPr sz="1500" b="0">
-                <a:solidFill>
-                  <a:srgbClr val="1E293B"/>
-                </a:solidFill>
-                <a:latin typeface="Calibri"/>
-              </a:rPr>
-              <a:t>Source code + PDF report + this deck</a:t>
-            </a:r>
-          </a:p>
-        </p:txBody>
-      </p:sp>
-      <p:sp>
-        <p:nvSpPr>
-          <p:cNvPr id="11" name="Rounded Rectangle 10"/>
-          <p:cNvSpPr/>
-          <p:nvPr/>
-        </p:nvSpPr>
-        <p:spPr>
-          <a:xfrm>
-            <a:off x="6309360" y="1737360"/>
-            <a:ext cx="5257800" cy="4343400"/>
-          </a:xfrm>
-          <a:prstGeom prst="roundRect">
-            <a:avLst/>
-          </a:prstGeom>
-          <a:solidFill>
-            <a:srgbClr val="EEF2FF"/>
-          </a:solidFill>
-          <a:ln>
-            <a:noFill/>
-          </a:ln>
-          <a:effectLst/>
-        </p:spPr>
-        <p:style>
-          <a:lnRef idx="1">
-            <a:schemeClr val="accent1"/>
-          </a:lnRef>
-          <a:fillRef idx="3">
-            <a:schemeClr val="accent1"/>
-          </a:fillRef>
-          <a:effectRef idx="2">
-            <a:schemeClr val="accent1"/>
-          </a:effectRef>
-          <a:fontRef idx="minor">
-            <a:schemeClr val="lt1"/>
-          </a:fontRef>
-        </p:style>
-        <p:txBody>
-          <a:bodyPr rtlCol="0" anchor="ctr"/>
-          <a:lstStyle/>
-          <a:p>
             <a:pPr algn="ctr"/>
-          </a:p>
-        </p:txBody>
-      </p:sp>
-      <p:sp>
-        <p:nvSpPr>
-          <p:cNvPr id="12" name="Rectangle 11"/>
-          <p:cNvSpPr/>
-          <p:nvPr/>
-        </p:nvSpPr>
-        <p:spPr>
-          <a:xfrm>
-            <a:off x="6309360" y="1901952"/>
-            <a:ext cx="73152" cy="4014215"/>
-          </a:xfrm>
-          <a:prstGeom prst="rect">
-            <a:avLst/>
-          </a:prstGeom>
-          <a:solidFill>
-            <a:srgbClr val="06B6D4"/>
-          </a:solidFill>
-          <a:ln>
-            <a:noFill/>
-          </a:ln>
-          <a:effectLst/>
-        </p:spPr>
-        <p:style>
-          <a:lnRef idx="1">
-            <a:schemeClr val="accent1"/>
-          </a:lnRef>
-          <a:fillRef idx="3">
-            <a:schemeClr val="accent1"/>
-          </a:fillRef>
-          <a:effectRef idx="2">
-            <a:schemeClr val="accent1"/>
-          </a:effectRef>
-          <a:fontRef idx="minor">
-            <a:schemeClr val="lt1"/>
-          </a:fontRef>
-        </p:style>
-        <p:txBody>
-          <a:bodyPr rtlCol="0" anchor="ctr"/>
-          <a:lstStyle/>
-          <a:p>
-            <a:pPr algn="ctr"/>
-          </a:p>
-        </p:txBody>
-      </p:sp>
-      <p:sp>
-        <p:nvSpPr>
-          <p:cNvPr id="13" name="TextBox 12"/>
+            <a:r>
+              <a:rPr sz="2200" b="0">
+                <a:solidFill>
+                  <a:srgbClr val="C7D2FE"/>
+                </a:solidFill>
+                <a:latin typeface="Calibri"/>
+              </a:rPr>
+              <a:t>Questions?</a:t>
+            </a:r>
+          </a:p>
+        </p:txBody>
+      </p:sp>
+      <p:sp>
+        <p:nvSpPr>
+          <p:cNvPr id="11" name="TextBox 10"/>
           <p:cNvSpPr txBox="1"/>
           <p:nvPr/>
         </p:nvSpPr>
         <p:spPr>
           <a:xfrm>
-            <a:off x="6583680" y="1920240"/>
-            <a:ext cx="4800600" cy="365760"/>
+            <a:off x="8046720" y="4297680"/>
+            <a:ext cx="3383280" cy="1097280"/>
           </a:xfrm>
           <a:prstGeom prst="rect">
             <a:avLst/>
@@ -6670,297 +6863,27 @@
           </a:bodyPr>
           <a:lstStyle/>
           <a:p>
-            <a:pPr algn="l"/>
-            <a:r>
-              <a:rPr sz="1700" b="1">
-                <a:solidFill>
-                  <a:srgbClr val="0F172A"/>
-                </a:solidFill>
-                <a:latin typeface="Calibri"/>
-              </a:rPr>
-              <a:t>Next steps</a:t>
-            </a:r>
-          </a:p>
-        </p:txBody>
-      </p:sp>
-      <p:sp>
-        <p:nvSpPr>
-          <p:cNvPr id="14" name="TextBox 13"/>
-          <p:cNvSpPr txBox="1"/>
-          <p:nvPr/>
-        </p:nvSpPr>
-        <p:spPr>
-          <a:xfrm>
-            <a:off x="6583680" y="2359152"/>
-            <a:ext cx="4800600" cy="3611880"/>
-          </a:xfrm>
-          <a:prstGeom prst="rect">
-            <a:avLst/>
-          </a:prstGeom>
-          <a:noFill/>
-        </p:spPr>
-        <p:txBody>
-          <a:bodyPr wrap="square" anchor="t" lIns="0" rIns="0" tIns="0" bIns="0">
-            <a:spAutoFit/>
-          </a:bodyPr>
-          <a:lstStyle/>
-          <a:p>
-            <a:pPr algn="l"/>
-            <a:r>
-              <a:rPr sz="1500" b="0">
-                <a:solidFill>
-                  <a:srgbClr val="1E293B"/>
-                </a:solidFill>
-                <a:latin typeface="Calibri"/>
-              </a:rPr>
-              <a:t>Leave-speakers-out cross-validation with confidence intervals</a:t>
-            </a:r>
-          </a:p>
-          <a:p>
-            <a:pPr algn="l"/>
-            <a:r>
-              <a:rPr sz="1500" b="0">
-                <a:solidFill>
-                  <a:srgbClr val="1E293B"/>
-                </a:solidFill>
-                <a:latin typeface="Calibri"/>
-              </a:rPr>
-              <a:t>SpecAugment / mixup; TESS, CREMA-D cross-corpus tests</a:t>
-            </a:r>
-          </a:p>
-          <a:p>
-            <a:pPr algn="l"/>
-            <a:r>
-              <a:rPr sz="1500" b="0">
-                <a:solidFill>
-                  <a:srgbClr val="1E293B"/>
-                </a:solidFill>
-                <a:latin typeface="Calibri"/>
-              </a:rPr>
-              <a:t>wav2vec-style encoders under the same protocol</a:t>
-            </a:r>
-          </a:p>
-          <a:p>
-            <a:pPr algn="l"/>
-            <a:r>
-              <a:rPr sz="1500" b="0">
-                <a:solidFill>
-                  <a:srgbClr val="1E293B"/>
-                </a:solidFill>
-                <a:latin typeface="Calibri"/>
-              </a:rPr>
-              <a:t>Real-time microphone demo + REST API</a:t>
-            </a:r>
-          </a:p>
-        </p:txBody>
-      </p:sp>
-    </p:spTree>
-  </p:cSld>
-  <p:clrMapOvr>
-    <a:masterClrMapping/>
-  </p:clrMapOvr>
-</p:sld>
-</file>
-
-<file path=ppt/slides/slide13.xml><?xml version="1.0" encoding="utf-8"?>
-<p:sld xmlns:a="http://schemas.openxmlformats.org/drawingml/2006/main" xmlns:p="http://schemas.openxmlformats.org/presentationml/2006/main" xmlns:r="http://schemas.openxmlformats.org/officeDocument/2006/relationships">
-  <p:cSld>
-    <p:spTree>
-      <p:nvGrpSpPr>
-        <p:cNvPr id="1" name=""/>
-        <p:cNvGrpSpPr/>
-        <p:nvPr/>
-      </p:nvGrpSpPr>
-      <p:grpSpPr/>
-      <p:sp>
-        <p:nvSpPr>
-          <p:cNvPr id="2" name="Rectangle 1"/>
-          <p:cNvSpPr/>
-          <p:nvPr/>
-        </p:nvSpPr>
-        <p:spPr>
-          <a:xfrm>
-            <a:off x="0" y="0"/>
-            <a:ext cx="12191695" cy="6858000"/>
-          </a:xfrm>
-          <a:prstGeom prst="rect">
-            <a:avLst/>
-          </a:prstGeom>
-          <a:solidFill>
-            <a:srgbClr val="0F172A"/>
-          </a:solidFill>
-          <a:ln>
-            <a:noFill/>
-          </a:ln>
-          <a:effectLst/>
-        </p:spPr>
-        <p:style>
-          <a:lnRef idx="1">
-            <a:schemeClr val="accent1"/>
-          </a:lnRef>
-          <a:fillRef idx="3">
-            <a:schemeClr val="accent1"/>
-          </a:fillRef>
-          <a:effectRef idx="2">
-            <a:schemeClr val="accent1"/>
-          </a:effectRef>
-          <a:fontRef idx="minor">
-            <a:schemeClr val="lt1"/>
-          </a:fontRef>
-        </p:style>
-        <p:txBody>
-          <a:bodyPr rtlCol="0" anchor="ctr"/>
-          <a:lstStyle/>
-          <a:p>
             <a:pPr algn="ctr"/>
-          </a:p>
-        </p:txBody>
-      </p:sp>
-      <p:sp>
-        <p:nvSpPr>
-          <p:cNvPr id="3" name="Rectangle 2"/>
-          <p:cNvSpPr/>
-          <p:nvPr/>
-        </p:nvSpPr>
-        <p:spPr>
-          <a:xfrm>
-            <a:off x="0" y="0"/>
-            <a:ext cx="320040" cy="6858000"/>
-          </a:xfrm>
-          <a:prstGeom prst="rect">
-            <a:avLst/>
-          </a:prstGeom>
-          <a:solidFill>
-            <a:srgbClr val="4F46E5"/>
-          </a:solidFill>
-          <a:ln>
-            <a:noFill/>
-          </a:ln>
-          <a:effectLst/>
-        </p:spPr>
-        <p:style>
-          <a:lnRef idx="1">
-            <a:schemeClr val="accent1"/>
-          </a:lnRef>
-          <a:fillRef idx="3">
-            <a:schemeClr val="accent1"/>
-          </a:fillRef>
-          <a:effectRef idx="2">
-            <a:schemeClr val="accent1"/>
-          </a:effectRef>
-          <a:fontRef idx="minor">
-            <a:schemeClr val="lt1"/>
-          </a:fontRef>
-        </p:style>
-        <p:txBody>
-          <a:bodyPr rtlCol="0" anchor="ctr"/>
-          <a:lstStyle/>
+            <a:r>
+              <a:rPr sz="1300" b="0">
+                <a:solidFill>
+                  <a:srgbClr val="E0E7FF"/>
+                </a:solidFill>
+                <a:latin typeface="Consolas"/>
+              </a:rPr>
+              <a:t>python predict.py clip.wav</a:t>
+            </a:r>
+          </a:p>
           <a:p>
             <a:pPr algn="ctr"/>
-          </a:p>
-        </p:txBody>
-      </p:sp>
-      <p:sp>
-        <p:nvSpPr>
-          <p:cNvPr id="4" name="TextBox 3"/>
-          <p:cNvSpPr txBox="1"/>
-          <p:nvPr/>
-        </p:nvSpPr>
-        <p:spPr>
-          <a:xfrm>
-            <a:off x="822960" y="2377440"/>
-            <a:ext cx="10058400" cy="914400"/>
-          </a:xfrm>
-          <a:prstGeom prst="rect">
-            <a:avLst/>
-          </a:prstGeom>
-          <a:noFill/>
-        </p:spPr>
-        <p:txBody>
-          <a:bodyPr wrap="square" anchor="t" lIns="0" rIns="0" tIns="0" bIns="0">
-            <a:spAutoFit/>
-          </a:bodyPr>
-          <a:lstStyle/>
-          <a:p>
-            <a:pPr algn="l"/>
-            <a:r>
-              <a:rPr sz="5400" b="1">
-                <a:solidFill>
-                  <a:srgbClr val="FFFFFF"/>
-                </a:solidFill>
-                <a:latin typeface="Calibri"/>
-              </a:rPr>
-              <a:t>Thank you</a:t>
-            </a:r>
-          </a:p>
-        </p:txBody>
-      </p:sp>
-      <p:sp>
-        <p:nvSpPr>
-          <p:cNvPr id="5" name="TextBox 4"/>
-          <p:cNvSpPr txBox="1"/>
-          <p:nvPr/>
-        </p:nvSpPr>
-        <p:spPr>
-          <a:xfrm>
-            <a:off x="822960" y="3566160"/>
-            <a:ext cx="10058400" cy="548640"/>
-          </a:xfrm>
-          <a:prstGeom prst="rect">
-            <a:avLst/>
-          </a:prstGeom>
-          <a:noFill/>
-        </p:spPr>
-        <p:txBody>
-          <a:bodyPr wrap="square" anchor="t" lIns="0" rIns="0" tIns="0" bIns="0">
-            <a:spAutoFit/>
-          </a:bodyPr>
-          <a:lstStyle/>
-          <a:p>
-            <a:pPr algn="l"/>
-            <a:r>
-              <a:rPr sz="2600" b="1">
-                <a:solidFill>
-                  <a:srgbClr val="06B6D4"/>
-                </a:solidFill>
-                <a:latin typeface="Calibri"/>
-              </a:rPr>
-              <a:t>Questions?</a:t>
-            </a:r>
-          </a:p>
-        </p:txBody>
-      </p:sp>
-      <p:sp>
-        <p:nvSpPr>
-          <p:cNvPr id="6" name="TextBox 5"/>
-          <p:cNvSpPr txBox="1"/>
-          <p:nvPr/>
-        </p:nvSpPr>
-        <p:spPr>
-          <a:xfrm>
-            <a:off x="822960" y="4937760"/>
-            <a:ext cx="10058400" cy="365760"/>
-          </a:xfrm>
-          <a:prstGeom prst="rect">
-            <a:avLst/>
-          </a:prstGeom>
-          <a:noFill/>
-        </p:spPr>
-        <p:txBody>
-          <a:bodyPr wrap="square" anchor="t" lIns="0" rIns="0" tIns="0" bIns="0">
-            <a:spAutoFit/>
-          </a:bodyPr>
-          <a:lstStyle/>
-          <a:p>
-            <a:pPr algn="l"/>
-            <a:r>
-              <a:rPr sz="1400" b="0">
-                <a:solidFill>
-                  <a:srgbClr val="94A3B8"/>
-                </a:solidFill>
-                <a:latin typeface="Calibri"/>
-              </a:rPr>
-              <a:t>Code: run_pipeline.py  |  Report: Speech_Emotion_Recognition_Report.pdf</a:t>
+            <a:r>
+              <a:rPr sz="1300" b="0">
+                <a:solidFill>
+                  <a:srgbClr val="E0E7FF"/>
+                </a:solidFill>
+                <a:latin typeface="Consolas"/>
+              </a:rPr>
+              <a:t>python summarize_results.py</a:t>
             </a:r>
           </a:p>
         </p:txBody>
@@ -7057,7 +6980,7 @@
                 </a:solidFill>
                 <a:latin typeface="Calibri"/>
               </a:rPr>
-              <a:t>PROBLEM STATEMENT</a:t>
+              <a:t>WHY THIS PROJECT</a:t>
             </a:r>
           </a:p>
         </p:txBody>
@@ -7092,7 +7015,7 @@
                 </a:solidFill>
                 <a:latin typeface="Calibri"/>
               </a:rPr>
-              <a:t>Why recognise emotion in speech?</a:t>
+              <a:t>Problem statement</a:t>
             </a:r>
           </a:p>
         </p:txBody>
@@ -7175,8 +7098,8 @@
         </p:nvSpPr>
         <p:spPr>
           <a:xfrm>
-            <a:off x="640080" y="1737360"/>
-            <a:ext cx="5394960" cy="2011680"/>
+            <a:off x="640080" y="1600200"/>
+            <a:ext cx="10972800" cy="1143000"/>
           </a:xfrm>
           <a:prstGeom prst="roundRect">
             <a:avLst/>
@@ -7219,8 +7142,8 @@
         </p:nvSpPr>
         <p:spPr>
           <a:xfrm>
-            <a:off x="640080" y="1901952"/>
-            <a:ext cx="73152" cy="1682496"/>
+            <a:off x="640080" y="1737360"/>
+            <a:ext cx="82296" cy="868680"/>
           </a:xfrm>
           <a:prstGeom prst="rect">
             <a:avLst/>
@@ -7263,8 +7186,8 @@
         </p:nvSpPr>
         <p:spPr>
           <a:xfrm>
-            <a:off x="914400" y="1920240"/>
-            <a:ext cx="4937760" cy="365760"/>
+            <a:off x="960120" y="1737360"/>
+            <a:ext cx="10424160" cy="914400"/>
           </a:xfrm>
           <a:prstGeom prst="rect">
             <a:avLst/>
@@ -7272,69 +7195,34 @@
           <a:noFill/>
         </p:spPr>
         <p:txBody>
-          <a:bodyPr wrap="square" anchor="t" lIns="0" rIns="0" tIns="0" bIns="0">
+          <a:bodyPr wrap="square" anchor="ctr" lIns="0" rIns="0" tIns="0" bIns="0">
             <a:spAutoFit/>
           </a:bodyPr>
           <a:lstStyle/>
           <a:p>
             <a:pPr algn="l"/>
             <a:r>
-              <a:rPr sz="1700" b="1">
+              <a:rPr sz="1900" b="0">
                 <a:solidFill>
                   <a:srgbClr val="0F172A"/>
                 </a:solidFill>
                 <a:latin typeface="Calibri"/>
               </a:rPr>
-              <a:t>Assigned task</a:t>
-            </a:r>
-          </a:p>
-        </p:txBody>
-      </p:sp>
-      <p:sp>
-        <p:nvSpPr>
-          <p:cNvPr id="10" name="TextBox 9"/>
-          <p:cNvSpPr txBox="1"/>
-          <p:nvPr/>
-        </p:nvSpPr>
-        <p:spPr>
-          <a:xfrm>
-            <a:off x="914400" y="2359152"/>
-            <a:ext cx="4937760" cy="1280160"/>
-          </a:xfrm>
-          <a:prstGeom prst="rect">
-            <a:avLst/>
-          </a:prstGeom>
-          <a:noFill/>
-        </p:spPr>
-        <p:txBody>
-          <a:bodyPr wrap="square" anchor="t" lIns="0" rIns="0" tIns="0" bIns="0">
-            <a:spAutoFit/>
-          </a:bodyPr>
-          <a:lstStyle/>
-          <a:p>
-            <a:pPr algn="l"/>
-            <a:r>
-              <a:rPr sz="1400" b="0">
-                <a:solidFill>
-                  <a:srgbClr val="1E293B"/>
-                </a:solidFill>
-                <a:latin typeface="Calibri"/>
-              </a:rPr>
-              <a:t>Build an ML system that recognises emotion in speech using MFCC features and a deep model, covering data collection, preprocessing, model implementation and F1-score evaluation.</a:t>
-            </a:r>
-          </a:p>
-        </p:txBody>
-      </p:sp>
-      <p:sp>
-        <p:nvSpPr>
-          <p:cNvPr id="11" name="Rounded Rectangle 10"/>
+              <a:t>Develop a machine learning system for emotion recognition in speech using MFCC features and a deep learning model, including data collection, preprocessing, model implementation and evaluation using F1-score.</a:t>
+            </a:r>
+          </a:p>
+        </p:txBody>
+      </p:sp>
+      <p:sp>
+        <p:nvSpPr>
+          <p:cNvPr id="10" name="Rounded Rectangle 9"/>
           <p:cNvSpPr/>
           <p:nvPr/>
         </p:nvSpPr>
         <p:spPr>
           <a:xfrm>
-            <a:off x="640080" y="3977639"/>
-            <a:ext cx="5394960" cy="2103120"/>
+            <a:off x="640080" y="3017520"/>
+            <a:ext cx="3566160" cy="3108960"/>
           </a:xfrm>
           <a:prstGeom prst="roundRect">
             <a:avLst/>
@@ -7371,14 +7259,208 @@
       </p:sp>
       <p:sp>
         <p:nvSpPr>
-          <p:cNvPr id="12" name="Rectangle 11"/>
+          <p:cNvPr id="11" name="Rectangle 10"/>
           <p:cNvSpPr/>
           <p:nvPr/>
         </p:nvSpPr>
         <p:spPr>
           <a:xfrm>
-            <a:off x="640080" y="4142231"/>
-            <a:ext cx="73152" cy="1773936"/>
+            <a:off x="640080" y="3182112"/>
+            <a:ext cx="73152" cy="2779776"/>
+          </a:xfrm>
+          <a:prstGeom prst="rect">
+            <a:avLst/>
+          </a:prstGeom>
+          <a:solidFill>
+            <a:srgbClr val="4F46E5"/>
+          </a:solidFill>
+          <a:ln>
+            <a:noFill/>
+          </a:ln>
+          <a:effectLst/>
+        </p:spPr>
+        <p:style>
+          <a:lnRef idx="1">
+            <a:schemeClr val="accent1"/>
+          </a:lnRef>
+          <a:fillRef idx="3">
+            <a:schemeClr val="accent1"/>
+          </a:fillRef>
+          <a:effectRef idx="2">
+            <a:schemeClr val="accent1"/>
+          </a:effectRef>
+          <a:fontRef idx="minor">
+            <a:schemeClr val="lt1"/>
+          </a:fontRef>
+        </p:style>
+        <p:txBody>
+          <a:bodyPr rtlCol="0" anchor="ctr"/>
+          <a:lstStyle/>
+          <a:p>
+            <a:pPr algn="ctr"/>
+          </a:p>
+        </p:txBody>
+      </p:sp>
+      <p:sp>
+        <p:nvSpPr>
+          <p:cNvPr id="12" name="TextBox 11"/>
+          <p:cNvSpPr txBox="1"/>
+          <p:nvPr/>
+        </p:nvSpPr>
+        <p:spPr>
+          <a:xfrm>
+            <a:off x="914400" y="3200400"/>
+            <a:ext cx="3108960" cy="365760"/>
+          </a:xfrm>
+          <a:prstGeom prst="rect">
+            <a:avLst/>
+          </a:prstGeom>
+          <a:noFill/>
+        </p:spPr>
+        <p:txBody>
+          <a:bodyPr wrap="square" anchor="t" lIns="0" rIns="0" tIns="0" bIns="0">
+            <a:spAutoFit/>
+          </a:bodyPr>
+          <a:lstStyle/>
+          <a:p>
+            <a:pPr algn="l"/>
+            <a:r>
+              <a:rPr sz="1700" b="1">
+                <a:solidFill>
+                  <a:srgbClr val="0F172A"/>
+                </a:solidFill>
+                <a:latin typeface="Calibri"/>
+              </a:rPr>
+              <a:t>Why it matters</a:t>
+            </a:r>
+          </a:p>
+        </p:txBody>
+      </p:sp>
+      <p:sp>
+        <p:nvSpPr>
+          <p:cNvPr id="13" name="TextBox 12"/>
+          <p:cNvSpPr txBox="1"/>
+          <p:nvPr/>
+        </p:nvSpPr>
+        <p:spPr>
+          <a:xfrm>
+            <a:off x="914400" y="3639312"/>
+            <a:ext cx="3108960" cy="2377439"/>
+          </a:xfrm>
+          <a:prstGeom prst="rect">
+            <a:avLst/>
+          </a:prstGeom>
+          <a:noFill/>
+        </p:spPr>
+        <p:txBody>
+          <a:bodyPr wrap="square" anchor="t" lIns="0" rIns="0" tIns="0" bIns="0">
+            <a:spAutoFit/>
+          </a:bodyPr>
+          <a:lstStyle/>
+          <a:p>
+            <a:pPr algn="l"/>
+            <a:r>
+              <a:rPr sz="2000" b="0">
+                <a:solidFill>
+                  <a:srgbClr val="1E293B"/>
+                </a:solidFill>
+                <a:latin typeface="Calibri"/>
+              </a:rPr>
+              <a:t>Call-centre analytics</a:t>
+            </a:r>
+          </a:p>
+          <a:p>
+            <a:pPr algn="l"/>
+            <a:r>
+              <a:rPr sz="2000" b="0">
+                <a:solidFill>
+                  <a:srgbClr val="1E293B"/>
+                </a:solidFill>
+                <a:latin typeface="Calibri"/>
+              </a:rPr>
+              <a:t>Tutoring and wellbeing tools</a:t>
+            </a:r>
+          </a:p>
+          <a:p>
+            <a:pPr algn="l"/>
+            <a:r>
+              <a:rPr sz="2000" b="0">
+                <a:solidFill>
+                  <a:srgbClr val="1E293B"/>
+                </a:solidFill>
+                <a:latin typeface="Calibri"/>
+              </a:rPr>
+              <a:t>Human-robot interaction</a:t>
+            </a:r>
+          </a:p>
+          <a:p>
+            <a:pPr algn="l"/>
+            <a:r>
+              <a:rPr sz="2000" b="0">
+                <a:solidFill>
+                  <a:srgbClr val="1E293B"/>
+                </a:solidFill>
+                <a:latin typeface="Calibri"/>
+              </a:rPr>
+              <a:t>Accessibility support</a:t>
+            </a:r>
+          </a:p>
+        </p:txBody>
+      </p:sp>
+      <p:sp>
+        <p:nvSpPr>
+          <p:cNvPr id="14" name="Rounded Rectangle 13"/>
+          <p:cNvSpPr/>
+          <p:nvPr/>
+        </p:nvSpPr>
+        <p:spPr>
+          <a:xfrm>
+            <a:off x="4343400" y="3017520"/>
+            <a:ext cx="3566160" cy="3108960"/>
+          </a:xfrm>
+          <a:prstGeom prst="roundRect">
+            <a:avLst/>
+          </a:prstGeom>
+          <a:solidFill>
+            <a:srgbClr val="EEF2FF"/>
+          </a:solidFill>
+          <a:ln>
+            <a:noFill/>
+          </a:ln>
+          <a:effectLst/>
+        </p:spPr>
+        <p:style>
+          <a:lnRef idx="1">
+            <a:schemeClr val="accent1"/>
+          </a:lnRef>
+          <a:fillRef idx="3">
+            <a:schemeClr val="accent1"/>
+          </a:fillRef>
+          <a:effectRef idx="2">
+            <a:schemeClr val="accent1"/>
+          </a:effectRef>
+          <a:fontRef idx="minor">
+            <a:schemeClr val="lt1"/>
+          </a:fontRef>
+        </p:style>
+        <p:txBody>
+          <a:bodyPr rtlCol="0" anchor="ctr"/>
+          <a:lstStyle/>
+          <a:p>
+            <a:pPr algn="ctr"/>
+          </a:p>
+        </p:txBody>
+      </p:sp>
+      <p:sp>
+        <p:nvSpPr>
+          <p:cNvPr id="15" name="Rectangle 14"/>
+          <p:cNvSpPr/>
+          <p:nvPr/>
+        </p:nvSpPr>
+        <p:spPr>
+          <a:xfrm>
+            <a:off x="4343400" y="3182112"/>
+            <a:ext cx="73152" cy="2779776"/>
           </a:xfrm>
           <a:prstGeom prst="rect">
             <a:avLst/>
@@ -7415,14 +7497,14 @@
       </p:sp>
       <p:sp>
         <p:nvSpPr>
-          <p:cNvPr id="13" name="TextBox 12"/>
+          <p:cNvPr id="16" name="TextBox 15"/>
           <p:cNvSpPr txBox="1"/>
           <p:nvPr/>
         </p:nvSpPr>
         <p:spPr>
           <a:xfrm>
-            <a:off x="914400" y="4160520"/>
-            <a:ext cx="4937760" cy="365760"/>
+            <a:off x="4617720" y="3200400"/>
+            <a:ext cx="3108960" cy="365760"/>
           </a:xfrm>
           <a:prstGeom prst="rect">
             <a:avLst/>
@@ -7450,14 +7532,14 @@
       </p:sp>
       <p:sp>
         <p:nvSpPr>
-          <p:cNvPr id="14" name="TextBox 13"/>
+          <p:cNvPr id="17" name="TextBox 16"/>
           <p:cNvSpPr txBox="1"/>
           <p:nvPr/>
         </p:nvSpPr>
         <p:spPr>
           <a:xfrm>
-            <a:off x="914400" y="4599431"/>
-            <a:ext cx="4937760" cy="1371599"/>
+            <a:off x="4617720" y="3639312"/>
+            <a:ext cx="3108960" cy="2377439"/>
           </a:xfrm>
           <a:prstGeom prst="rect">
             <a:avLst/>
@@ -7472,33 +7554,69 @@
           <a:p>
             <a:pPr algn="l"/>
             <a:r>
-              <a:rPr sz="1400" b="0">
+              <a:rPr sz="2000" b="0">
                 <a:solidFill>
                   <a:srgbClr val="1E293B"/>
                 </a:solidFill>
                 <a:latin typeface="Calibri"/>
               </a:rPr>
-              <a:t>Emotion is subjective, speakers differ, and public corpora are small - models tend to memorise voices instead of emotion.</a:t>
-            </a:r>
-          </a:p>
-        </p:txBody>
-      </p:sp>
-      <p:sp>
-        <p:nvSpPr>
-          <p:cNvPr id="15" name="Rounded Rectangle 14"/>
+              <a:t>Emotion is subjective</a:t>
+            </a:r>
+          </a:p>
+          <a:p>
+            <a:pPr algn="l"/>
+            <a:r>
+              <a:rPr sz="2000" b="0">
+                <a:solidFill>
+                  <a:srgbClr val="1E293B"/>
+                </a:solidFill>
+                <a:latin typeface="Calibri"/>
+              </a:rPr>
+              <a:t>Every speaker sounds different</a:t>
+            </a:r>
+          </a:p>
+          <a:p>
+            <a:pPr algn="l"/>
+            <a:r>
+              <a:rPr sz="2000" b="0">
+                <a:solidFill>
+                  <a:srgbClr val="1E293B"/>
+                </a:solidFill>
+                <a:latin typeface="Calibri"/>
+              </a:rPr>
+              <a:t>Public datasets are small</a:t>
+            </a:r>
+          </a:p>
+          <a:p>
+            <a:pPr algn="l"/>
+            <a:r>
+              <a:rPr sz="2000" b="0">
+                <a:solidFill>
+                  <a:srgbClr val="1E293B"/>
+                </a:solidFill>
+                <a:latin typeface="Calibri"/>
+              </a:rPr>
+              <a:t>Models can memorise voices</a:t>
+            </a:r>
+          </a:p>
+        </p:txBody>
+      </p:sp>
+      <p:sp>
+        <p:nvSpPr>
+          <p:cNvPr id="18" name="Rounded Rectangle 17"/>
           <p:cNvSpPr/>
           <p:nvPr/>
         </p:nvSpPr>
         <p:spPr>
           <a:xfrm>
-            <a:off x="6400800" y="1737360"/>
-            <a:ext cx="5166360" cy="4343400"/>
+            <a:off x="8046720" y="3017520"/>
+            <a:ext cx="3566160" cy="3108960"/>
           </a:xfrm>
           <a:prstGeom prst="roundRect">
             <a:avLst/>
           </a:prstGeom>
           <a:solidFill>
-            <a:srgbClr val="0F172A"/>
+            <a:srgbClr val="EEF2FF"/>
           </a:solidFill>
           <a:ln>
             <a:noFill/>
@@ -7529,51 +7647,16 @@
       </p:sp>
       <p:sp>
         <p:nvSpPr>
-          <p:cNvPr id="16" name="TextBox 15"/>
-          <p:cNvSpPr txBox="1"/>
-          <p:nvPr/>
-        </p:nvSpPr>
-        <p:spPr>
-          <a:xfrm>
-            <a:off x="6720840" y="1965960"/>
-            <a:ext cx="4572000" cy="365760"/>
-          </a:xfrm>
-          <a:prstGeom prst="rect">
-            <a:avLst/>
-          </a:prstGeom>
-          <a:noFill/>
-        </p:spPr>
-        <p:txBody>
-          <a:bodyPr wrap="square" anchor="t" lIns="0" rIns="0" tIns="0" bIns="0">
-            <a:spAutoFit/>
-          </a:bodyPr>
-          <a:lstStyle/>
-          <a:p>
-            <a:pPr algn="l"/>
-            <a:r>
-              <a:rPr sz="1800" b="1">
-                <a:solidFill>
-                  <a:srgbClr val="06B6D4"/>
-                </a:solidFill>
-                <a:latin typeface="Calibri"/>
-              </a:rPr>
-              <a:t>Requirement checklist</a:t>
-            </a:r>
-          </a:p>
-        </p:txBody>
-      </p:sp>
-      <p:sp>
-        <p:nvSpPr>
-          <p:cNvPr id="17" name="Oval 16"/>
+          <p:cNvPr id="19" name="Rectangle 18"/>
           <p:cNvSpPr/>
           <p:nvPr/>
         </p:nvSpPr>
         <p:spPr>
           <a:xfrm>
-            <a:off x="6720840" y="2642616"/>
-            <a:ext cx="292608" cy="292608"/>
-          </a:xfrm>
-          <a:prstGeom prst="ellipse">
+            <a:off x="8046720" y="3182112"/>
+            <a:ext cx="73152" cy="2779776"/>
+          </a:xfrm>
+          <a:prstGeom prst="rect">
             <a:avLst/>
           </a:prstGeom>
           <a:solidFill>
@@ -7608,49 +7691,14 @@
       </p:sp>
       <p:sp>
         <p:nvSpPr>
-          <p:cNvPr id="18" name="TextBox 17"/>
+          <p:cNvPr id="20" name="TextBox 19"/>
           <p:cNvSpPr txBox="1"/>
           <p:nvPr/>
         </p:nvSpPr>
         <p:spPr>
           <a:xfrm>
-            <a:off x="6720840" y="2642616"/>
-            <a:ext cx="292608" cy="292608"/>
-          </a:xfrm>
-          <a:prstGeom prst="rect">
-            <a:avLst/>
-          </a:prstGeom>
-          <a:noFill/>
-        </p:spPr>
-        <p:txBody>
-          <a:bodyPr wrap="square" anchor="ctr" lIns="0" rIns="0" tIns="0" bIns="0">
-            <a:spAutoFit/>
-          </a:bodyPr>
-          <a:lstStyle/>
-          <a:p>
-            <a:pPr algn="ctr"/>
-            <a:r>
-              <a:rPr sz="1300" b="1">
-                <a:solidFill>
-                  <a:srgbClr val="0F172A"/>
-                </a:solidFill>
-                <a:latin typeface="Calibri"/>
-              </a:rPr>
-              <a:t>✓</a:t>
-            </a:r>
-          </a:p>
-        </p:txBody>
-      </p:sp>
-      <p:sp>
-        <p:nvSpPr>
-          <p:cNvPr id="19" name="TextBox 18"/>
-          <p:cNvSpPr txBox="1"/>
-          <p:nvPr/>
-        </p:nvSpPr>
-        <p:spPr>
-          <a:xfrm>
-            <a:off x="7178040" y="2606040"/>
-            <a:ext cx="4206240" cy="320040"/>
+            <a:off x="8321040" y="3200400"/>
+            <a:ext cx="3108960" cy="365760"/>
           </a:xfrm>
           <a:prstGeom prst="rect">
             <a:avLst/>
@@ -7665,27 +7713,27 @@
           <a:p>
             <a:pPr algn="l"/>
             <a:r>
-              <a:rPr sz="1600" b="1">
-                <a:solidFill>
-                  <a:srgbClr val="FFFFFF"/>
-                </a:solidFill>
-                <a:latin typeface="Calibri"/>
-              </a:rPr>
-              <a:t>Data collection</a:t>
-            </a:r>
-          </a:p>
-        </p:txBody>
-      </p:sp>
-      <p:sp>
-        <p:nvSpPr>
-          <p:cNvPr id="20" name="TextBox 19"/>
+              <a:rPr sz="1700" b="1">
+                <a:solidFill>
+                  <a:srgbClr val="0F172A"/>
+                </a:solidFill>
+                <a:latin typeface="Calibri"/>
+              </a:rPr>
+              <a:t>Our approach</a:t>
+            </a:r>
+          </a:p>
+        </p:txBody>
+      </p:sp>
+      <p:sp>
+        <p:nvSpPr>
+          <p:cNvPr id="21" name="TextBox 20"/>
           <p:cNvSpPr txBox="1"/>
           <p:nvPr/>
         </p:nvSpPr>
         <p:spPr>
           <a:xfrm>
-            <a:off x="7178040" y="2898648"/>
-            <a:ext cx="4206240" cy="274320"/>
+            <a:off x="8321040" y="3639312"/>
+            <a:ext cx="3108960" cy="2377439"/>
           </a:xfrm>
           <a:prstGeom prst="rect">
             <a:avLst/>
@@ -7700,609 +7748,49 @@
           <a:p>
             <a:pPr algn="l"/>
             <a:r>
-              <a:rPr sz="1200" b="0">
-                <a:solidFill>
-                  <a:srgbClr val="CBD5E1"/>
-                </a:solidFill>
-                <a:latin typeface="Calibri"/>
-              </a:rPr>
-              <a:t>RAVDESS download + labels</a:t>
-            </a:r>
-          </a:p>
-        </p:txBody>
-      </p:sp>
-      <p:sp>
-        <p:nvSpPr>
-          <p:cNvPr id="21" name="Oval 20"/>
-          <p:cNvSpPr/>
-          <p:nvPr/>
-        </p:nvSpPr>
-        <p:spPr>
-          <a:xfrm>
-            <a:off x="6720840" y="3328416"/>
-            <a:ext cx="292608" cy="292608"/>
-          </a:xfrm>
-          <a:prstGeom prst="ellipse">
-            <a:avLst/>
-          </a:prstGeom>
-          <a:solidFill>
-            <a:srgbClr val="06B6D4"/>
-          </a:solidFill>
-          <a:ln>
-            <a:noFill/>
-          </a:ln>
-          <a:effectLst/>
-        </p:spPr>
-        <p:style>
-          <a:lnRef idx="1">
-            <a:schemeClr val="accent1"/>
-          </a:lnRef>
-          <a:fillRef idx="3">
-            <a:schemeClr val="accent1"/>
-          </a:fillRef>
-          <a:effectRef idx="2">
-            <a:schemeClr val="accent1"/>
-          </a:effectRef>
-          <a:fontRef idx="minor">
-            <a:schemeClr val="lt1"/>
-          </a:fontRef>
-        </p:style>
-        <p:txBody>
-          <a:bodyPr rtlCol="0" anchor="ctr"/>
-          <a:lstStyle/>
-          <a:p>
-            <a:pPr algn="ctr"/>
-          </a:p>
-        </p:txBody>
-      </p:sp>
-      <p:sp>
-        <p:nvSpPr>
-          <p:cNvPr id="22" name="TextBox 21"/>
-          <p:cNvSpPr txBox="1"/>
-          <p:nvPr/>
-        </p:nvSpPr>
-        <p:spPr>
-          <a:xfrm>
-            <a:off x="6720840" y="3328416"/>
-            <a:ext cx="292608" cy="292608"/>
-          </a:xfrm>
-          <a:prstGeom prst="rect">
-            <a:avLst/>
-          </a:prstGeom>
-          <a:noFill/>
-        </p:spPr>
-        <p:txBody>
-          <a:bodyPr wrap="square" anchor="ctr" lIns="0" rIns="0" tIns="0" bIns="0">
-            <a:spAutoFit/>
-          </a:bodyPr>
-          <a:lstStyle/>
-          <a:p>
-            <a:pPr algn="ctr"/>
-            <a:r>
-              <a:rPr sz="1300" b="1">
-                <a:solidFill>
-                  <a:srgbClr val="0F172A"/>
-                </a:solidFill>
-                <a:latin typeface="Calibri"/>
-              </a:rPr>
-              <a:t>✓</a:t>
-            </a:r>
-          </a:p>
-        </p:txBody>
-      </p:sp>
-      <p:sp>
-        <p:nvSpPr>
-          <p:cNvPr id="23" name="TextBox 22"/>
-          <p:cNvSpPr txBox="1"/>
-          <p:nvPr/>
-        </p:nvSpPr>
-        <p:spPr>
-          <a:xfrm>
-            <a:off x="7178040" y="3291840"/>
-            <a:ext cx="4206240" cy="320040"/>
-          </a:xfrm>
-          <a:prstGeom prst="rect">
-            <a:avLst/>
-          </a:prstGeom>
-          <a:noFill/>
-        </p:spPr>
-        <p:txBody>
-          <a:bodyPr wrap="square" anchor="t" lIns="0" rIns="0" tIns="0" bIns="0">
-            <a:spAutoFit/>
-          </a:bodyPr>
-          <a:lstStyle/>
+              <a:rPr sz="2000" b="0">
+                <a:solidFill>
+                  <a:srgbClr val="1E293B"/>
+                </a:solidFill>
+                <a:latin typeface="Calibri"/>
+              </a:rPr>
+              <a:t>MFCC + delta features</a:t>
+            </a:r>
+          </a:p>
           <a:p>
             <a:pPr algn="l"/>
             <a:r>
-              <a:rPr sz="1600" b="1">
-                <a:solidFill>
-                  <a:srgbClr val="FFFFFF"/>
-                </a:solidFill>
-                <a:latin typeface="Calibri"/>
-              </a:rPr>
-              <a:t>Preprocessing</a:t>
-            </a:r>
-          </a:p>
-        </p:txBody>
-      </p:sp>
-      <p:sp>
-        <p:nvSpPr>
-          <p:cNvPr id="24" name="TextBox 23"/>
-          <p:cNvSpPr txBox="1"/>
-          <p:nvPr/>
-        </p:nvSpPr>
-        <p:spPr>
-          <a:xfrm>
-            <a:off x="7178040" y="3584448"/>
-            <a:ext cx="4206240" cy="274320"/>
-          </a:xfrm>
-          <a:prstGeom prst="rect">
-            <a:avLst/>
-          </a:prstGeom>
-          <a:noFill/>
-        </p:spPr>
-        <p:txBody>
-          <a:bodyPr wrap="square" anchor="t" lIns="0" rIns="0" tIns="0" bIns="0">
-            <a:spAutoFit/>
-          </a:bodyPr>
-          <a:lstStyle/>
+              <a:rPr sz="2000" b="0">
+                <a:solidFill>
+                  <a:srgbClr val="1E293B"/>
+                </a:solidFill>
+                <a:latin typeface="Calibri"/>
+              </a:rPr>
+              <a:t>CNN-BiLSTM-Attention network</a:t>
+            </a:r>
+          </a:p>
           <a:p>
             <a:pPr algn="l"/>
             <a:r>
-              <a:rPr sz="1200" b="0">
-                <a:solidFill>
-                  <a:srgbClr val="CBD5E1"/>
-                </a:solidFill>
-                <a:latin typeface="Calibri"/>
-              </a:rPr>
-              <a:t>trim, normalise, augment</a:t>
-            </a:r>
-          </a:p>
-        </p:txBody>
-      </p:sp>
-      <p:sp>
-        <p:nvSpPr>
-          <p:cNvPr id="25" name="Oval 24"/>
-          <p:cNvSpPr/>
-          <p:nvPr/>
-        </p:nvSpPr>
-        <p:spPr>
-          <a:xfrm>
-            <a:off x="6720840" y="4014215"/>
-            <a:ext cx="292608" cy="292608"/>
-          </a:xfrm>
-          <a:prstGeom prst="ellipse">
-            <a:avLst/>
-          </a:prstGeom>
-          <a:solidFill>
-            <a:srgbClr val="06B6D4"/>
-          </a:solidFill>
-          <a:ln>
-            <a:noFill/>
-          </a:ln>
-          <a:effectLst/>
-        </p:spPr>
-        <p:style>
-          <a:lnRef idx="1">
-            <a:schemeClr val="accent1"/>
-          </a:lnRef>
-          <a:fillRef idx="3">
-            <a:schemeClr val="accent1"/>
-          </a:fillRef>
-          <a:effectRef idx="2">
-            <a:schemeClr val="accent1"/>
-          </a:effectRef>
-          <a:fontRef idx="minor">
-            <a:schemeClr val="lt1"/>
-          </a:fontRef>
-        </p:style>
-        <p:txBody>
-          <a:bodyPr rtlCol="0" anchor="ctr"/>
-          <a:lstStyle/>
-          <a:p>
-            <a:pPr algn="ctr"/>
-          </a:p>
-        </p:txBody>
-      </p:sp>
-      <p:sp>
-        <p:nvSpPr>
-          <p:cNvPr id="26" name="TextBox 25"/>
-          <p:cNvSpPr txBox="1"/>
-          <p:nvPr/>
-        </p:nvSpPr>
-        <p:spPr>
-          <a:xfrm>
-            <a:off x="6720840" y="4014215"/>
-            <a:ext cx="292608" cy="292608"/>
-          </a:xfrm>
-          <a:prstGeom prst="rect">
-            <a:avLst/>
-          </a:prstGeom>
-          <a:noFill/>
-        </p:spPr>
-        <p:txBody>
-          <a:bodyPr wrap="square" anchor="ctr" lIns="0" rIns="0" tIns="0" bIns="0">
-            <a:spAutoFit/>
-          </a:bodyPr>
-          <a:lstStyle/>
-          <a:p>
-            <a:pPr algn="ctr"/>
-            <a:r>
-              <a:rPr sz="1300" b="1">
-                <a:solidFill>
-                  <a:srgbClr val="0F172A"/>
-                </a:solidFill>
-                <a:latin typeface="Calibri"/>
-              </a:rPr>
-              <a:t>✓</a:t>
-            </a:r>
-          </a:p>
-        </p:txBody>
-      </p:sp>
-      <p:sp>
-        <p:nvSpPr>
-          <p:cNvPr id="27" name="TextBox 26"/>
-          <p:cNvSpPr txBox="1"/>
-          <p:nvPr/>
-        </p:nvSpPr>
-        <p:spPr>
-          <a:xfrm>
-            <a:off x="7178040" y="3977639"/>
-            <a:ext cx="4206240" cy="320040"/>
-          </a:xfrm>
-          <a:prstGeom prst="rect">
-            <a:avLst/>
-          </a:prstGeom>
-          <a:noFill/>
-        </p:spPr>
-        <p:txBody>
-          <a:bodyPr wrap="square" anchor="t" lIns="0" rIns="0" tIns="0" bIns="0">
-            <a:spAutoFit/>
-          </a:bodyPr>
-          <a:lstStyle/>
+              <a:rPr sz="2000" b="0">
+                <a:solidFill>
+                  <a:srgbClr val="1E293B"/>
+                </a:solidFill>
+                <a:latin typeface="Calibri"/>
+              </a:rPr>
+              <a:t>Unseen-actor evaluation</a:t>
+            </a:r>
+          </a:p>
           <a:p>
             <a:pPr algn="l"/>
             <a:r>
-              <a:rPr sz="1600" b="1">
-                <a:solidFill>
-                  <a:srgbClr val="FFFFFF"/>
-                </a:solidFill>
-                <a:latin typeface="Calibri"/>
-              </a:rPr>
-              <a:t>MFCC features</a:t>
-            </a:r>
-          </a:p>
-        </p:txBody>
-      </p:sp>
-      <p:sp>
-        <p:nvSpPr>
-          <p:cNvPr id="28" name="TextBox 27"/>
-          <p:cNvSpPr txBox="1"/>
-          <p:nvPr/>
-        </p:nvSpPr>
-        <p:spPr>
-          <a:xfrm>
-            <a:off x="7178040" y="4270248"/>
-            <a:ext cx="4206240" cy="274320"/>
-          </a:xfrm>
-          <a:prstGeom prst="rect">
-            <a:avLst/>
-          </a:prstGeom>
-          <a:noFill/>
-        </p:spPr>
-        <p:txBody>
-          <a:bodyPr wrap="square" anchor="t" lIns="0" rIns="0" tIns="0" bIns="0">
-            <a:spAutoFit/>
-          </a:bodyPr>
-          <a:lstStyle/>
-          <a:p>
-            <a:pPr algn="l"/>
-            <a:r>
-              <a:rPr sz="1200" b="0">
-                <a:solidFill>
-                  <a:srgbClr val="CBD5E1"/>
-                </a:solidFill>
-                <a:latin typeface="Calibri"/>
-              </a:rPr>
-              <a:t>40 MFCC + delta + delta-delta</a:t>
-            </a:r>
-          </a:p>
-        </p:txBody>
-      </p:sp>
-      <p:sp>
-        <p:nvSpPr>
-          <p:cNvPr id="29" name="Oval 28"/>
-          <p:cNvSpPr/>
-          <p:nvPr/>
-        </p:nvSpPr>
-        <p:spPr>
-          <a:xfrm>
-            <a:off x="6720840" y="4700016"/>
-            <a:ext cx="292608" cy="292608"/>
-          </a:xfrm>
-          <a:prstGeom prst="ellipse">
-            <a:avLst/>
-          </a:prstGeom>
-          <a:solidFill>
-            <a:srgbClr val="06B6D4"/>
-          </a:solidFill>
-          <a:ln>
-            <a:noFill/>
-          </a:ln>
-          <a:effectLst/>
-        </p:spPr>
-        <p:style>
-          <a:lnRef idx="1">
-            <a:schemeClr val="accent1"/>
-          </a:lnRef>
-          <a:fillRef idx="3">
-            <a:schemeClr val="accent1"/>
-          </a:fillRef>
-          <a:effectRef idx="2">
-            <a:schemeClr val="accent1"/>
-          </a:effectRef>
-          <a:fontRef idx="minor">
-            <a:schemeClr val="lt1"/>
-          </a:fontRef>
-        </p:style>
-        <p:txBody>
-          <a:bodyPr rtlCol="0" anchor="ctr"/>
-          <a:lstStyle/>
-          <a:p>
-            <a:pPr algn="ctr"/>
-          </a:p>
-        </p:txBody>
-      </p:sp>
-      <p:sp>
-        <p:nvSpPr>
-          <p:cNvPr id="30" name="TextBox 29"/>
-          <p:cNvSpPr txBox="1"/>
-          <p:nvPr/>
-        </p:nvSpPr>
-        <p:spPr>
-          <a:xfrm>
-            <a:off x="6720840" y="4700016"/>
-            <a:ext cx="292608" cy="292608"/>
-          </a:xfrm>
-          <a:prstGeom prst="rect">
-            <a:avLst/>
-          </a:prstGeom>
-          <a:noFill/>
-        </p:spPr>
-        <p:txBody>
-          <a:bodyPr wrap="square" anchor="ctr" lIns="0" rIns="0" tIns="0" bIns="0">
-            <a:spAutoFit/>
-          </a:bodyPr>
-          <a:lstStyle/>
-          <a:p>
-            <a:pPr algn="ctr"/>
-            <a:r>
-              <a:rPr sz="1300" b="1">
-                <a:solidFill>
-                  <a:srgbClr val="0F172A"/>
-                </a:solidFill>
-                <a:latin typeface="Calibri"/>
-              </a:rPr>
-              <a:t>✓</a:t>
-            </a:r>
-          </a:p>
-        </p:txBody>
-      </p:sp>
-      <p:sp>
-        <p:nvSpPr>
-          <p:cNvPr id="31" name="TextBox 30"/>
-          <p:cNvSpPr txBox="1"/>
-          <p:nvPr/>
-        </p:nvSpPr>
-        <p:spPr>
-          <a:xfrm>
-            <a:off x="7178040" y="4663440"/>
-            <a:ext cx="4206240" cy="320040"/>
-          </a:xfrm>
-          <a:prstGeom prst="rect">
-            <a:avLst/>
-          </a:prstGeom>
-          <a:noFill/>
-        </p:spPr>
-        <p:txBody>
-          <a:bodyPr wrap="square" anchor="t" lIns="0" rIns="0" tIns="0" bIns="0">
-            <a:spAutoFit/>
-          </a:bodyPr>
-          <a:lstStyle/>
-          <a:p>
-            <a:pPr algn="l"/>
-            <a:r>
-              <a:rPr sz="1600" b="1">
-                <a:solidFill>
-                  <a:srgbClr val="FFFFFF"/>
-                </a:solidFill>
-                <a:latin typeface="Calibri"/>
-              </a:rPr>
-              <a:t>Deep model</a:t>
-            </a:r>
-          </a:p>
-        </p:txBody>
-      </p:sp>
-      <p:sp>
-        <p:nvSpPr>
-          <p:cNvPr id="32" name="TextBox 31"/>
-          <p:cNvSpPr txBox="1"/>
-          <p:nvPr/>
-        </p:nvSpPr>
-        <p:spPr>
-          <a:xfrm>
-            <a:off x="7178040" y="4956048"/>
-            <a:ext cx="4206240" cy="274320"/>
-          </a:xfrm>
-          <a:prstGeom prst="rect">
-            <a:avLst/>
-          </a:prstGeom>
-          <a:noFill/>
-        </p:spPr>
-        <p:txBody>
-          <a:bodyPr wrap="square" anchor="t" lIns="0" rIns="0" tIns="0" bIns="0">
-            <a:spAutoFit/>
-          </a:bodyPr>
-          <a:lstStyle/>
-          <a:p>
-            <a:pPr algn="l"/>
-            <a:r>
-              <a:rPr sz="1200" b="0">
-                <a:solidFill>
-                  <a:srgbClr val="CBD5E1"/>
-                </a:solidFill>
-                <a:latin typeface="Calibri"/>
-              </a:rPr>
-              <a:t>CNN - BiLSTM - Attention</a:t>
-            </a:r>
-          </a:p>
-        </p:txBody>
-      </p:sp>
-      <p:sp>
-        <p:nvSpPr>
-          <p:cNvPr id="33" name="Oval 32"/>
-          <p:cNvSpPr/>
-          <p:nvPr/>
-        </p:nvSpPr>
-        <p:spPr>
-          <a:xfrm>
-            <a:off x="6720840" y="5385816"/>
-            <a:ext cx="292608" cy="292608"/>
-          </a:xfrm>
-          <a:prstGeom prst="ellipse">
-            <a:avLst/>
-          </a:prstGeom>
-          <a:solidFill>
-            <a:srgbClr val="06B6D4"/>
-          </a:solidFill>
-          <a:ln>
-            <a:noFill/>
-          </a:ln>
-          <a:effectLst/>
-        </p:spPr>
-        <p:style>
-          <a:lnRef idx="1">
-            <a:schemeClr val="accent1"/>
-          </a:lnRef>
-          <a:fillRef idx="3">
-            <a:schemeClr val="accent1"/>
-          </a:fillRef>
-          <a:effectRef idx="2">
-            <a:schemeClr val="accent1"/>
-          </a:effectRef>
-          <a:fontRef idx="minor">
-            <a:schemeClr val="lt1"/>
-          </a:fontRef>
-        </p:style>
-        <p:txBody>
-          <a:bodyPr rtlCol="0" anchor="ctr"/>
-          <a:lstStyle/>
-          <a:p>
-            <a:pPr algn="ctr"/>
-          </a:p>
-        </p:txBody>
-      </p:sp>
-      <p:sp>
-        <p:nvSpPr>
-          <p:cNvPr id="34" name="TextBox 33"/>
-          <p:cNvSpPr txBox="1"/>
-          <p:nvPr/>
-        </p:nvSpPr>
-        <p:spPr>
-          <a:xfrm>
-            <a:off x="6720840" y="5385816"/>
-            <a:ext cx="292608" cy="292608"/>
-          </a:xfrm>
-          <a:prstGeom prst="rect">
-            <a:avLst/>
-          </a:prstGeom>
-          <a:noFill/>
-        </p:spPr>
-        <p:txBody>
-          <a:bodyPr wrap="square" anchor="ctr" lIns="0" rIns="0" tIns="0" bIns="0">
-            <a:spAutoFit/>
-          </a:bodyPr>
-          <a:lstStyle/>
-          <a:p>
-            <a:pPr algn="ctr"/>
-            <a:r>
-              <a:rPr sz="1300" b="1">
-                <a:solidFill>
-                  <a:srgbClr val="0F172A"/>
-                </a:solidFill>
-                <a:latin typeface="Calibri"/>
-              </a:rPr>
-              <a:t>✓</a:t>
-            </a:r>
-          </a:p>
-        </p:txBody>
-      </p:sp>
-      <p:sp>
-        <p:nvSpPr>
-          <p:cNvPr id="35" name="TextBox 34"/>
-          <p:cNvSpPr txBox="1"/>
-          <p:nvPr/>
-        </p:nvSpPr>
-        <p:spPr>
-          <a:xfrm>
-            <a:off x="7178040" y="5349240"/>
-            <a:ext cx="4206240" cy="320040"/>
-          </a:xfrm>
-          <a:prstGeom prst="rect">
-            <a:avLst/>
-          </a:prstGeom>
-          <a:noFill/>
-        </p:spPr>
-        <p:txBody>
-          <a:bodyPr wrap="square" anchor="t" lIns="0" rIns="0" tIns="0" bIns="0">
-            <a:spAutoFit/>
-          </a:bodyPr>
-          <a:lstStyle/>
-          <a:p>
-            <a:pPr algn="l"/>
-            <a:r>
-              <a:rPr sz="1600" b="1">
-                <a:solidFill>
-                  <a:srgbClr val="FFFFFF"/>
-                </a:solidFill>
-                <a:latin typeface="Calibri"/>
-              </a:rPr>
-              <a:t>F1-score evaluation</a:t>
-            </a:r>
-          </a:p>
-        </p:txBody>
-      </p:sp>
-      <p:sp>
-        <p:nvSpPr>
-          <p:cNvPr id="36" name="TextBox 35"/>
-          <p:cNvSpPr txBox="1"/>
-          <p:nvPr/>
-        </p:nvSpPr>
-        <p:spPr>
-          <a:xfrm>
-            <a:off x="7178040" y="5641848"/>
-            <a:ext cx="4206240" cy="274320"/>
-          </a:xfrm>
-          <a:prstGeom prst="rect">
-            <a:avLst/>
-          </a:prstGeom>
-          <a:noFill/>
-        </p:spPr>
-        <p:txBody>
-          <a:bodyPr wrap="square" anchor="t" lIns="0" rIns="0" tIns="0" bIns="0">
-            <a:spAutoFit/>
-          </a:bodyPr>
-          <a:lstStyle/>
-          <a:p>
-            <a:pPr algn="l"/>
-            <a:r>
-              <a:rPr sz="1200" b="0">
-                <a:solidFill>
-                  <a:srgbClr val="CBD5E1"/>
-                </a:solidFill>
-                <a:latin typeface="Calibri"/>
-              </a:rPr>
-              <a:t>macro / weighted / per-class</a:t>
+              <a:rPr sz="2000" b="0">
+                <a:solidFill>
+                  <a:srgbClr val="1E293B"/>
+                </a:solidFill>
+                <a:latin typeface="Calibri"/>
+              </a:rPr>
+              <a:t>Macro F1 as the main metric</a:t>
             </a:r>
           </a:p>
         </p:txBody>
@@ -8399,7 +7887,7 @@
                 </a:solidFill>
                 <a:latin typeface="Calibri"/>
               </a:rPr>
-              <a:t>APPROACH</a:t>
+              <a:t>WHAT WE SET OUT TO DO</a:t>
             </a:r>
           </a:p>
         </p:txBody>
@@ -8434,7 +7922,7 @@
                 </a:solidFill>
                 <a:latin typeface="Calibri"/>
               </a:rPr>
-              <a:t>End-to-end pipeline</a:t>
+              <a:t>Objectives</a:t>
             </a:r>
           </a:p>
         </p:txBody>
@@ -8509,40 +7997,104 @@
           </a:p>
         </p:txBody>
       </p:sp>
-      <p:pic>
-        <p:nvPicPr>
-          <p:cNvPr id="7" name="Picture 6" descr="diagram_pipeline.png"/>
-          <p:cNvPicPr>
-            <a:picLocks noChangeAspect="1"/>
-          </p:cNvPicPr>
-          <p:nvPr/>
-        </p:nvPicPr>
-        <p:blipFill>
-          <a:blip r:embed="rId3"/>
-          <a:stretch>
-            <a:fillRect/>
-          </a:stretch>
-        </p:blipFill>
-        <p:spPr>
-          <a:xfrm>
-            <a:off x="640080" y="1828800"/>
-            <a:ext cx="10881360" cy="2357628"/>
-          </a:xfrm>
-          <a:prstGeom prst="rect">
-            <a:avLst/>
-          </a:prstGeom>
-        </p:spPr>
-      </p:pic>
-      <p:sp>
-        <p:nvSpPr>
-          <p:cNvPr id="8" name="TextBox 7"/>
+      <p:sp>
+        <p:nvSpPr>
+          <p:cNvPr id="7" name="Rounded Rectangle 6"/>
+          <p:cNvSpPr/>
+          <p:nvPr/>
+        </p:nvSpPr>
+        <p:spPr>
+          <a:xfrm>
+            <a:off x="640080" y="1645920"/>
+            <a:ext cx="3566160" cy="2148840"/>
+          </a:xfrm>
+          <a:prstGeom prst="roundRect">
+            <a:avLst/>
+          </a:prstGeom>
+          <a:solidFill>
+            <a:srgbClr val="EEF2FF"/>
+          </a:solidFill>
+          <a:ln>
+            <a:noFill/>
+          </a:ln>
+          <a:effectLst/>
+        </p:spPr>
+        <p:style>
+          <a:lnRef idx="1">
+            <a:schemeClr val="accent1"/>
+          </a:lnRef>
+          <a:fillRef idx="3">
+            <a:schemeClr val="accent1"/>
+          </a:fillRef>
+          <a:effectRef idx="2">
+            <a:schemeClr val="accent1"/>
+          </a:effectRef>
+          <a:fontRef idx="minor">
+            <a:schemeClr val="lt1"/>
+          </a:fontRef>
+        </p:style>
+        <p:txBody>
+          <a:bodyPr rtlCol="0" anchor="ctr"/>
+          <a:lstStyle/>
+          <a:p>
+            <a:pPr algn="ctr"/>
+          </a:p>
+        </p:txBody>
+      </p:sp>
+      <p:sp>
+        <p:nvSpPr>
+          <p:cNvPr id="8" name="Rectangle 7"/>
+          <p:cNvSpPr/>
+          <p:nvPr/>
+        </p:nvSpPr>
+        <p:spPr>
+          <a:xfrm>
+            <a:off x="640080" y="1810512"/>
+            <a:ext cx="73152" cy="1819656"/>
+          </a:xfrm>
+          <a:prstGeom prst="rect">
+            <a:avLst/>
+          </a:prstGeom>
+          <a:solidFill>
+            <a:srgbClr val="4F46E5"/>
+          </a:solidFill>
+          <a:ln>
+            <a:noFill/>
+          </a:ln>
+          <a:effectLst/>
+        </p:spPr>
+        <p:style>
+          <a:lnRef idx="1">
+            <a:schemeClr val="accent1"/>
+          </a:lnRef>
+          <a:fillRef idx="3">
+            <a:schemeClr val="accent1"/>
+          </a:fillRef>
+          <a:effectRef idx="2">
+            <a:schemeClr val="accent1"/>
+          </a:effectRef>
+          <a:fontRef idx="minor">
+            <a:schemeClr val="lt1"/>
+          </a:fontRef>
+        </p:style>
+        <p:txBody>
+          <a:bodyPr rtlCol="0" anchor="ctr"/>
+          <a:lstStyle/>
+          <a:p>
+            <a:pPr algn="ctr"/>
+          </a:p>
+        </p:txBody>
+      </p:sp>
+      <p:sp>
+        <p:nvSpPr>
+          <p:cNvPr id="9" name="TextBox 8"/>
           <p:cNvSpPr txBox="1"/>
           <p:nvPr/>
         </p:nvSpPr>
         <p:spPr>
           <a:xfrm>
-            <a:off x="822960" y="4389120"/>
-            <a:ext cx="10515600" cy="457200"/>
+            <a:off x="914400" y="1828800"/>
+            <a:ext cx="3108960" cy="365760"/>
           </a:xfrm>
           <a:prstGeom prst="rect">
             <a:avLst/>
@@ -8550,74 +8102,845 @@
           <a:noFill/>
         </p:spPr>
         <p:txBody>
-          <a:bodyPr wrap="square" lIns="0" rIns="0" tIns="0">
+          <a:bodyPr wrap="square" anchor="t" lIns="0" rIns="0" tIns="0" bIns="0">
             <a:spAutoFit/>
           </a:bodyPr>
           <a:lstStyle/>
           <a:p>
-            <a:pPr>
-              <a:spcAft>
-                <a:spcPts val="1000"/>
-              </a:spcAft>
-            </a:pPr>
-            <a:r>
-              <a:rPr sz="1100">
-                <a:solidFill>
-                  <a:srgbClr val="4F46E5"/>
-                </a:solidFill>
-              </a:rPr>
-              <a:t>■  </a:t>
-            </a:r>
-            <a:r>
-              <a:rPr b="1" sz="1700">
+            <a:pPr algn="l"/>
+            <a:r>
+              <a:rPr sz="1700" b="1">
+                <a:solidFill>
+                  <a:srgbClr val="0F172A"/>
+                </a:solidFill>
+                <a:latin typeface="Calibri"/>
+              </a:rPr>
+              <a:t>1  Data collection</a:t>
+            </a:r>
+          </a:p>
+        </p:txBody>
+      </p:sp>
+      <p:sp>
+        <p:nvSpPr>
+          <p:cNvPr id="10" name="TextBox 9"/>
+          <p:cNvSpPr txBox="1"/>
+          <p:nvPr/>
+        </p:nvSpPr>
+        <p:spPr>
+          <a:xfrm>
+            <a:off x="914400" y="2267712"/>
+            <a:ext cx="3108960" cy="1417320"/>
+          </a:xfrm>
+          <a:prstGeom prst="rect">
+            <a:avLst/>
+          </a:prstGeom>
+          <a:noFill/>
+        </p:spPr>
+        <p:txBody>
+          <a:bodyPr wrap="square" anchor="t" lIns="0" rIns="0" tIns="0" bIns="0">
+            <a:spAutoFit/>
+          </a:bodyPr>
+          <a:lstStyle/>
+          <a:p>
+            <a:pPr algn="l"/>
+            <a:r>
+              <a:rPr sz="1800" b="0">
                 <a:solidFill>
                   <a:srgbClr val="1E293B"/>
                 </a:solidFill>
                 <a:latin typeface="Calibri"/>
               </a:rPr>
-              <a:t>Reproducible</a:t>
-            </a:r>
-            <a:r>
-              <a:rPr sz="1700">
+              <a:t>RAVDESS speech corpus, labels parsed from filenames</a:t>
+            </a:r>
+          </a:p>
+        </p:txBody>
+      </p:sp>
+      <p:sp>
+        <p:nvSpPr>
+          <p:cNvPr id="11" name="Rounded Rectangle 10"/>
+          <p:cNvSpPr/>
+          <p:nvPr/>
+        </p:nvSpPr>
+        <p:spPr>
+          <a:xfrm>
+            <a:off x="4389120" y="1645920"/>
+            <a:ext cx="3566160" cy="2148840"/>
+          </a:xfrm>
+          <a:prstGeom prst="roundRect">
+            <a:avLst/>
+          </a:prstGeom>
+          <a:solidFill>
+            <a:srgbClr val="EEF2FF"/>
+          </a:solidFill>
+          <a:ln>
+            <a:noFill/>
+          </a:ln>
+          <a:effectLst/>
+        </p:spPr>
+        <p:style>
+          <a:lnRef idx="1">
+            <a:schemeClr val="accent1"/>
+          </a:lnRef>
+          <a:fillRef idx="3">
+            <a:schemeClr val="accent1"/>
+          </a:fillRef>
+          <a:effectRef idx="2">
+            <a:schemeClr val="accent1"/>
+          </a:effectRef>
+          <a:fontRef idx="minor">
+            <a:schemeClr val="lt1"/>
+          </a:fontRef>
+        </p:style>
+        <p:txBody>
+          <a:bodyPr rtlCol="0" anchor="ctr"/>
+          <a:lstStyle/>
+          <a:p>
+            <a:pPr algn="ctr"/>
+          </a:p>
+        </p:txBody>
+      </p:sp>
+      <p:sp>
+        <p:nvSpPr>
+          <p:cNvPr id="12" name="Rectangle 11"/>
+          <p:cNvSpPr/>
+          <p:nvPr/>
+        </p:nvSpPr>
+        <p:spPr>
+          <a:xfrm>
+            <a:off x="4389120" y="1810512"/>
+            <a:ext cx="73152" cy="1819656"/>
+          </a:xfrm>
+          <a:prstGeom prst="rect">
+            <a:avLst/>
+          </a:prstGeom>
+          <a:solidFill>
+            <a:srgbClr val="06B6D4"/>
+          </a:solidFill>
+          <a:ln>
+            <a:noFill/>
+          </a:ln>
+          <a:effectLst/>
+        </p:spPr>
+        <p:style>
+          <a:lnRef idx="1">
+            <a:schemeClr val="accent1"/>
+          </a:lnRef>
+          <a:fillRef idx="3">
+            <a:schemeClr val="accent1"/>
+          </a:fillRef>
+          <a:effectRef idx="2">
+            <a:schemeClr val="accent1"/>
+          </a:effectRef>
+          <a:fontRef idx="minor">
+            <a:schemeClr val="lt1"/>
+          </a:fontRef>
+        </p:style>
+        <p:txBody>
+          <a:bodyPr rtlCol="0" anchor="ctr"/>
+          <a:lstStyle/>
+          <a:p>
+            <a:pPr algn="ctr"/>
+          </a:p>
+        </p:txBody>
+      </p:sp>
+      <p:sp>
+        <p:nvSpPr>
+          <p:cNvPr id="13" name="TextBox 12"/>
+          <p:cNvSpPr txBox="1"/>
+          <p:nvPr/>
+        </p:nvSpPr>
+        <p:spPr>
+          <a:xfrm>
+            <a:off x="4663440" y="1828800"/>
+            <a:ext cx="3108960" cy="365760"/>
+          </a:xfrm>
+          <a:prstGeom prst="rect">
+            <a:avLst/>
+          </a:prstGeom>
+          <a:noFill/>
+        </p:spPr>
+        <p:txBody>
+          <a:bodyPr wrap="square" anchor="t" lIns="0" rIns="0" tIns="0" bIns="0">
+            <a:spAutoFit/>
+          </a:bodyPr>
+          <a:lstStyle/>
+          <a:p>
+            <a:pPr algn="l"/>
+            <a:r>
+              <a:rPr sz="1700" b="1">
+                <a:solidFill>
+                  <a:srgbClr val="0F172A"/>
+                </a:solidFill>
+                <a:latin typeface="Calibri"/>
+              </a:rPr>
+              <a:t>2  Preprocessing</a:t>
+            </a:r>
+          </a:p>
+        </p:txBody>
+      </p:sp>
+      <p:sp>
+        <p:nvSpPr>
+          <p:cNvPr id="14" name="TextBox 13"/>
+          <p:cNvSpPr txBox="1"/>
+          <p:nvPr/>
+        </p:nvSpPr>
+        <p:spPr>
+          <a:xfrm>
+            <a:off x="4663440" y="2267712"/>
+            <a:ext cx="3108960" cy="1417320"/>
+          </a:xfrm>
+          <a:prstGeom prst="rect">
+            <a:avLst/>
+          </a:prstGeom>
+          <a:noFill/>
+        </p:spPr>
+        <p:txBody>
+          <a:bodyPr wrap="square" anchor="t" lIns="0" rIns="0" tIns="0" bIns="0">
+            <a:spAutoFit/>
+          </a:bodyPr>
+          <a:lstStyle/>
+          <a:p>
+            <a:pPr algn="l"/>
+            <a:r>
+              <a:rPr sz="1800" b="0">
                 <a:solidFill>
                   <a:srgbClr val="1E293B"/>
                 </a:solidFill>
                 <a:latin typeface="Calibri"/>
               </a:rPr>
-              <a:t>  - one command, fixed seeds, configuration dataclasses, unit tests</a:t>
-            </a:r>
-          </a:p>
-          <a:p>
-            <a:pPr>
-              <a:spcAft>
-                <a:spcPts val="1000"/>
-              </a:spcAft>
-            </a:pPr>
-            <a:r>
-              <a:rPr sz="1100">
-                <a:solidFill>
-                  <a:srgbClr val="4F46E5"/>
-                </a:solidFill>
-              </a:rPr>
-              <a:t>■  </a:t>
-            </a:r>
-            <a:r>
-              <a:rPr b="1" sz="1700">
+              <a:t>Resample, trim, normalise, fixed 3 s window, augment (train only)</a:t>
+            </a:r>
+          </a:p>
+        </p:txBody>
+      </p:sp>
+      <p:sp>
+        <p:nvSpPr>
+          <p:cNvPr id="15" name="Rounded Rectangle 14"/>
+          <p:cNvSpPr/>
+          <p:nvPr/>
+        </p:nvSpPr>
+        <p:spPr>
+          <a:xfrm>
+            <a:off x="8138159" y="1645920"/>
+            <a:ext cx="3566160" cy="2148840"/>
+          </a:xfrm>
+          <a:prstGeom prst="roundRect">
+            <a:avLst/>
+          </a:prstGeom>
+          <a:solidFill>
+            <a:srgbClr val="EEF2FF"/>
+          </a:solidFill>
+          <a:ln>
+            <a:noFill/>
+          </a:ln>
+          <a:effectLst/>
+        </p:spPr>
+        <p:style>
+          <a:lnRef idx="1">
+            <a:schemeClr val="accent1"/>
+          </a:lnRef>
+          <a:fillRef idx="3">
+            <a:schemeClr val="accent1"/>
+          </a:fillRef>
+          <a:effectRef idx="2">
+            <a:schemeClr val="accent1"/>
+          </a:effectRef>
+          <a:fontRef idx="minor">
+            <a:schemeClr val="lt1"/>
+          </a:fontRef>
+        </p:style>
+        <p:txBody>
+          <a:bodyPr rtlCol="0" anchor="ctr"/>
+          <a:lstStyle/>
+          <a:p>
+            <a:pPr algn="ctr"/>
+          </a:p>
+        </p:txBody>
+      </p:sp>
+      <p:sp>
+        <p:nvSpPr>
+          <p:cNvPr id="16" name="Rectangle 15"/>
+          <p:cNvSpPr/>
+          <p:nvPr/>
+        </p:nvSpPr>
+        <p:spPr>
+          <a:xfrm>
+            <a:off x="8138159" y="1810512"/>
+            <a:ext cx="73152" cy="1819656"/>
+          </a:xfrm>
+          <a:prstGeom prst="rect">
+            <a:avLst/>
+          </a:prstGeom>
+          <a:solidFill>
+            <a:srgbClr val="F59E0B"/>
+          </a:solidFill>
+          <a:ln>
+            <a:noFill/>
+          </a:ln>
+          <a:effectLst/>
+        </p:spPr>
+        <p:style>
+          <a:lnRef idx="1">
+            <a:schemeClr val="accent1"/>
+          </a:lnRef>
+          <a:fillRef idx="3">
+            <a:schemeClr val="accent1"/>
+          </a:fillRef>
+          <a:effectRef idx="2">
+            <a:schemeClr val="accent1"/>
+          </a:effectRef>
+          <a:fontRef idx="minor">
+            <a:schemeClr val="lt1"/>
+          </a:fontRef>
+        </p:style>
+        <p:txBody>
+          <a:bodyPr rtlCol="0" anchor="ctr"/>
+          <a:lstStyle/>
+          <a:p>
+            <a:pPr algn="ctr"/>
+          </a:p>
+        </p:txBody>
+      </p:sp>
+      <p:sp>
+        <p:nvSpPr>
+          <p:cNvPr id="17" name="TextBox 16"/>
+          <p:cNvSpPr txBox="1"/>
+          <p:nvPr/>
+        </p:nvSpPr>
+        <p:spPr>
+          <a:xfrm>
+            <a:off x="8412480" y="1828800"/>
+            <a:ext cx="3108960" cy="365760"/>
+          </a:xfrm>
+          <a:prstGeom prst="rect">
+            <a:avLst/>
+          </a:prstGeom>
+          <a:noFill/>
+        </p:spPr>
+        <p:txBody>
+          <a:bodyPr wrap="square" anchor="t" lIns="0" rIns="0" tIns="0" bIns="0">
+            <a:spAutoFit/>
+          </a:bodyPr>
+          <a:lstStyle/>
+          <a:p>
+            <a:pPr algn="l"/>
+            <a:r>
+              <a:rPr sz="1700" b="1">
+                <a:solidFill>
+                  <a:srgbClr val="0F172A"/>
+                </a:solidFill>
+                <a:latin typeface="Calibri"/>
+              </a:rPr>
+              <a:t>3  MFCC features</a:t>
+            </a:r>
+          </a:p>
+        </p:txBody>
+      </p:sp>
+      <p:sp>
+        <p:nvSpPr>
+          <p:cNvPr id="18" name="TextBox 17"/>
+          <p:cNvSpPr txBox="1"/>
+          <p:nvPr/>
+        </p:nvSpPr>
+        <p:spPr>
+          <a:xfrm>
+            <a:off x="8412480" y="2267712"/>
+            <a:ext cx="3108960" cy="1417320"/>
+          </a:xfrm>
+          <a:prstGeom prst="rect">
+            <a:avLst/>
+          </a:prstGeom>
+          <a:noFill/>
+        </p:spPr>
+        <p:txBody>
+          <a:bodyPr wrap="square" anchor="t" lIns="0" rIns="0" tIns="0" bIns="0">
+            <a:spAutoFit/>
+          </a:bodyPr>
+          <a:lstStyle/>
+          <a:p>
+            <a:pPr algn="l"/>
+            <a:r>
+              <a:rPr sz="1800" b="0">
                 <a:solidFill>
                   <a:srgbClr val="1E293B"/>
                 </a:solidFill>
                 <a:latin typeface="Calibri"/>
               </a:rPr>
-              <a:t>Leak-free</a:t>
-            </a:r>
-            <a:r>
-              <a:rPr sz="1700">
+              <a:t>40 MFCC + delta + delta-delta = 120 features x 130 frames</a:t>
+            </a:r>
+          </a:p>
+        </p:txBody>
+      </p:sp>
+      <p:sp>
+        <p:nvSpPr>
+          <p:cNvPr id="19" name="Rounded Rectangle 18"/>
+          <p:cNvSpPr/>
+          <p:nvPr/>
+        </p:nvSpPr>
+        <p:spPr>
+          <a:xfrm>
+            <a:off x="640080" y="4023360"/>
+            <a:ext cx="3566160" cy="2148840"/>
+          </a:xfrm>
+          <a:prstGeom prst="roundRect">
+            <a:avLst/>
+          </a:prstGeom>
+          <a:solidFill>
+            <a:srgbClr val="EEF2FF"/>
+          </a:solidFill>
+          <a:ln>
+            <a:noFill/>
+          </a:ln>
+          <a:effectLst/>
+        </p:spPr>
+        <p:style>
+          <a:lnRef idx="1">
+            <a:schemeClr val="accent1"/>
+          </a:lnRef>
+          <a:fillRef idx="3">
+            <a:schemeClr val="accent1"/>
+          </a:fillRef>
+          <a:effectRef idx="2">
+            <a:schemeClr val="accent1"/>
+          </a:effectRef>
+          <a:fontRef idx="minor">
+            <a:schemeClr val="lt1"/>
+          </a:fontRef>
+        </p:style>
+        <p:txBody>
+          <a:bodyPr rtlCol="0" anchor="ctr"/>
+          <a:lstStyle/>
+          <a:p>
+            <a:pPr algn="ctr"/>
+          </a:p>
+        </p:txBody>
+      </p:sp>
+      <p:sp>
+        <p:nvSpPr>
+          <p:cNvPr id="20" name="Rectangle 19"/>
+          <p:cNvSpPr/>
+          <p:nvPr/>
+        </p:nvSpPr>
+        <p:spPr>
+          <a:xfrm>
+            <a:off x="640080" y="4187952"/>
+            <a:ext cx="73152" cy="1819656"/>
+          </a:xfrm>
+          <a:prstGeom prst="rect">
+            <a:avLst/>
+          </a:prstGeom>
+          <a:solidFill>
+            <a:srgbClr val="4F46E5"/>
+          </a:solidFill>
+          <a:ln>
+            <a:noFill/>
+          </a:ln>
+          <a:effectLst/>
+        </p:spPr>
+        <p:style>
+          <a:lnRef idx="1">
+            <a:schemeClr val="accent1"/>
+          </a:lnRef>
+          <a:fillRef idx="3">
+            <a:schemeClr val="accent1"/>
+          </a:fillRef>
+          <a:effectRef idx="2">
+            <a:schemeClr val="accent1"/>
+          </a:effectRef>
+          <a:fontRef idx="minor">
+            <a:schemeClr val="lt1"/>
+          </a:fontRef>
+        </p:style>
+        <p:txBody>
+          <a:bodyPr rtlCol="0" anchor="ctr"/>
+          <a:lstStyle/>
+          <a:p>
+            <a:pPr algn="ctr"/>
+          </a:p>
+        </p:txBody>
+      </p:sp>
+      <p:sp>
+        <p:nvSpPr>
+          <p:cNvPr id="21" name="TextBox 20"/>
+          <p:cNvSpPr txBox="1"/>
+          <p:nvPr/>
+        </p:nvSpPr>
+        <p:spPr>
+          <a:xfrm>
+            <a:off x="914400" y="4206240"/>
+            <a:ext cx="3108960" cy="365760"/>
+          </a:xfrm>
+          <a:prstGeom prst="rect">
+            <a:avLst/>
+          </a:prstGeom>
+          <a:noFill/>
+        </p:spPr>
+        <p:txBody>
+          <a:bodyPr wrap="square" anchor="t" lIns="0" rIns="0" tIns="0" bIns="0">
+            <a:spAutoFit/>
+          </a:bodyPr>
+          <a:lstStyle/>
+          <a:p>
+            <a:pPr algn="l"/>
+            <a:r>
+              <a:rPr sz="1700" b="1">
+                <a:solidFill>
+                  <a:srgbClr val="0F172A"/>
+                </a:solidFill>
+                <a:latin typeface="Calibri"/>
+              </a:rPr>
+              <a:t>4  Deep model</a:t>
+            </a:r>
+          </a:p>
+        </p:txBody>
+      </p:sp>
+      <p:sp>
+        <p:nvSpPr>
+          <p:cNvPr id="22" name="TextBox 21"/>
+          <p:cNvSpPr txBox="1"/>
+          <p:nvPr/>
+        </p:nvSpPr>
+        <p:spPr>
+          <a:xfrm>
+            <a:off x="914400" y="4645152"/>
+            <a:ext cx="3108960" cy="1417320"/>
+          </a:xfrm>
+          <a:prstGeom prst="rect">
+            <a:avLst/>
+          </a:prstGeom>
+          <a:noFill/>
+        </p:spPr>
+        <p:txBody>
+          <a:bodyPr wrap="square" anchor="t" lIns="0" rIns="0" tIns="0" bIns="0">
+            <a:spAutoFit/>
+          </a:bodyPr>
+          <a:lstStyle/>
+          <a:p>
+            <a:pPr algn="l"/>
+            <a:r>
+              <a:rPr sz="1800" b="0">
                 <a:solidFill>
                   <a:srgbClr val="1E293B"/>
                 </a:solidFill>
                 <a:latin typeface="Calibri"/>
               </a:rPr>
-              <a:t>  - speaker-independent split; normalisation statistics fitted on training data only</a:t>
+              <a:t>CNN -&gt; BiLSTM -&gt; attention -&gt; softmax over 8 emotions</a:t>
+            </a:r>
+          </a:p>
+        </p:txBody>
+      </p:sp>
+      <p:sp>
+        <p:nvSpPr>
+          <p:cNvPr id="23" name="Rounded Rectangle 22"/>
+          <p:cNvSpPr/>
+          <p:nvPr/>
+        </p:nvSpPr>
+        <p:spPr>
+          <a:xfrm>
+            <a:off x="4389120" y="4023360"/>
+            <a:ext cx="3566160" cy="2148840"/>
+          </a:xfrm>
+          <a:prstGeom prst="roundRect">
+            <a:avLst/>
+          </a:prstGeom>
+          <a:solidFill>
+            <a:srgbClr val="EEF2FF"/>
+          </a:solidFill>
+          <a:ln>
+            <a:noFill/>
+          </a:ln>
+          <a:effectLst/>
+        </p:spPr>
+        <p:style>
+          <a:lnRef idx="1">
+            <a:schemeClr val="accent1"/>
+          </a:lnRef>
+          <a:fillRef idx="3">
+            <a:schemeClr val="accent1"/>
+          </a:fillRef>
+          <a:effectRef idx="2">
+            <a:schemeClr val="accent1"/>
+          </a:effectRef>
+          <a:fontRef idx="minor">
+            <a:schemeClr val="lt1"/>
+          </a:fontRef>
+        </p:style>
+        <p:txBody>
+          <a:bodyPr rtlCol="0" anchor="ctr"/>
+          <a:lstStyle/>
+          <a:p>
+            <a:pPr algn="ctr"/>
+          </a:p>
+        </p:txBody>
+      </p:sp>
+      <p:sp>
+        <p:nvSpPr>
+          <p:cNvPr id="24" name="Rectangle 23"/>
+          <p:cNvSpPr/>
+          <p:nvPr/>
+        </p:nvSpPr>
+        <p:spPr>
+          <a:xfrm>
+            <a:off x="4389120" y="4187952"/>
+            <a:ext cx="73152" cy="1819656"/>
+          </a:xfrm>
+          <a:prstGeom prst="rect">
+            <a:avLst/>
+          </a:prstGeom>
+          <a:solidFill>
+            <a:srgbClr val="06B6D4"/>
+          </a:solidFill>
+          <a:ln>
+            <a:noFill/>
+          </a:ln>
+          <a:effectLst/>
+        </p:spPr>
+        <p:style>
+          <a:lnRef idx="1">
+            <a:schemeClr val="accent1"/>
+          </a:lnRef>
+          <a:fillRef idx="3">
+            <a:schemeClr val="accent1"/>
+          </a:fillRef>
+          <a:effectRef idx="2">
+            <a:schemeClr val="accent1"/>
+          </a:effectRef>
+          <a:fontRef idx="minor">
+            <a:schemeClr val="lt1"/>
+          </a:fontRef>
+        </p:style>
+        <p:txBody>
+          <a:bodyPr rtlCol="0" anchor="ctr"/>
+          <a:lstStyle/>
+          <a:p>
+            <a:pPr algn="ctr"/>
+          </a:p>
+        </p:txBody>
+      </p:sp>
+      <p:sp>
+        <p:nvSpPr>
+          <p:cNvPr id="25" name="TextBox 24"/>
+          <p:cNvSpPr txBox="1"/>
+          <p:nvPr/>
+        </p:nvSpPr>
+        <p:spPr>
+          <a:xfrm>
+            <a:off x="4663440" y="4206240"/>
+            <a:ext cx="3108960" cy="365760"/>
+          </a:xfrm>
+          <a:prstGeom prst="rect">
+            <a:avLst/>
+          </a:prstGeom>
+          <a:noFill/>
+        </p:spPr>
+        <p:txBody>
+          <a:bodyPr wrap="square" anchor="t" lIns="0" rIns="0" tIns="0" bIns="0">
+            <a:spAutoFit/>
+          </a:bodyPr>
+          <a:lstStyle/>
+          <a:p>
+            <a:pPr algn="l"/>
+            <a:r>
+              <a:rPr sz="1700" b="1">
+                <a:solidFill>
+                  <a:srgbClr val="0F172A"/>
+                </a:solidFill>
+                <a:latin typeface="Calibri"/>
+              </a:rPr>
+              <a:t>5  Baseline</a:t>
+            </a:r>
+          </a:p>
+        </p:txBody>
+      </p:sp>
+      <p:sp>
+        <p:nvSpPr>
+          <p:cNvPr id="26" name="TextBox 25"/>
+          <p:cNvSpPr txBox="1"/>
+          <p:nvPr/>
+        </p:nvSpPr>
+        <p:spPr>
+          <a:xfrm>
+            <a:off x="4663440" y="4645152"/>
+            <a:ext cx="3108960" cy="1417320"/>
+          </a:xfrm>
+          <a:prstGeom prst="rect">
+            <a:avLst/>
+          </a:prstGeom>
+          <a:noFill/>
+        </p:spPr>
+        <p:txBody>
+          <a:bodyPr wrap="square" anchor="t" lIns="0" rIns="0" tIns="0" bIns="0">
+            <a:spAutoFit/>
+          </a:bodyPr>
+          <a:lstStyle/>
+          <a:p>
+            <a:pPr algn="l"/>
+            <a:r>
+              <a:rPr sz="1800" b="0">
+                <a:solidFill>
+                  <a:srgbClr val="1E293B"/>
+                </a:solidFill>
+                <a:latin typeface="Calibri"/>
+              </a:rPr>
+              <a:t>RBF-SVM on MFCC statistics for fair comparison</a:t>
+            </a:r>
+          </a:p>
+        </p:txBody>
+      </p:sp>
+      <p:sp>
+        <p:nvSpPr>
+          <p:cNvPr id="27" name="Rounded Rectangle 26"/>
+          <p:cNvSpPr/>
+          <p:nvPr/>
+        </p:nvSpPr>
+        <p:spPr>
+          <a:xfrm>
+            <a:off x="8138159" y="4023360"/>
+            <a:ext cx="3566160" cy="2148840"/>
+          </a:xfrm>
+          <a:prstGeom prst="roundRect">
+            <a:avLst/>
+          </a:prstGeom>
+          <a:solidFill>
+            <a:srgbClr val="EEF2FF"/>
+          </a:solidFill>
+          <a:ln>
+            <a:noFill/>
+          </a:ln>
+          <a:effectLst/>
+        </p:spPr>
+        <p:style>
+          <a:lnRef idx="1">
+            <a:schemeClr val="accent1"/>
+          </a:lnRef>
+          <a:fillRef idx="3">
+            <a:schemeClr val="accent1"/>
+          </a:fillRef>
+          <a:effectRef idx="2">
+            <a:schemeClr val="accent1"/>
+          </a:effectRef>
+          <a:fontRef idx="minor">
+            <a:schemeClr val="lt1"/>
+          </a:fontRef>
+        </p:style>
+        <p:txBody>
+          <a:bodyPr rtlCol="0" anchor="ctr"/>
+          <a:lstStyle/>
+          <a:p>
+            <a:pPr algn="ctr"/>
+          </a:p>
+        </p:txBody>
+      </p:sp>
+      <p:sp>
+        <p:nvSpPr>
+          <p:cNvPr id="28" name="Rectangle 27"/>
+          <p:cNvSpPr/>
+          <p:nvPr/>
+        </p:nvSpPr>
+        <p:spPr>
+          <a:xfrm>
+            <a:off x="8138159" y="4187952"/>
+            <a:ext cx="73152" cy="1819656"/>
+          </a:xfrm>
+          <a:prstGeom prst="rect">
+            <a:avLst/>
+          </a:prstGeom>
+          <a:solidFill>
+            <a:srgbClr val="F59E0B"/>
+          </a:solidFill>
+          <a:ln>
+            <a:noFill/>
+          </a:ln>
+          <a:effectLst/>
+        </p:spPr>
+        <p:style>
+          <a:lnRef idx="1">
+            <a:schemeClr val="accent1"/>
+          </a:lnRef>
+          <a:fillRef idx="3">
+            <a:schemeClr val="accent1"/>
+          </a:fillRef>
+          <a:effectRef idx="2">
+            <a:schemeClr val="accent1"/>
+          </a:effectRef>
+          <a:fontRef idx="minor">
+            <a:schemeClr val="lt1"/>
+          </a:fontRef>
+        </p:style>
+        <p:txBody>
+          <a:bodyPr rtlCol="0" anchor="ctr"/>
+          <a:lstStyle/>
+          <a:p>
+            <a:pPr algn="ctr"/>
+          </a:p>
+        </p:txBody>
+      </p:sp>
+      <p:sp>
+        <p:nvSpPr>
+          <p:cNvPr id="29" name="TextBox 28"/>
+          <p:cNvSpPr txBox="1"/>
+          <p:nvPr/>
+        </p:nvSpPr>
+        <p:spPr>
+          <a:xfrm>
+            <a:off x="8412480" y="4206240"/>
+            <a:ext cx="3108960" cy="365760"/>
+          </a:xfrm>
+          <a:prstGeom prst="rect">
+            <a:avLst/>
+          </a:prstGeom>
+          <a:noFill/>
+        </p:spPr>
+        <p:txBody>
+          <a:bodyPr wrap="square" anchor="t" lIns="0" rIns="0" tIns="0" bIns="0">
+            <a:spAutoFit/>
+          </a:bodyPr>
+          <a:lstStyle/>
+          <a:p>
+            <a:pPr algn="l"/>
+            <a:r>
+              <a:rPr sz="1700" b="1">
+                <a:solidFill>
+                  <a:srgbClr val="0F172A"/>
+                </a:solidFill>
+                <a:latin typeface="Calibri"/>
+              </a:rPr>
+              <a:t>6  F1 evaluation</a:t>
+            </a:r>
+          </a:p>
+        </p:txBody>
+      </p:sp>
+      <p:sp>
+        <p:nvSpPr>
+          <p:cNvPr id="30" name="TextBox 29"/>
+          <p:cNvSpPr txBox="1"/>
+          <p:nvPr/>
+        </p:nvSpPr>
+        <p:spPr>
+          <a:xfrm>
+            <a:off x="8412480" y="4645152"/>
+            <a:ext cx="3108960" cy="1417320"/>
+          </a:xfrm>
+          <a:prstGeom prst="rect">
+            <a:avLst/>
+          </a:prstGeom>
+          <a:noFill/>
+        </p:spPr>
+        <p:txBody>
+          <a:bodyPr wrap="square" anchor="t" lIns="0" rIns="0" tIns="0" bIns="0">
+            <a:spAutoFit/>
+          </a:bodyPr>
+          <a:lstStyle/>
+          <a:p>
+            <a:pPr algn="l"/>
+            <a:r>
+              <a:rPr sz="1800" b="0">
+                <a:solidFill>
+                  <a:srgbClr val="1E293B"/>
+                </a:solidFill>
+                <a:latin typeface="Calibri"/>
+              </a:rPr>
+              <a:t>Macro / weighted / per-class F1 on held-out actors</a:t>
             </a:r>
           </a:p>
         </p:txBody>
@@ -8714,7 +9037,7 @@
                 </a:solidFill>
                 <a:latin typeface="Calibri"/>
               </a:rPr>
-              <a:t>DATASET</a:t>
+              <a:t>DATA COLLECTION</a:t>
             </a:r>
           </a:p>
         </p:txBody>
@@ -8749,7 +9072,7 @@
                 </a:solidFill>
                 <a:latin typeface="Calibri"/>
               </a:rPr>
-              <a:t>Data collection: RAVDESS</a:t>
+              <a:t>Dataset: RAVDESS speech</a:t>
             </a:r>
           </a:p>
         </p:txBody>
@@ -8832,8 +9155,8 @@
         </p:nvSpPr>
         <p:spPr>
           <a:xfrm>
-            <a:off x="640080" y="1691640"/>
-            <a:ext cx="2651760" cy="1417320"/>
+            <a:off x="640080" y="1600200"/>
+            <a:ext cx="1920240" cy="1417320"/>
           </a:xfrm>
           <a:prstGeom prst="roundRect">
             <a:avLst/>
@@ -8876,8 +9199,8 @@
         </p:nvSpPr>
         <p:spPr>
           <a:xfrm>
-            <a:off x="640080" y="1874520"/>
-            <a:ext cx="2651760" cy="731520"/>
+            <a:off x="640080" y="1783080"/>
+            <a:ext cx="1920240" cy="731520"/>
           </a:xfrm>
           <a:prstGeom prst="rect">
             <a:avLst/>
@@ -8898,7 +9221,7 @@
                 </a:solidFill>
                 <a:latin typeface="Calibri"/>
               </a:rPr>
-              <a:t>384</a:t>
+              <a:t>1,440</a:t>
             </a:r>
           </a:p>
         </p:txBody>
@@ -8911,8 +9234,8 @@
         </p:nvSpPr>
         <p:spPr>
           <a:xfrm>
-            <a:off x="640080" y="2606040"/>
-            <a:ext cx="2651760" cy="365760"/>
+            <a:off x="640080" y="2514600"/>
+            <a:ext cx="1920240" cy="365760"/>
           </a:xfrm>
           <a:prstGeom prst="rect">
             <a:avLst/>
@@ -8933,7 +9256,7 @@
                 </a:solidFill>
                 <a:latin typeface="Calibri"/>
               </a:rPr>
-              <a:t>clips used</a:t>
+              <a:t>clips</a:t>
             </a:r>
           </a:p>
         </p:txBody>
@@ -8946,8 +9269,8 @@
         </p:nvSpPr>
         <p:spPr>
           <a:xfrm>
-            <a:off x="3474720" y="1691640"/>
-            <a:ext cx="2651760" cy="1417320"/>
+            <a:off x="2743200" y="1600200"/>
+            <a:ext cx="1920240" cy="1417320"/>
           </a:xfrm>
           <a:prstGeom prst="roundRect">
             <a:avLst/>
@@ -8990,8 +9313,8 @@
         </p:nvSpPr>
         <p:spPr>
           <a:xfrm>
-            <a:off x="3474720" y="1874520"/>
-            <a:ext cx="2651760" cy="731520"/>
+            <a:off x="2743200" y="1783080"/>
+            <a:ext cx="1920240" cy="731520"/>
           </a:xfrm>
           <a:prstGeom prst="rect">
             <a:avLst/>
@@ -9012,7 +9335,7 @@
                 </a:solidFill>
                 <a:latin typeface="Calibri"/>
               </a:rPr>
-              <a:t>12</a:t>
+              <a:t>24</a:t>
             </a:r>
           </a:p>
         </p:txBody>
@@ -9025,8 +9348,8 @@
         </p:nvSpPr>
         <p:spPr>
           <a:xfrm>
-            <a:off x="3474720" y="2606040"/>
-            <a:ext cx="2651760" cy="365760"/>
+            <a:off x="2743200" y="2514600"/>
+            <a:ext cx="1920240" cy="365760"/>
           </a:xfrm>
           <a:prstGeom prst="rect">
             <a:avLst/>
@@ -9060,8 +9383,8 @@
         </p:nvSpPr>
         <p:spPr>
           <a:xfrm>
-            <a:off x="6309360" y="1691640"/>
-            <a:ext cx="2651760" cy="1417320"/>
+            <a:off x="4846320" y="1600200"/>
+            <a:ext cx="1920240" cy="1417320"/>
           </a:xfrm>
           <a:prstGeom prst="roundRect">
             <a:avLst/>
@@ -9104,8 +9427,8 @@
         </p:nvSpPr>
         <p:spPr>
           <a:xfrm>
-            <a:off x="6309360" y="1874520"/>
-            <a:ext cx="2651760" cy="731520"/>
+            <a:off x="4846320" y="1783080"/>
+            <a:ext cx="1920240" cy="731520"/>
           </a:xfrm>
           <a:prstGeom prst="rect">
             <a:avLst/>
@@ -9139,8 +9462,8 @@
         </p:nvSpPr>
         <p:spPr>
           <a:xfrm>
-            <a:off x="6309360" y="2606040"/>
-            <a:ext cx="2651760" cy="365760"/>
+            <a:off x="4846320" y="2514600"/>
+            <a:ext cx="1920240" cy="365760"/>
           </a:xfrm>
           <a:prstGeom prst="rect">
             <a:avLst/>
@@ -9161,52 +9484,43 @@
                 </a:solidFill>
                 <a:latin typeface="Calibri"/>
               </a:rPr>
-              <a:t>emotion classes</a:t>
-            </a:r>
-          </a:p>
-        </p:txBody>
-      </p:sp>
-      <p:sp>
-        <p:nvSpPr>
-          <p:cNvPr id="16" name="Rounded Rectangle 15"/>
-          <p:cNvSpPr/>
-          <p:nvPr/>
-        </p:nvSpPr>
-        <p:spPr>
-          <a:xfrm>
-            <a:off x="640080" y="3337560"/>
-            <a:ext cx="8321040" cy="1280160"/>
-          </a:xfrm>
-          <a:prstGeom prst="roundRect">
-            <a:avLst/>
-          </a:prstGeom>
-          <a:solidFill>
-            <a:srgbClr val="EEF2FF"/>
-          </a:solidFill>
-          <a:ln>
-            <a:noFill/>
-          </a:ln>
-          <a:effectLst/>
-        </p:spPr>
-        <p:style>
-          <a:lnRef idx="1">
-            <a:schemeClr val="accent1"/>
-          </a:lnRef>
-          <a:fillRef idx="3">
-            <a:schemeClr val="accent1"/>
-          </a:fillRef>
-          <a:effectRef idx="2">
-            <a:schemeClr val="accent1"/>
-          </a:effectRef>
-          <a:fontRef idx="minor">
-            <a:schemeClr val="lt1"/>
-          </a:fontRef>
-        </p:style>
-        <p:txBody>
-          <a:bodyPr rtlCol="0" anchor="ctr"/>
-          <a:lstStyle/>
-          <a:p>
-            <a:pPr algn="ctr"/>
+              <a:t>emotions</a:t>
+            </a:r>
+          </a:p>
+        </p:txBody>
+      </p:sp>
+      <p:sp>
+        <p:nvSpPr>
+          <p:cNvPr id="16" name="TextBox 15"/>
+          <p:cNvSpPr txBox="1"/>
+          <p:nvPr/>
+        </p:nvSpPr>
+        <p:spPr>
+          <a:xfrm>
+            <a:off x="640080" y="3246120"/>
+            <a:ext cx="6400800" cy="365760"/>
+          </a:xfrm>
+          <a:prstGeom prst="rect">
+            <a:avLst/>
+          </a:prstGeom>
+          <a:noFill/>
+        </p:spPr>
+        <p:txBody>
+          <a:bodyPr wrap="square" anchor="t" lIns="0" rIns="0" tIns="0" bIns="0">
+            <a:spAutoFit/>
+          </a:bodyPr>
+          <a:lstStyle/>
+          <a:p>
+            <a:pPr algn="l"/>
+            <a:r>
+              <a:rPr sz="1800" b="1">
+                <a:solidFill>
+                  <a:srgbClr val="0F172A"/>
+                </a:solidFill>
+                <a:latin typeface="Calibri"/>
+              </a:rPr>
+              <a:t>Actor-independent split</a:t>
+            </a:r>
           </a:p>
         </p:txBody>
       </p:sp>
@@ -9218,8 +9532,8 @@
         </p:nvSpPr>
         <p:spPr>
           <a:xfrm>
-            <a:off x="640080" y="3502152"/>
-            <a:ext cx="73152" cy="950976"/>
+            <a:off x="640080" y="3703320"/>
+            <a:ext cx="4169663" cy="777240"/>
           </a:xfrm>
           <a:prstGeom prst="rect">
             <a:avLst/>
@@ -9262,8 +9576,43 @@
         </p:nvSpPr>
         <p:spPr>
           <a:xfrm>
-            <a:off x="914400" y="3520440"/>
-            <a:ext cx="7863840" cy="365760"/>
+            <a:off x="640080" y="3703320"/>
+            <a:ext cx="4169663" cy="777240"/>
+          </a:xfrm>
+          <a:prstGeom prst="rect">
+            <a:avLst/>
+          </a:prstGeom>
+          <a:noFill/>
+        </p:spPr>
+        <p:txBody>
+          <a:bodyPr wrap="square" anchor="ctr" lIns="0" rIns="0" tIns="0" bIns="0">
+            <a:spAutoFit/>
+          </a:bodyPr>
+          <a:lstStyle/>
+          <a:p>
+            <a:pPr algn="ctr"/>
+            <a:r>
+              <a:rPr sz="1400" b="1">
+                <a:solidFill>
+                  <a:srgbClr val="FFFFFF"/>
+                </a:solidFill>
+                <a:latin typeface="Calibri"/>
+              </a:rPr>
+              <a:t>Train: 960</a:t>
+            </a:r>
+          </a:p>
+        </p:txBody>
+      </p:sp>
+      <p:sp>
+        <p:nvSpPr>
+          <p:cNvPr id="19" name="TextBox 18"/>
+          <p:cNvSpPr txBox="1"/>
+          <p:nvPr/>
+        </p:nvSpPr>
+        <p:spPr>
+          <a:xfrm>
+            <a:off x="640080" y="4526280"/>
+            <a:ext cx="4169663" cy="365760"/>
           </a:xfrm>
           <a:prstGeom prst="rect">
             <a:avLst/>
@@ -9276,29 +9625,108 @@
           </a:bodyPr>
           <a:lstStyle/>
           <a:p>
-            <a:pPr algn="l"/>
-            <a:r>
-              <a:rPr sz="1700" b="1">
-                <a:solidFill>
-                  <a:srgbClr val="0F172A"/>
-                </a:solidFill>
-                <a:latin typeface="Calibri"/>
-              </a:rPr>
-              <a:t>Speaker-independent split</a:t>
-            </a:r>
-          </a:p>
-        </p:txBody>
-      </p:sp>
-      <p:sp>
-        <p:nvSpPr>
-          <p:cNvPr id="19" name="TextBox 18"/>
+            <a:pPr algn="ctr"/>
+            <a:r>
+              <a:rPr sz="1200" b="0">
+                <a:solidFill>
+                  <a:srgbClr val="64748B"/>
+                </a:solidFill>
+                <a:latin typeface="Calibri"/>
+              </a:rPr>
+              <a:t>actors 1-16</a:t>
+            </a:r>
+          </a:p>
+        </p:txBody>
+      </p:sp>
+      <p:sp>
+        <p:nvSpPr>
+          <p:cNvPr id="20" name="Rectangle 19"/>
+          <p:cNvSpPr/>
+          <p:nvPr/>
+        </p:nvSpPr>
+        <p:spPr>
+          <a:xfrm>
+            <a:off x="4846320" y="3703320"/>
+            <a:ext cx="1014983" cy="777240"/>
+          </a:xfrm>
+          <a:prstGeom prst="rect">
+            <a:avLst/>
+          </a:prstGeom>
+          <a:solidFill>
+            <a:srgbClr val="F59E0B"/>
+          </a:solidFill>
+          <a:ln>
+            <a:noFill/>
+          </a:ln>
+          <a:effectLst/>
+        </p:spPr>
+        <p:style>
+          <a:lnRef idx="1">
+            <a:schemeClr val="accent1"/>
+          </a:lnRef>
+          <a:fillRef idx="3">
+            <a:schemeClr val="accent1"/>
+          </a:fillRef>
+          <a:effectRef idx="2">
+            <a:schemeClr val="accent1"/>
+          </a:effectRef>
+          <a:fontRef idx="minor">
+            <a:schemeClr val="lt1"/>
+          </a:fontRef>
+        </p:style>
+        <p:txBody>
+          <a:bodyPr rtlCol="0" anchor="ctr"/>
+          <a:lstStyle/>
+          <a:p>
+            <a:pPr algn="ctr"/>
+          </a:p>
+        </p:txBody>
+      </p:sp>
+      <p:sp>
+        <p:nvSpPr>
+          <p:cNvPr id="21" name="TextBox 20"/>
           <p:cNvSpPr txBox="1"/>
           <p:nvPr/>
         </p:nvSpPr>
         <p:spPr>
           <a:xfrm>
-            <a:off x="914400" y="3959352"/>
-            <a:ext cx="7863840" cy="548639"/>
+            <a:off x="4846320" y="3703320"/>
+            <a:ext cx="1014983" cy="777240"/>
+          </a:xfrm>
+          <a:prstGeom prst="rect">
+            <a:avLst/>
+          </a:prstGeom>
+          <a:noFill/>
+        </p:spPr>
+        <p:txBody>
+          <a:bodyPr wrap="square" anchor="ctr" lIns="0" rIns="0" tIns="0" bIns="0">
+            <a:spAutoFit/>
+          </a:bodyPr>
+          <a:lstStyle/>
+          <a:p>
+            <a:pPr algn="ctr"/>
+            <a:r>
+              <a:rPr sz="1400" b="1">
+                <a:solidFill>
+                  <a:srgbClr val="FFFFFF"/>
+                </a:solidFill>
+                <a:latin typeface="Calibri"/>
+              </a:rPr>
+              <a:t>Val: 240</a:t>
+            </a:r>
+          </a:p>
+        </p:txBody>
+      </p:sp>
+      <p:sp>
+        <p:nvSpPr>
+          <p:cNvPr id="22" name="TextBox 21"/>
+          <p:cNvSpPr txBox="1"/>
+          <p:nvPr/>
+        </p:nvSpPr>
+        <p:spPr>
+          <a:xfrm>
+            <a:off x="4846320" y="4526280"/>
+            <a:ext cx="1014983" cy="365760"/>
           </a:xfrm>
           <a:prstGeom prst="rect">
             <a:avLst/>
@@ -9311,29 +9739,143 @@
           </a:bodyPr>
           <a:lstStyle/>
           <a:p>
-            <a:pPr algn="l"/>
-            <a:r>
-              <a:rPr sz="1400" b="0">
-                <a:solidFill>
-                  <a:srgbClr val="1E293B"/>
-                </a:solidFill>
-                <a:latin typeface="Calibri"/>
-              </a:rPr>
-              <a:t>Train 224 clips (7 actors)  |  Validation 64 (2)  |  Test 96 (3). No actor appears in two partitions.</a:t>
-            </a:r>
-          </a:p>
-        </p:txBody>
-      </p:sp>
-      <p:sp>
-        <p:nvSpPr>
-          <p:cNvPr id="20" name="TextBox 19"/>
+            <a:pPr algn="ctr"/>
+            <a:r>
+              <a:rPr sz="1200" b="0">
+                <a:solidFill>
+                  <a:srgbClr val="64748B"/>
+                </a:solidFill>
+                <a:latin typeface="Calibri"/>
+              </a:rPr>
+              <a:t>actors 17-20</a:t>
+            </a:r>
+          </a:p>
+        </p:txBody>
+      </p:sp>
+      <p:sp>
+        <p:nvSpPr>
+          <p:cNvPr id="23" name="Rectangle 22"/>
+          <p:cNvSpPr/>
+          <p:nvPr/>
+        </p:nvSpPr>
+        <p:spPr>
+          <a:xfrm>
+            <a:off x="5897879" y="3703320"/>
+            <a:ext cx="1014983" cy="777240"/>
+          </a:xfrm>
+          <a:prstGeom prst="rect">
+            <a:avLst/>
+          </a:prstGeom>
+          <a:solidFill>
+            <a:srgbClr val="06B6D4"/>
+          </a:solidFill>
+          <a:ln>
+            <a:noFill/>
+          </a:ln>
+          <a:effectLst/>
+        </p:spPr>
+        <p:style>
+          <a:lnRef idx="1">
+            <a:schemeClr val="accent1"/>
+          </a:lnRef>
+          <a:fillRef idx="3">
+            <a:schemeClr val="accent1"/>
+          </a:fillRef>
+          <a:effectRef idx="2">
+            <a:schemeClr val="accent1"/>
+          </a:effectRef>
+          <a:fontRef idx="minor">
+            <a:schemeClr val="lt1"/>
+          </a:fontRef>
+        </p:style>
+        <p:txBody>
+          <a:bodyPr rtlCol="0" anchor="ctr"/>
+          <a:lstStyle/>
+          <a:p>
+            <a:pPr algn="ctr"/>
+          </a:p>
+        </p:txBody>
+      </p:sp>
+      <p:sp>
+        <p:nvSpPr>
+          <p:cNvPr id="24" name="TextBox 23"/>
           <p:cNvSpPr txBox="1"/>
           <p:nvPr/>
         </p:nvSpPr>
         <p:spPr>
           <a:xfrm>
-            <a:off x="640080" y="4892040"/>
-            <a:ext cx="8321040" cy="457200"/>
+            <a:off x="5897879" y="3703320"/>
+            <a:ext cx="1014983" cy="777240"/>
+          </a:xfrm>
+          <a:prstGeom prst="rect">
+            <a:avLst/>
+          </a:prstGeom>
+          <a:noFill/>
+        </p:spPr>
+        <p:txBody>
+          <a:bodyPr wrap="square" anchor="ctr" lIns="0" rIns="0" tIns="0" bIns="0">
+            <a:spAutoFit/>
+          </a:bodyPr>
+          <a:lstStyle/>
+          <a:p>
+            <a:pPr algn="ctr"/>
+            <a:r>
+              <a:rPr sz="1400" b="1">
+                <a:solidFill>
+                  <a:srgbClr val="FFFFFF"/>
+                </a:solidFill>
+                <a:latin typeface="Calibri"/>
+              </a:rPr>
+              <a:t>Test: 240</a:t>
+            </a:r>
+          </a:p>
+        </p:txBody>
+      </p:sp>
+      <p:sp>
+        <p:nvSpPr>
+          <p:cNvPr id="25" name="TextBox 24"/>
+          <p:cNvSpPr txBox="1"/>
+          <p:nvPr/>
+        </p:nvSpPr>
+        <p:spPr>
+          <a:xfrm>
+            <a:off x="5897879" y="4526280"/>
+            <a:ext cx="1014983" cy="365760"/>
+          </a:xfrm>
+          <a:prstGeom prst="rect">
+            <a:avLst/>
+          </a:prstGeom>
+          <a:noFill/>
+        </p:spPr>
+        <p:txBody>
+          <a:bodyPr wrap="square" anchor="t" lIns="0" rIns="0" tIns="0" bIns="0">
+            <a:spAutoFit/>
+          </a:bodyPr>
+          <a:lstStyle/>
+          <a:p>
+            <a:pPr algn="ctr"/>
+            <a:r>
+              <a:rPr sz="1200" b="0">
+                <a:solidFill>
+                  <a:srgbClr val="64748B"/>
+                </a:solidFill>
+                <a:latin typeface="Calibri"/>
+              </a:rPr>
+              <a:t>actors 21-24</a:t>
+            </a:r>
+          </a:p>
+        </p:txBody>
+      </p:sp>
+      <p:sp>
+        <p:nvSpPr>
+          <p:cNvPr id="26" name="TextBox 25"/>
+          <p:cNvSpPr txBox="1"/>
+          <p:nvPr/>
+        </p:nvSpPr>
+        <p:spPr>
+          <a:xfrm>
+            <a:off x="640080" y="5029200"/>
+            <a:ext cx="6309360" cy="457200"/>
           </a:xfrm>
           <a:prstGeom prst="rect">
             <a:avLst/>
@@ -9352,7 +9894,7 @@
               </a:spcAft>
             </a:pPr>
             <a:r>
-              <a:rPr sz="900">
+              <a:rPr sz="800">
                 <a:solidFill>
                   <a:srgbClr val="4F46E5"/>
                 </a:solidFill>
@@ -9360,22 +9902,13 @@
               <a:t>■  </a:t>
             </a:r>
             <a:r>
-              <a:rPr b="1" sz="1500">
+              <a:rPr sz="1400">
                 <a:solidFill>
                   <a:srgbClr val="1E293B"/>
                 </a:solidFill>
                 <a:latin typeface="Calibri"/>
               </a:rPr>
-              <a:t>Labels</a:t>
-            </a:r>
-            <a:r>
-              <a:rPr sz="1500">
-                <a:solidFill>
-                  <a:srgbClr val="1E293B"/>
-                </a:solidFill>
-                <a:latin typeface="Calibri"/>
-              </a:rPr>
-              <a:t>  parsed from filenames such as 03-01-05-02-01-01-07.wav</a:t>
+              <a:t>No actor appears in two partitions (asserted in code)</a:t>
             </a:r>
           </a:p>
           <a:p>
@@ -9385,7 +9918,7 @@
               </a:spcAft>
             </a:pPr>
             <a:r>
-              <a:rPr sz="900">
+              <a:rPr sz="800">
                 <a:solidFill>
                   <a:srgbClr val="4F46E5"/>
                 </a:solidFill>
@@ -9393,29 +9926,20 @@
               <a:t>■  </a:t>
             </a:r>
             <a:r>
-              <a:rPr b="1" sz="1500">
+              <a:rPr sz="1400">
                 <a:solidFill>
                   <a:srgbClr val="1E293B"/>
                 </a:solidFill>
                 <a:latin typeface="Calibri"/>
               </a:rPr>
-              <a:t>Source</a:t>
-            </a:r>
-            <a:r>
-              <a:rPr sz="1500">
-                <a:solidFill>
-                  <a:srgbClr val="1E293B"/>
-                </a:solidFill>
-                <a:latin typeface="Calibri"/>
-              </a:rPr>
-              <a:t>  Zenodo, CC BY-NC-SA 4.0, auto-downloaded by --download</a:t>
+              <a:t>Training grows to 2,880 samples with augmentation; val/test are never augmented</a:t>
             </a:r>
           </a:p>
         </p:txBody>
       </p:sp>
       <p:pic>
         <p:nvPicPr>
-          <p:cNvPr id="21" name="Picture 20" descr="class_distribution.png"/>
+          <p:cNvPr id="27" name="Picture 26" descr="class_distribution.png"/>
           <p:cNvPicPr>
             <a:picLocks noChangeAspect="1"/>
           </p:cNvPicPr>
@@ -9429,8 +9953,8 @@
         </p:blipFill>
         <p:spPr>
           <a:xfrm>
-            <a:off x="9144000" y="1737360"/>
-            <a:ext cx="2697480" cy="1146429"/>
+            <a:off x="7223760" y="1645920"/>
+            <a:ext cx="4480560" cy="1904238"/>
           </a:xfrm>
           <a:prstGeom prst="rect">
             <a:avLst/>
@@ -9439,14 +9963,14 @@
       </p:pic>
       <p:sp>
         <p:nvSpPr>
-          <p:cNvPr id="22" name="TextBox 21"/>
+          <p:cNvPr id="28" name="TextBox 27"/>
           <p:cNvSpPr txBox="1"/>
           <p:nvPr/>
         </p:nvSpPr>
         <p:spPr>
           <a:xfrm>
-            <a:off x="9144000" y="2743200"/>
-            <a:ext cx="2697480" cy="365760"/>
+            <a:off x="7223760" y="3840480"/>
+            <a:ext cx="4480560" cy="914400"/>
           </a:xfrm>
           <a:prstGeom prst="rect">
             <a:avLst/>
@@ -9461,13 +9985,13 @@
           <a:p>
             <a:pPr algn="l"/>
             <a:r>
-              <a:rPr sz="1000" b="0">
-                <a:solidFill>
-                  <a:srgbClr val="1E293B"/>
-                </a:solidFill>
-                <a:latin typeface="Calibri"/>
-              </a:rPr>
-              <a:t/>
+              <a:rPr sz="1300" b="0">
+                <a:solidFill>
+                  <a:srgbClr val="64748B"/>
+                </a:solidFill>
+                <a:latin typeface="Calibri"/>
+              </a:rPr>
+              <a:t>Labels: neutral, calm, happy, sad, angry, fearful, disgust, surprised (fixed order used everywhere).</a:t>
             </a:r>
           </a:p>
         </p:txBody>
@@ -9564,7 +10088,7 @@
                 </a:solidFill>
                 <a:latin typeface="Calibri"/>
               </a:rPr>
-              <a:t>FEATURES</a:t>
+              <a:t>PIPELINE</a:t>
             </a:r>
           </a:p>
         </p:txBody>
@@ -9599,7 +10123,7 @@
                 </a:solidFill>
                 <a:latin typeface="Calibri"/>
               </a:rPr>
-              <a:t>Pre-processing and MFCC features</a:t>
+              <a:t>Proposed methodology</a:t>
             </a:r>
           </a:p>
         </p:txBody>
@@ -9674,194 +10198,30 @@
           </a:p>
         </p:txBody>
       </p:sp>
-      <p:sp>
-        <p:nvSpPr>
-          <p:cNvPr id="7" name="TextBox 6"/>
-          <p:cNvSpPr txBox="1"/>
-          <p:nvPr/>
-        </p:nvSpPr>
-        <p:spPr>
-          <a:xfrm>
-            <a:off x="640080" y="1691640"/>
-            <a:ext cx="5669280" cy="457200"/>
-          </a:xfrm>
-          <a:prstGeom prst="rect">
-            <a:avLst/>
-          </a:prstGeom>
-          <a:noFill/>
-        </p:spPr>
-        <p:txBody>
-          <a:bodyPr wrap="square" lIns="0" rIns="0" tIns="0">
-            <a:spAutoFit/>
-          </a:bodyPr>
-          <a:lstStyle/>
-          <a:p>
-            <a:pPr>
-              <a:spcAft>
-                <a:spcPts val="900"/>
-              </a:spcAft>
-            </a:pPr>
-            <a:r>
-              <a:rPr sz="1000">
-                <a:solidFill>
-                  <a:srgbClr val="4F46E5"/>
-                </a:solidFill>
-              </a:rPr>
-              <a:t>■  </a:t>
-            </a:r>
-            <a:r>
-              <a:rPr b="1" sz="1600">
-                <a:solidFill>
-                  <a:srgbClr val="1E293B"/>
-                </a:solidFill>
-                <a:latin typeface="Calibri"/>
-              </a:rPr>
-              <a:t>Resample</a:t>
-            </a:r>
-            <a:r>
-              <a:rPr sz="1600">
-                <a:solidFill>
-                  <a:srgbClr val="1E293B"/>
-                </a:solidFill>
-                <a:latin typeface="Calibri"/>
-              </a:rPr>
-              <a:t>  to 22.05 kHz mono; trim silence; peak-normalise</a:t>
-            </a:r>
-          </a:p>
-          <a:p>
-            <a:pPr>
-              <a:spcAft>
-                <a:spcPts val="900"/>
-              </a:spcAft>
-            </a:pPr>
-            <a:r>
-              <a:rPr sz="1000">
-                <a:solidFill>
-                  <a:srgbClr val="4F46E5"/>
-                </a:solidFill>
-              </a:rPr>
-              <a:t>■  </a:t>
-            </a:r>
-            <a:r>
-              <a:rPr b="1" sz="1600">
-                <a:solidFill>
-                  <a:srgbClr val="1E293B"/>
-                </a:solidFill>
-                <a:latin typeface="Calibri"/>
-              </a:rPr>
-              <a:t>Fixed window</a:t>
-            </a:r>
-            <a:r>
-              <a:rPr sz="1600">
-                <a:solidFill>
-                  <a:srgbClr val="1E293B"/>
-                </a:solidFill>
-                <a:latin typeface="Calibri"/>
-              </a:rPr>
-              <a:t>  3 s centre crop / zero-pad</a:t>
-            </a:r>
-          </a:p>
-          <a:p>
-            <a:pPr>
-              <a:spcAft>
-                <a:spcPts val="900"/>
-              </a:spcAft>
-            </a:pPr>
-            <a:r>
-              <a:rPr sz="1000">
-                <a:solidFill>
-                  <a:srgbClr val="4F46E5"/>
-                </a:solidFill>
-              </a:rPr>
-              <a:t>■  </a:t>
-            </a:r>
-            <a:r>
-              <a:rPr b="1" sz="1600">
-                <a:solidFill>
-                  <a:srgbClr val="1E293B"/>
-                </a:solidFill>
-                <a:latin typeface="Calibri"/>
-              </a:rPr>
-              <a:t>Augment</a:t>
-            </a:r>
-            <a:r>
-              <a:rPr sz="1600">
-                <a:solidFill>
-                  <a:srgbClr val="1E293B"/>
-                </a:solidFill>
-                <a:latin typeface="Calibri"/>
-              </a:rPr>
-              <a:t>  noise, pitch +/-2 st, stretch 0.9-1.1x, shift (train only)</a:t>
-            </a:r>
-          </a:p>
-          <a:p>
-            <a:pPr>
-              <a:spcAft>
-                <a:spcPts val="900"/>
-              </a:spcAft>
-            </a:pPr>
-            <a:r>
-              <a:rPr sz="1000">
-                <a:solidFill>
-                  <a:srgbClr val="4F46E5"/>
-                </a:solidFill>
-              </a:rPr>
-              <a:t>■  </a:t>
-            </a:r>
-            <a:r>
-              <a:rPr b="1" sz="1600">
-                <a:solidFill>
-                  <a:srgbClr val="1E293B"/>
-                </a:solidFill>
-                <a:latin typeface="Calibri"/>
-              </a:rPr>
-              <a:t>MFCC</a:t>
-            </a:r>
-            <a:r>
-              <a:rPr sz="1600">
-                <a:solidFill>
-                  <a:srgbClr val="1E293B"/>
-                </a:solidFill>
-                <a:latin typeface="Calibri"/>
-              </a:rPr>
-              <a:t>  40 coefficients + delta + delta-delta = 120 features</a:t>
-            </a:r>
-          </a:p>
-          <a:p>
-            <a:pPr>
-              <a:spcAft>
-                <a:spcPts val="900"/>
-              </a:spcAft>
-            </a:pPr>
-            <a:r>
-              <a:rPr sz="1000">
-                <a:solidFill>
-                  <a:srgbClr val="4F46E5"/>
-                </a:solidFill>
-              </a:rPr>
-              <a:t>■  </a:t>
-            </a:r>
-            <a:r>
-              <a:rPr b="1" sz="1600">
-                <a:solidFill>
-                  <a:srgbClr val="1E293B"/>
-                </a:solidFill>
-                <a:latin typeface="Calibri"/>
-              </a:rPr>
-              <a:t>Standardise</a:t>
-            </a:r>
-            <a:r>
-              <a:rPr sz="1600">
-                <a:solidFill>
-                  <a:srgbClr val="1E293B"/>
-                </a:solidFill>
-                <a:latin typeface="Calibri"/>
-              </a:rPr>
-              <a:t>  train-set mean / std per coefficient</a:t>
-            </a:r>
-          </a:p>
-        </p:txBody>
-      </p:sp>
+      <p:pic>
+        <p:nvPicPr>
+          <p:cNvPr id="7" name="Picture 6" descr="diagram_pipeline.png"/>
+          <p:cNvPicPr>
+            <a:picLocks noChangeAspect="1"/>
+          </p:cNvPicPr>
+          <p:nvPr/>
+        </p:nvPicPr>
+        <p:blipFill>
+          <a:blip r:embed="rId3"/>
+          <a:stretch>
+            <a:fillRect/>
+          </a:stretch>
+        </p:blipFill>
+        <p:spPr>
+          <a:xfrm>
+            <a:off x="640080" y="1554480"/>
+            <a:ext cx="10881360" cy="2357628"/>
+          </a:xfrm>
+          <a:prstGeom prst="rect">
+            <a:avLst/>
+          </a:prstGeom>
+        </p:spPr>
+      </p:pic>
       <p:sp>
         <p:nvSpPr>
           <p:cNvPr id="8" name="Rounded Rectangle 7"/>
@@ -9870,8 +10230,8 @@
         </p:nvSpPr>
         <p:spPr>
           <a:xfrm>
-            <a:off x="640080" y="5486400"/>
-            <a:ext cx="5669280" cy="731520"/>
+            <a:off x="640080" y="3931920"/>
+            <a:ext cx="3566160" cy="2286000"/>
           </a:xfrm>
           <a:prstGeom prst="roundRect">
             <a:avLst/>
@@ -9908,73 +10268,58 @@
       </p:sp>
       <p:sp>
         <p:nvSpPr>
-          <p:cNvPr id="9" name="TextBox 8"/>
+          <p:cNvPr id="9" name="Rectangle 8"/>
+          <p:cNvSpPr/>
+          <p:nvPr/>
+        </p:nvSpPr>
+        <p:spPr>
+          <a:xfrm>
+            <a:off x="640080" y="4096511"/>
+            <a:ext cx="73152" cy="1956816"/>
+          </a:xfrm>
+          <a:prstGeom prst="rect">
+            <a:avLst/>
+          </a:prstGeom>
+          <a:solidFill>
+            <a:srgbClr val="4F46E5"/>
+          </a:solidFill>
+          <a:ln>
+            <a:noFill/>
+          </a:ln>
+          <a:effectLst/>
+        </p:spPr>
+        <p:style>
+          <a:lnRef idx="1">
+            <a:schemeClr val="accent1"/>
+          </a:lnRef>
+          <a:fillRef idx="3">
+            <a:schemeClr val="accent1"/>
+          </a:fillRef>
+          <a:effectRef idx="2">
+            <a:schemeClr val="accent1"/>
+          </a:effectRef>
+          <a:fontRef idx="minor">
+            <a:schemeClr val="lt1"/>
+          </a:fontRef>
+        </p:style>
+        <p:txBody>
+          <a:bodyPr rtlCol="0" anchor="ctr"/>
+          <a:lstStyle/>
+          <a:p>
+            <a:pPr algn="ctr"/>
+          </a:p>
+        </p:txBody>
+      </p:sp>
+      <p:sp>
+        <p:nvSpPr>
+          <p:cNvPr id="10" name="TextBox 9"/>
           <p:cNvSpPr txBox="1"/>
           <p:nvPr/>
         </p:nvSpPr>
         <p:spPr>
           <a:xfrm>
-            <a:off x="868680" y="5486400"/>
-            <a:ext cx="5303520" cy="731520"/>
-          </a:xfrm>
-          <a:prstGeom prst="rect">
-            <a:avLst/>
-          </a:prstGeom>
-          <a:noFill/>
-        </p:spPr>
-        <p:txBody>
-          <a:bodyPr wrap="square" anchor="ctr" lIns="0" rIns="0" tIns="0" bIns="0">
-            <a:spAutoFit/>
-          </a:bodyPr>
-          <a:lstStyle/>
-          <a:p>
-            <a:pPr algn="l"/>
-            <a:r>
-              <a:rPr sz="1600" b="1">
-                <a:solidFill>
-                  <a:srgbClr val="4F46E5"/>
-                </a:solidFill>
-                <a:latin typeface="Calibri"/>
-              </a:rPr>
-              <a:t>Input tensor per clip:  130 frames  x  120 features</a:t>
-            </a:r>
-          </a:p>
-        </p:txBody>
-      </p:sp>
-      <p:pic>
-        <p:nvPicPr>
-          <p:cNvPr id="10" name="Picture 9" descr="mfcc_example.png"/>
-          <p:cNvPicPr>
-            <a:picLocks noChangeAspect="1"/>
-          </p:cNvPicPr>
-          <p:nvPr/>
-        </p:nvPicPr>
-        <p:blipFill>
-          <a:blip r:embed="rId3"/>
-          <a:stretch>
-            <a:fillRect/>
-          </a:stretch>
-        </p:blipFill>
-        <p:spPr>
-          <a:xfrm>
-            <a:off x="6583680" y="1920240"/>
-            <a:ext cx="5029200" cy="2011680"/>
-          </a:xfrm>
-          <a:prstGeom prst="rect">
-            <a:avLst/>
-          </a:prstGeom>
-        </p:spPr>
-      </p:pic>
-      <p:sp>
-        <p:nvSpPr>
-          <p:cNvPr id="11" name="TextBox 10"/>
-          <p:cNvSpPr txBox="1"/>
-          <p:nvPr/>
-        </p:nvSpPr>
-        <p:spPr>
-          <a:xfrm>
-            <a:off x="6583680" y="4114800"/>
-            <a:ext cx="5029200" cy="548640"/>
+            <a:off x="914400" y="4114800"/>
+            <a:ext cx="3108960" cy="365760"/>
           </a:xfrm>
           <a:prstGeom prst="rect">
             <a:avLst/>
@@ -9989,13 +10334,364 @@
           <a:p>
             <a:pPr algn="l"/>
             <a:r>
-              <a:rPr sz="1300" b="0">
-                <a:solidFill>
-                  <a:srgbClr val="64748B"/>
-                </a:solidFill>
-                <a:latin typeface="Calibri"/>
-              </a:rPr>
-              <a:t>MFCCs capture the spectral envelope (vocal-tract shape); deltas capture how it changes - key cues for arousal and emotion.</a:t>
+              <a:rPr sz="1700" b="1">
+                <a:solidFill>
+                  <a:srgbClr val="0F172A"/>
+                </a:solidFill>
+                <a:latin typeface="Calibri"/>
+              </a:rPr>
+              <a:t>No data leakage</a:t>
+            </a:r>
+          </a:p>
+        </p:txBody>
+      </p:sp>
+      <p:sp>
+        <p:nvSpPr>
+          <p:cNvPr id="11" name="TextBox 10"/>
+          <p:cNvSpPr txBox="1"/>
+          <p:nvPr/>
+        </p:nvSpPr>
+        <p:spPr>
+          <a:xfrm>
+            <a:off x="914400" y="4553712"/>
+            <a:ext cx="3108960" cy="1554480"/>
+          </a:xfrm>
+          <a:prstGeom prst="rect">
+            <a:avLst/>
+          </a:prstGeom>
+          <a:noFill/>
+        </p:spPr>
+        <p:txBody>
+          <a:bodyPr wrap="square" anchor="t" lIns="0" rIns="0" tIns="0" bIns="0">
+            <a:spAutoFit/>
+          </a:bodyPr>
+          <a:lstStyle/>
+          <a:p>
+            <a:pPr algn="l"/>
+            <a:r>
+              <a:rPr sz="1600" b="0">
+                <a:solidFill>
+                  <a:srgbClr val="1E293B"/>
+                </a:solidFill>
+                <a:latin typeface="Calibri"/>
+              </a:rPr>
+              <a:t>Normalisation statistics come from training data only; augmentation only touches training clips.</a:t>
+            </a:r>
+          </a:p>
+        </p:txBody>
+      </p:sp>
+      <p:sp>
+        <p:nvSpPr>
+          <p:cNvPr id="12" name="Rounded Rectangle 11"/>
+          <p:cNvSpPr/>
+          <p:nvPr/>
+        </p:nvSpPr>
+        <p:spPr>
+          <a:xfrm>
+            <a:off x="4343400" y="3931920"/>
+            <a:ext cx="3566160" cy="2286000"/>
+          </a:xfrm>
+          <a:prstGeom prst="roundRect">
+            <a:avLst/>
+          </a:prstGeom>
+          <a:solidFill>
+            <a:srgbClr val="EEF2FF"/>
+          </a:solidFill>
+          <a:ln>
+            <a:noFill/>
+          </a:ln>
+          <a:effectLst/>
+        </p:spPr>
+        <p:style>
+          <a:lnRef idx="1">
+            <a:schemeClr val="accent1"/>
+          </a:lnRef>
+          <a:fillRef idx="3">
+            <a:schemeClr val="accent1"/>
+          </a:fillRef>
+          <a:effectRef idx="2">
+            <a:schemeClr val="accent1"/>
+          </a:effectRef>
+          <a:fontRef idx="minor">
+            <a:schemeClr val="lt1"/>
+          </a:fontRef>
+        </p:style>
+        <p:txBody>
+          <a:bodyPr rtlCol="0" anchor="ctr"/>
+          <a:lstStyle/>
+          <a:p>
+            <a:pPr algn="ctr"/>
+          </a:p>
+        </p:txBody>
+      </p:sp>
+      <p:sp>
+        <p:nvSpPr>
+          <p:cNvPr id="13" name="Rectangle 12"/>
+          <p:cNvSpPr/>
+          <p:nvPr/>
+        </p:nvSpPr>
+        <p:spPr>
+          <a:xfrm>
+            <a:off x="4343400" y="4096511"/>
+            <a:ext cx="73152" cy="1956816"/>
+          </a:xfrm>
+          <a:prstGeom prst="rect">
+            <a:avLst/>
+          </a:prstGeom>
+          <a:solidFill>
+            <a:srgbClr val="06B6D4"/>
+          </a:solidFill>
+          <a:ln>
+            <a:noFill/>
+          </a:ln>
+          <a:effectLst/>
+        </p:spPr>
+        <p:style>
+          <a:lnRef idx="1">
+            <a:schemeClr val="accent1"/>
+          </a:lnRef>
+          <a:fillRef idx="3">
+            <a:schemeClr val="accent1"/>
+          </a:fillRef>
+          <a:effectRef idx="2">
+            <a:schemeClr val="accent1"/>
+          </a:effectRef>
+          <a:fontRef idx="minor">
+            <a:schemeClr val="lt1"/>
+          </a:fontRef>
+        </p:style>
+        <p:txBody>
+          <a:bodyPr rtlCol="0" anchor="ctr"/>
+          <a:lstStyle/>
+          <a:p>
+            <a:pPr algn="ctr"/>
+          </a:p>
+        </p:txBody>
+      </p:sp>
+      <p:sp>
+        <p:nvSpPr>
+          <p:cNvPr id="14" name="TextBox 13"/>
+          <p:cNvSpPr txBox="1"/>
+          <p:nvPr/>
+        </p:nvSpPr>
+        <p:spPr>
+          <a:xfrm>
+            <a:off x="4617720" y="4114800"/>
+            <a:ext cx="3108960" cy="365760"/>
+          </a:xfrm>
+          <a:prstGeom prst="rect">
+            <a:avLst/>
+          </a:prstGeom>
+          <a:noFill/>
+        </p:spPr>
+        <p:txBody>
+          <a:bodyPr wrap="square" anchor="t" lIns="0" rIns="0" tIns="0" bIns="0">
+            <a:spAutoFit/>
+          </a:bodyPr>
+          <a:lstStyle/>
+          <a:p>
+            <a:pPr algn="l"/>
+            <a:r>
+              <a:rPr sz="1700" b="1">
+                <a:solidFill>
+                  <a:srgbClr val="0F172A"/>
+                </a:solidFill>
+                <a:latin typeface="Calibri"/>
+              </a:rPr>
+              <a:t>Unseen-actor testing</a:t>
+            </a:r>
+          </a:p>
+        </p:txBody>
+      </p:sp>
+      <p:sp>
+        <p:nvSpPr>
+          <p:cNvPr id="15" name="TextBox 14"/>
+          <p:cNvSpPr txBox="1"/>
+          <p:nvPr/>
+        </p:nvSpPr>
+        <p:spPr>
+          <a:xfrm>
+            <a:off x="4617720" y="4553712"/>
+            <a:ext cx="3108960" cy="1554480"/>
+          </a:xfrm>
+          <a:prstGeom prst="rect">
+            <a:avLst/>
+          </a:prstGeom>
+          <a:noFill/>
+        </p:spPr>
+        <p:txBody>
+          <a:bodyPr wrap="square" anchor="t" lIns="0" rIns="0" tIns="0" bIns="0">
+            <a:spAutoFit/>
+          </a:bodyPr>
+          <a:lstStyle/>
+          <a:p>
+            <a:pPr algn="l"/>
+            <a:r>
+              <a:rPr sz="1600" b="0">
+                <a:solidFill>
+                  <a:srgbClr val="1E293B"/>
+                </a:solidFill>
+                <a:latin typeface="Calibri"/>
+              </a:rPr>
+              <a:t>Test actors 21-24 never appear in training or tuning, so scores reflect new voices.</a:t>
+            </a:r>
+          </a:p>
+        </p:txBody>
+      </p:sp>
+      <p:sp>
+        <p:nvSpPr>
+          <p:cNvPr id="16" name="Rounded Rectangle 15"/>
+          <p:cNvSpPr/>
+          <p:nvPr/>
+        </p:nvSpPr>
+        <p:spPr>
+          <a:xfrm>
+            <a:off x="8046720" y="3931920"/>
+            <a:ext cx="3566160" cy="2286000"/>
+          </a:xfrm>
+          <a:prstGeom prst="roundRect">
+            <a:avLst/>
+          </a:prstGeom>
+          <a:solidFill>
+            <a:srgbClr val="EEF2FF"/>
+          </a:solidFill>
+          <a:ln>
+            <a:noFill/>
+          </a:ln>
+          <a:effectLst/>
+        </p:spPr>
+        <p:style>
+          <a:lnRef idx="1">
+            <a:schemeClr val="accent1"/>
+          </a:lnRef>
+          <a:fillRef idx="3">
+            <a:schemeClr val="accent1"/>
+          </a:fillRef>
+          <a:effectRef idx="2">
+            <a:schemeClr val="accent1"/>
+          </a:effectRef>
+          <a:fontRef idx="minor">
+            <a:schemeClr val="lt1"/>
+          </a:fontRef>
+        </p:style>
+        <p:txBody>
+          <a:bodyPr rtlCol="0" anchor="ctr"/>
+          <a:lstStyle/>
+          <a:p>
+            <a:pPr algn="ctr"/>
+          </a:p>
+        </p:txBody>
+      </p:sp>
+      <p:sp>
+        <p:nvSpPr>
+          <p:cNvPr id="17" name="Rectangle 16"/>
+          <p:cNvSpPr/>
+          <p:nvPr/>
+        </p:nvSpPr>
+        <p:spPr>
+          <a:xfrm>
+            <a:off x="8046720" y="4096511"/>
+            <a:ext cx="73152" cy="1956816"/>
+          </a:xfrm>
+          <a:prstGeom prst="rect">
+            <a:avLst/>
+          </a:prstGeom>
+          <a:solidFill>
+            <a:srgbClr val="F59E0B"/>
+          </a:solidFill>
+          <a:ln>
+            <a:noFill/>
+          </a:ln>
+          <a:effectLst/>
+        </p:spPr>
+        <p:style>
+          <a:lnRef idx="1">
+            <a:schemeClr val="accent1"/>
+          </a:lnRef>
+          <a:fillRef idx="3">
+            <a:schemeClr val="accent1"/>
+          </a:fillRef>
+          <a:effectRef idx="2">
+            <a:schemeClr val="accent1"/>
+          </a:effectRef>
+          <a:fontRef idx="minor">
+            <a:schemeClr val="lt1"/>
+          </a:fontRef>
+        </p:style>
+        <p:txBody>
+          <a:bodyPr rtlCol="0" anchor="ctr"/>
+          <a:lstStyle/>
+          <a:p>
+            <a:pPr algn="ctr"/>
+          </a:p>
+        </p:txBody>
+      </p:sp>
+      <p:sp>
+        <p:nvSpPr>
+          <p:cNvPr id="18" name="TextBox 17"/>
+          <p:cNvSpPr txBox="1"/>
+          <p:nvPr/>
+        </p:nvSpPr>
+        <p:spPr>
+          <a:xfrm>
+            <a:off x="8321040" y="4114800"/>
+            <a:ext cx="3108960" cy="365760"/>
+          </a:xfrm>
+          <a:prstGeom prst="rect">
+            <a:avLst/>
+          </a:prstGeom>
+          <a:noFill/>
+        </p:spPr>
+        <p:txBody>
+          <a:bodyPr wrap="square" anchor="t" lIns="0" rIns="0" tIns="0" bIns="0">
+            <a:spAutoFit/>
+          </a:bodyPr>
+          <a:lstStyle/>
+          <a:p>
+            <a:pPr algn="l"/>
+            <a:r>
+              <a:rPr sz="1700" b="1">
+                <a:solidFill>
+                  <a:srgbClr val="0F172A"/>
+                </a:solidFill>
+                <a:latin typeface="Calibri"/>
+              </a:rPr>
+              <a:t>Validation-based selection</a:t>
+            </a:r>
+          </a:p>
+        </p:txBody>
+      </p:sp>
+      <p:sp>
+        <p:nvSpPr>
+          <p:cNvPr id="19" name="TextBox 18"/>
+          <p:cNvSpPr txBox="1"/>
+          <p:nvPr/>
+        </p:nvSpPr>
+        <p:spPr>
+          <a:xfrm>
+            <a:off x="8321040" y="4553712"/>
+            <a:ext cx="3108960" cy="1554480"/>
+          </a:xfrm>
+          <a:prstGeom prst="rect">
+            <a:avLst/>
+          </a:prstGeom>
+          <a:noFill/>
+        </p:spPr>
+        <p:txBody>
+          <a:bodyPr wrap="square" anchor="t" lIns="0" rIns="0" tIns="0" bIns="0">
+            <a:spAutoFit/>
+          </a:bodyPr>
+          <a:lstStyle/>
+          <a:p>
+            <a:pPr algn="l"/>
+            <a:r>
+              <a:rPr sz="1600" b="0">
+                <a:solidFill>
+                  <a:srgbClr val="1E293B"/>
+                </a:solidFill>
+                <a:latin typeface="Calibri"/>
+              </a:rPr>
+              <a:t>Checkpoint, early stopping and final-model choice use validation Macro F1, not the test set.</a:t>
             </a:r>
           </a:p>
         </p:txBody>
@@ -10092,7 +10788,7 @@
                 </a:solidFill>
                 <a:latin typeface="Calibri"/>
               </a:rPr>
-              <a:t>MODEL</a:t>
+              <a:t>FEATURES</a:t>
             </a:r>
           </a:p>
         </p:txBody>
@@ -10127,7 +10823,7 @@
                 </a:solidFill>
                 <a:latin typeface="Calibri"/>
               </a:rPr>
-              <a:t>Model: CNN - BiLSTM - Attention</a:t>
+              <a:t>Preprocessing and MFCC extraction</a:t>
             </a:r>
           </a:p>
         </p:txBody>
@@ -10202,9 +10898,263 @@
           </a:p>
         </p:txBody>
       </p:sp>
+      <p:sp>
+        <p:nvSpPr>
+          <p:cNvPr id="7" name="TextBox 6"/>
+          <p:cNvSpPr txBox="1"/>
+          <p:nvPr/>
+        </p:nvSpPr>
+        <p:spPr>
+          <a:xfrm>
+            <a:off x="640080" y="1600200"/>
+            <a:ext cx="5760720" cy="457200"/>
+          </a:xfrm>
+          <a:prstGeom prst="rect">
+            <a:avLst/>
+          </a:prstGeom>
+          <a:noFill/>
+        </p:spPr>
+        <p:txBody>
+          <a:bodyPr wrap="square" lIns="0" rIns="0" tIns="0">
+            <a:spAutoFit/>
+          </a:bodyPr>
+          <a:lstStyle/>
+          <a:p>
+            <a:pPr>
+              <a:spcAft>
+                <a:spcPts val="900"/>
+              </a:spcAft>
+            </a:pPr>
+            <a:r>
+              <a:rPr sz="1000">
+                <a:solidFill>
+                  <a:srgbClr val="4F46E5"/>
+                </a:solidFill>
+              </a:rPr>
+              <a:t>■  </a:t>
+            </a:r>
+            <a:r>
+              <a:rPr b="1" sz="1600">
+                <a:solidFill>
+                  <a:srgbClr val="1E293B"/>
+                </a:solidFill>
+                <a:latin typeface="Calibri"/>
+              </a:rPr>
+              <a:t>Resample</a:t>
+            </a:r>
+            <a:r>
+              <a:rPr sz="1600">
+                <a:solidFill>
+                  <a:srgbClr val="1E293B"/>
+                </a:solidFill>
+                <a:latin typeface="Calibri"/>
+              </a:rPr>
+              <a:t>  to 22,050 Hz mono</a:t>
+            </a:r>
+          </a:p>
+          <a:p>
+            <a:pPr>
+              <a:spcAft>
+                <a:spcPts val="900"/>
+              </a:spcAft>
+            </a:pPr>
+            <a:r>
+              <a:rPr sz="1000">
+                <a:solidFill>
+                  <a:srgbClr val="4F46E5"/>
+                </a:solidFill>
+              </a:rPr>
+              <a:t>■  </a:t>
+            </a:r>
+            <a:r>
+              <a:rPr b="1" sz="1600">
+                <a:solidFill>
+                  <a:srgbClr val="1E293B"/>
+                </a:solidFill>
+                <a:latin typeface="Calibri"/>
+              </a:rPr>
+              <a:t>Trim silence</a:t>
+            </a:r>
+            <a:r>
+              <a:rPr sz="1600">
+                <a:solidFill>
+                  <a:srgbClr val="1E293B"/>
+                </a:solidFill>
+                <a:latin typeface="Calibri"/>
+              </a:rPr>
+              <a:t>  (30 dB) and peak-normalise</a:t>
+            </a:r>
+          </a:p>
+          <a:p>
+            <a:pPr>
+              <a:spcAft>
+                <a:spcPts val="900"/>
+              </a:spcAft>
+            </a:pPr>
+            <a:r>
+              <a:rPr sz="1000">
+                <a:solidFill>
+                  <a:srgbClr val="4F46E5"/>
+                </a:solidFill>
+              </a:rPr>
+              <a:t>■  </a:t>
+            </a:r>
+            <a:r>
+              <a:rPr b="1" sz="1600">
+                <a:solidFill>
+                  <a:srgbClr val="1E293B"/>
+                </a:solidFill>
+                <a:latin typeface="Calibri"/>
+              </a:rPr>
+              <a:t>Fixed window</a:t>
+            </a:r>
+            <a:r>
+              <a:rPr sz="1600">
+                <a:solidFill>
+                  <a:srgbClr val="1E293B"/>
+                </a:solidFill>
+                <a:latin typeface="Calibri"/>
+              </a:rPr>
+              <a:t>  of 3 s (crop / zero-pad)</a:t>
+            </a:r>
+          </a:p>
+          <a:p>
+            <a:pPr>
+              <a:spcAft>
+                <a:spcPts val="900"/>
+              </a:spcAft>
+            </a:pPr>
+            <a:r>
+              <a:rPr sz="1000">
+                <a:solidFill>
+                  <a:srgbClr val="4F46E5"/>
+                </a:solidFill>
+              </a:rPr>
+              <a:t>■  </a:t>
+            </a:r>
+            <a:r>
+              <a:rPr b="1" sz="1600">
+                <a:solidFill>
+                  <a:srgbClr val="1E293B"/>
+                </a:solidFill>
+                <a:latin typeface="Calibri"/>
+              </a:rPr>
+              <a:t>MFCC</a:t>
+            </a:r>
+            <a:r>
+              <a:rPr sz="1600">
+                <a:solidFill>
+                  <a:srgbClr val="1E293B"/>
+                </a:solidFill>
+                <a:latin typeface="Calibri"/>
+              </a:rPr>
+              <a:t>  40 coefficients, FFT 2048, hop 512, 128 mel bands</a:t>
+            </a:r>
+          </a:p>
+          <a:p>
+            <a:pPr>
+              <a:spcAft>
+                <a:spcPts val="900"/>
+              </a:spcAft>
+            </a:pPr>
+            <a:r>
+              <a:rPr sz="1000">
+                <a:solidFill>
+                  <a:srgbClr val="4F46E5"/>
+                </a:solidFill>
+              </a:rPr>
+              <a:t>■  </a:t>
+            </a:r>
+            <a:r>
+              <a:rPr b="1" sz="1600">
+                <a:solidFill>
+                  <a:srgbClr val="1E293B"/>
+                </a:solidFill>
+                <a:latin typeface="Calibri"/>
+              </a:rPr>
+              <a:t>Delta + delta-delta</a:t>
+            </a:r>
+            <a:r>
+              <a:rPr sz="1600">
+                <a:solidFill>
+                  <a:srgbClr val="1E293B"/>
+                </a:solidFill>
+                <a:latin typeface="Calibri"/>
+              </a:rPr>
+              <a:t>  adds speed and acceleration of each coefficient</a:t>
+            </a:r>
+          </a:p>
+          <a:p>
+            <a:pPr>
+              <a:spcAft>
+                <a:spcPts val="900"/>
+              </a:spcAft>
+            </a:pPr>
+            <a:r>
+              <a:rPr sz="1000">
+                <a:solidFill>
+                  <a:srgbClr val="4F46E5"/>
+                </a:solidFill>
+              </a:rPr>
+              <a:t>■  </a:t>
+            </a:r>
+            <a:r>
+              <a:rPr b="1" sz="1600">
+                <a:solidFill>
+                  <a:srgbClr val="1E293B"/>
+                </a:solidFill>
+                <a:latin typeface="Calibri"/>
+              </a:rPr>
+              <a:t>Tensor</a:t>
+            </a:r>
+            <a:r>
+              <a:rPr sz="1600">
+                <a:solidFill>
+                  <a:srgbClr val="1E293B"/>
+                </a:solidFill>
+                <a:latin typeface="Calibri"/>
+              </a:rPr>
+              <a:t>  130 frames x 120 features per clip</a:t>
+            </a:r>
+          </a:p>
+          <a:p>
+            <a:pPr>
+              <a:spcAft>
+                <a:spcPts val="900"/>
+              </a:spcAft>
+            </a:pPr>
+            <a:r>
+              <a:rPr sz="1000">
+                <a:solidFill>
+                  <a:srgbClr val="4F46E5"/>
+                </a:solidFill>
+              </a:rPr>
+              <a:t>■  </a:t>
+            </a:r>
+            <a:r>
+              <a:rPr b="1" sz="1600">
+                <a:solidFill>
+                  <a:srgbClr val="1E293B"/>
+                </a:solidFill>
+                <a:latin typeface="Calibri"/>
+              </a:rPr>
+              <a:t>Standardise</a:t>
+            </a:r>
+            <a:r>
+              <a:rPr sz="1600">
+                <a:solidFill>
+                  <a:srgbClr val="1E293B"/>
+                </a:solidFill>
+                <a:latin typeface="Calibri"/>
+              </a:rPr>
+              <a:t>  with training mean / std saved to norm.npz</a:t>
+            </a:r>
+          </a:p>
+        </p:txBody>
+      </p:sp>
       <p:pic>
         <p:nvPicPr>
-          <p:cNvPr id="7" name="Picture 6" descr="diagram_architecture.png"/>
+          <p:cNvPr id="8" name="Picture 7" descr="mfcc_example.png"/>
           <p:cNvPicPr>
             <a:picLocks noChangeAspect="1"/>
           </p:cNvPicPr>
@@ -10218,8 +11168,8 @@
         </p:blipFill>
         <p:spPr>
           <a:xfrm>
-            <a:off x="457200" y="1691640"/>
-            <a:ext cx="11247120" cy="2624328"/>
+            <a:off x="6583680" y="1645920"/>
+            <a:ext cx="5120640" cy="2048256"/>
           </a:xfrm>
           <a:prstGeom prst="rect">
             <a:avLst/>
@@ -10228,14 +11178,14 @@
       </p:pic>
       <p:sp>
         <p:nvSpPr>
-          <p:cNvPr id="8" name="Rounded Rectangle 7"/>
+          <p:cNvPr id="9" name="Rounded Rectangle 8"/>
           <p:cNvSpPr/>
           <p:nvPr/>
         </p:nvSpPr>
         <p:spPr>
           <a:xfrm>
-            <a:off x="640080" y="4343400"/>
-            <a:ext cx="3566160" cy="1737360"/>
+            <a:off x="6583680" y="4251960"/>
+            <a:ext cx="5120640" cy="1920240"/>
           </a:xfrm>
           <a:prstGeom prst="roundRect">
             <a:avLst/>
@@ -10272,330 +11222,14 @@
       </p:sp>
       <p:sp>
         <p:nvSpPr>
-          <p:cNvPr id="9" name="Rectangle 8"/>
+          <p:cNvPr id="10" name="Rectangle 9"/>
           <p:cNvSpPr/>
           <p:nvPr/>
         </p:nvSpPr>
         <p:spPr>
           <a:xfrm>
-            <a:off x="640080" y="4507992"/>
-            <a:ext cx="73152" cy="1408176"/>
-          </a:xfrm>
-          <a:prstGeom prst="rect">
-            <a:avLst/>
-          </a:prstGeom>
-          <a:solidFill>
-            <a:srgbClr val="06B6D4"/>
-          </a:solidFill>
-          <a:ln>
-            <a:noFill/>
-          </a:ln>
-          <a:effectLst/>
-        </p:spPr>
-        <p:style>
-          <a:lnRef idx="1">
-            <a:schemeClr val="accent1"/>
-          </a:lnRef>
-          <a:fillRef idx="3">
-            <a:schemeClr val="accent1"/>
-          </a:fillRef>
-          <a:effectRef idx="2">
-            <a:schemeClr val="accent1"/>
-          </a:effectRef>
-          <a:fontRef idx="minor">
-            <a:schemeClr val="lt1"/>
-          </a:fontRef>
-        </p:style>
-        <p:txBody>
-          <a:bodyPr rtlCol="0" anchor="ctr"/>
-          <a:lstStyle/>
-          <a:p>
-            <a:pPr algn="ctr"/>
-          </a:p>
-        </p:txBody>
-      </p:sp>
-      <p:sp>
-        <p:nvSpPr>
-          <p:cNvPr id="10" name="TextBox 9"/>
-          <p:cNvSpPr txBox="1"/>
-          <p:nvPr/>
-        </p:nvSpPr>
-        <p:spPr>
-          <a:xfrm>
-            <a:off x="914400" y="4526280"/>
-            <a:ext cx="3108960" cy="365760"/>
-          </a:xfrm>
-          <a:prstGeom prst="rect">
-            <a:avLst/>
-          </a:prstGeom>
-          <a:noFill/>
-        </p:spPr>
-        <p:txBody>
-          <a:bodyPr wrap="square" anchor="t" lIns="0" rIns="0" tIns="0" bIns="0">
-            <a:spAutoFit/>
-          </a:bodyPr>
-          <a:lstStyle/>
-          <a:p>
-            <a:pPr algn="l"/>
-            <a:r>
-              <a:rPr sz="1700" b="1">
-                <a:solidFill>
-                  <a:srgbClr val="0F172A"/>
-                </a:solidFill>
-                <a:latin typeface="Calibri"/>
-              </a:rPr>
-              <a:t>Conv1D x 3</a:t>
-            </a:r>
-          </a:p>
-        </p:txBody>
-      </p:sp>
-      <p:sp>
-        <p:nvSpPr>
-          <p:cNvPr id="11" name="TextBox 10"/>
-          <p:cNvSpPr txBox="1"/>
-          <p:nvPr/>
-        </p:nvSpPr>
-        <p:spPr>
-          <a:xfrm>
-            <a:off x="914400" y="4965192"/>
-            <a:ext cx="3108960" cy="1005839"/>
-          </a:xfrm>
-          <a:prstGeom prst="rect">
-            <a:avLst/>
-          </a:prstGeom>
-          <a:noFill/>
-        </p:spPr>
-        <p:txBody>
-          <a:bodyPr wrap="square" anchor="t" lIns="0" rIns="0" tIns="0" bIns="0">
-            <a:spAutoFit/>
-          </a:bodyPr>
-          <a:lstStyle/>
-          <a:p>
-            <a:pPr algn="l"/>
-            <a:r>
-              <a:rPr sz="1400" b="0">
-                <a:solidFill>
-                  <a:srgbClr val="1E293B"/>
-                </a:solidFill>
-                <a:latin typeface="Calibri"/>
-              </a:rPr>
-              <a:t>Local spectral patterns; BatchNorm, ReLU, MaxPool, Dropout.</a:t>
-            </a:r>
-          </a:p>
-        </p:txBody>
-      </p:sp>
-      <p:sp>
-        <p:nvSpPr>
-          <p:cNvPr id="12" name="Rounded Rectangle 11"/>
-          <p:cNvSpPr/>
-          <p:nvPr/>
-        </p:nvSpPr>
-        <p:spPr>
-          <a:xfrm>
-            <a:off x="4343400" y="4343400"/>
-            <a:ext cx="3566160" cy="1737360"/>
-          </a:xfrm>
-          <a:prstGeom prst="roundRect">
-            <a:avLst/>
-          </a:prstGeom>
-          <a:solidFill>
-            <a:srgbClr val="EEF2FF"/>
-          </a:solidFill>
-          <a:ln>
-            <a:noFill/>
-          </a:ln>
-          <a:effectLst/>
-        </p:spPr>
-        <p:style>
-          <a:lnRef idx="1">
-            <a:schemeClr val="accent1"/>
-          </a:lnRef>
-          <a:fillRef idx="3">
-            <a:schemeClr val="accent1"/>
-          </a:fillRef>
-          <a:effectRef idx="2">
-            <a:schemeClr val="accent1"/>
-          </a:effectRef>
-          <a:fontRef idx="minor">
-            <a:schemeClr val="lt1"/>
-          </a:fontRef>
-        </p:style>
-        <p:txBody>
-          <a:bodyPr rtlCol="0" anchor="ctr"/>
-          <a:lstStyle/>
-          <a:p>
-            <a:pPr algn="ctr"/>
-          </a:p>
-        </p:txBody>
-      </p:sp>
-      <p:sp>
-        <p:nvSpPr>
-          <p:cNvPr id="13" name="Rectangle 12"/>
-          <p:cNvSpPr/>
-          <p:nvPr/>
-        </p:nvSpPr>
-        <p:spPr>
-          <a:xfrm>
-            <a:off x="4343400" y="4507992"/>
-            <a:ext cx="73152" cy="1408176"/>
-          </a:xfrm>
-          <a:prstGeom prst="rect">
-            <a:avLst/>
-          </a:prstGeom>
-          <a:solidFill>
-            <a:srgbClr val="4F46E5"/>
-          </a:solidFill>
-          <a:ln>
-            <a:noFill/>
-          </a:ln>
-          <a:effectLst/>
-        </p:spPr>
-        <p:style>
-          <a:lnRef idx="1">
-            <a:schemeClr val="accent1"/>
-          </a:lnRef>
-          <a:fillRef idx="3">
-            <a:schemeClr val="accent1"/>
-          </a:fillRef>
-          <a:effectRef idx="2">
-            <a:schemeClr val="accent1"/>
-          </a:effectRef>
-          <a:fontRef idx="minor">
-            <a:schemeClr val="lt1"/>
-          </a:fontRef>
-        </p:style>
-        <p:txBody>
-          <a:bodyPr rtlCol="0" anchor="ctr"/>
-          <a:lstStyle/>
-          <a:p>
-            <a:pPr algn="ctr"/>
-          </a:p>
-        </p:txBody>
-      </p:sp>
-      <p:sp>
-        <p:nvSpPr>
-          <p:cNvPr id="14" name="TextBox 13"/>
-          <p:cNvSpPr txBox="1"/>
-          <p:nvPr/>
-        </p:nvSpPr>
-        <p:spPr>
-          <a:xfrm>
-            <a:off x="4617720" y="4526280"/>
-            <a:ext cx="3108960" cy="365760"/>
-          </a:xfrm>
-          <a:prstGeom prst="rect">
-            <a:avLst/>
-          </a:prstGeom>
-          <a:noFill/>
-        </p:spPr>
-        <p:txBody>
-          <a:bodyPr wrap="square" anchor="t" lIns="0" rIns="0" tIns="0" bIns="0">
-            <a:spAutoFit/>
-          </a:bodyPr>
-          <a:lstStyle/>
-          <a:p>
-            <a:pPr algn="l"/>
-            <a:r>
-              <a:rPr sz="1700" b="1">
-                <a:solidFill>
-                  <a:srgbClr val="0F172A"/>
-                </a:solidFill>
-                <a:latin typeface="Calibri"/>
-              </a:rPr>
-              <a:t>BiLSTM (96)</a:t>
-            </a:r>
-          </a:p>
-        </p:txBody>
-      </p:sp>
-      <p:sp>
-        <p:nvSpPr>
-          <p:cNvPr id="15" name="TextBox 14"/>
-          <p:cNvSpPr txBox="1"/>
-          <p:nvPr/>
-        </p:nvSpPr>
-        <p:spPr>
-          <a:xfrm>
-            <a:off x="4617720" y="4965192"/>
-            <a:ext cx="3108960" cy="1005839"/>
-          </a:xfrm>
-          <a:prstGeom prst="rect">
-            <a:avLst/>
-          </a:prstGeom>
-          <a:noFill/>
-        </p:spPr>
-        <p:txBody>
-          <a:bodyPr wrap="square" anchor="t" lIns="0" rIns="0" tIns="0" bIns="0">
-            <a:spAutoFit/>
-          </a:bodyPr>
-          <a:lstStyle/>
-          <a:p>
-            <a:pPr algn="l"/>
-            <a:r>
-              <a:rPr sz="1400" b="0">
-                <a:solidFill>
-                  <a:srgbClr val="1E293B"/>
-                </a:solidFill>
-                <a:latin typeface="Calibri"/>
-              </a:rPr>
-              <a:t>Context in both time directions.</a:t>
-            </a:r>
-          </a:p>
-        </p:txBody>
-      </p:sp>
-      <p:sp>
-        <p:nvSpPr>
-          <p:cNvPr id="16" name="Rounded Rectangle 15"/>
-          <p:cNvSpPr/>
-          <p:nvPr/>
-        </p:nvSpPr>
-        <p:spPr>
-          <a:xfrm>
-            <a:off x="8046720" y="4343400"/>
-            <a:ext cx="3520440" cy="1737360"/>
-          </a:xfrm>
-          <a:prstGeom prst="roundRect">
-            <a:avLst/>
-          </a:prstGeom>
-          <a:solidFill>
-            <a:srgbClr val="EEF2FF"/>
-          </a:solidFill>
-          <a:ln>
-            <a:noFill/>
-          </a:ln>
-          <a:effectLst/>
-        </p:spPr>
-        <p:style>
-          <a:lnRef idx="1">
-            <a:schemeClr val="accent1"/>
-          </a:lnRef>
-          <a:fillRef idx="3">
-            <a:schemeClr val="accent1"/>
-          </a:fillRef>
-          <a:effectRef idx="2">
-            <a:schemeClr val="accent1"/>
-          </a:effectRef>
-          <a:fontRef idx="minor">
-            <a:schemeClr val="lt1"/>
-          </a:fontRef>
-        </p:style>
-        <p:txBody>
-          <a:bodyPr rtlCol="0" anchor="ctr"/>
-          <a:lstStyle/>
-          <a:p>
-            <a:pPr algn="ctr"/>
-          </a:p>
-        </p:txBody>
-      </p:sp>
-      <p:sp>
-        <p:nvSpPr>
-          <p:cNvPr id="17" name="Rectangle 16"/>
-          <p:cNvSpPr/>
-          <p:nvPr/>
-        </p:nvSpPr>
-        <p:spPr>
-          <a:xfrm>
-            <a:off x="8046720" y="4507992"/>
-            <a:ext cx="73152" cy="1408176"/>
+            <a:off x="6583680" y="4416552"/>
+            <a:ext cx="73152" cy="1591056"/>
           </a:xfrm>
           <a:prstGeom prst="rect">
             <a:avLst/>
@@ -10632,14 +11266,14 @@
       </p:sp>
       <p:sp>
         <p:nvSpPr>
-          <p:cNvPr id="18" name="TextBox 17"/>
+          <p:cNvPr id="11" name="TextBox 10"/>
           <p:cNvSpPr txBox="1"/>
           <p:nvPr/>
         </p:nvSpPr>
         <p:spPr>
           <a:xfrm>
-            <a:off x="8321040" y="4526280"/>
-            <a:ext cx="3063240" cy="365760"/>
+            <a:off x="6858000" y="4434840"/>
+            <a:ext cx="4663440" cy="365760"/>
           </a:xfrm>
           <a:prstGeom prst="rect">
             <a:avLst/>
@@ -10660,21 +11294,21 @@
                 </a:solidFill>
                 <a:latin typeface="Calibri"/>
               </a:rPr>
-              <a:t>Attention pooling</a:t>
-            </a:r>
-          </a:p>
-        </p:txBody>
-      </p:sp>
-      <p:sp>
-        <p:nvSpPr>
-          <p:cNvPr id="19" name="TextBox 18"/>
+              <a:t>Augmentation (train only)</a:t>
+            </a:r>
+          </a:p>
+        </p:txBody>
+      </p:sp>
+      <p:sp>
+        <p:nvSpPr>
+          <p:cNvPr id="12" name="TextBox 11"/>
           <p:cNvSpPr txBox="1"/>
           <p:nvPr/>
         </p:nvSpPr>
         <p:spPr>
           <a:xfrm>
-            <a:off x="8321040" y="4965192"/>
-            <a:ext cx="3063240" cy="1005839"/>
+            <a:off x="6858000" y="4873752"/>
+            <a:ext cx="4663440" cy="1188720"/>
           </a:xfrm>
           <a:prstGeom prst="rect">
             <a:avLst/>
@@ -10689,13 +11323,13 @@
           <a:p>
             <a:pPr algn="l"/>
             <a:r>
-              <a:rPr sz="1400" b="0">
+              <a:rPr sz="1600" b="0">
                 <a:solidFill>
                   <a:srgbClr val="1E293B"/>
                 </a:solidFill>
                 <a:latin typeface="Calibri"/>
               </a:rPr>
-              <a:t>Learns which frames carry emotion.</a:t>
+              <a:t>2 extra copies per clip: noise, pitch +/-2 semitones, time stretch 0.9-1.1x or time shift.</a:t>
             </a:r>
           </a:p>
         </p:txBody>
@@ -10792,7 +11426,7 @@
                 </a:solidFill>
                 <a:latin typeface="Calibri"/>
               </a:rPr>
-              <a:t>MODEL</a:t>
+              <a:t>CNN + BILSTM + ATTENTION</a:t>
             </a:r>
           </a:p>
         </p:txBody>
@@ -10827,7 +11461,7 @@
                 </a:solidFill>
                 <a:latin typeface="Calibri"/>
               </a:rPr>
-              <a:t>Training and baseline</a:t>
+              <a:t>Model architecture</a:t>
             </a:r>
           </a:p>
         </p:txBody>
@@ -10902,16 +11536,40 @@
           </a:p>
         </p:txBody>
       </p:sp>
-      <p:sp>
-        <p:nvSpPr>
-          <p:cNvPr id="7" name="Rounded Rectangle 6"/>
+      <p:pic>
+        <p:nvPicPr>
+          <p:cNvPr id="7" name="Picture 6" descr="diagram_architecture.png"/>
+          <p:cNvPicPr>
+            <a:picLocks noChangeAspect="1"/>
+          </p:cNvPicPr>
+          <p:nvPr/>
+        </p:nvPicPr>
+        <p:blipFill>
+          <a:blip r:embed="rId3"/>
+          <a:stretch>
+            <a:fillRect/>
+          </a:stretch>
+        </p:blipFill>
+        <p:spPr>
+          <a:xfrm>
+            <a:off x="640080" y="1508760"/>
+            <a:ext cx="10881360" cy="2538984"/>
+          </a:xfrm>
+          <a:prstGeom prst="rect">
+            <a:avLst/>
+          </a:prstGeom>
+        </p:spPr>
+      </p:pic>
+      <p:sp>
+        <p:nvSpPr>
+          <p:cNvPr id="8" name="Rounded Rectangle 7"/>
           <p:cNvSpPr/>
           <p:nvPr/>
         </p:nvSpPr>
         <p:spPr>
           <a:xfrm>
-            <a:off x="640080" y="1737360"/>
-            <a:ext cx="5394960" cy="4297680"/>
+            <a:off x="640080" y="3977639"/>
+            <a:ext cx="3566160" cy="2240280"/>
           </a:xfrm>
           <a:prstGeom prst="roundRect">
             <a:avLst/>
@@ -10948,14 +11606,172 @@
       </p:sp>
       <p:sp>
         <p:nvSpPr>
-          <p:cNvPr id="8" name="Rectangle 7"/>
+          <p:cNvPr id="9" name="Rectangle 8"/>
           <p:cNvSpPr/>
           <p:nvPr/>
         </p:nvSpPr>
         <p:spPr>
           <a:xfrm>
-            <a:off x="640080" y="1901952"/>
-            <a:ext cx="73152" cy="3968496"/>
+            <a:off x="640080" y="4142231"/>
+            <a:ext cx="73152" cy="1911096"/>
+          </a:xfrm>
+          <a:prstGeom prst="rect">
+            <a:avLst/>
+          </a:prstGeom>
+          <a:solidFill>
+            <a:srgbClr val="06B6D4"/>
+          </a:solidFill>
+          <a:ln>
+            <a:noFill/>
+          </a:ln>
+          <a:effectLst/>
+        </p:spPr>
+        <p:style>
+          <a:lnRef idx="1">
+            <a:schemeClr val="accent1"/>
+          </a:lnRef>
+          <a:fillRef idx="3">
+            <a:schemeClr val="accent1"/>
+          </a:fillRef>
+          <a:effectRef idx="2">
+            <a:schemeClr val="accent1"/>
+          </a:effectRef>
+          <a:fontRef idx="minor">
+            <a:schemeClr val="lt1"/>
+          </a:fontRef>
+        </p:style>
+        <p:txBody>
+          <a:bodyPr rtlCol="0" anchor="ctr"/>
+          <a:lstStyle/>
+          <a:p>
+            <a:pPr algn="ctr"/>
+          </a:p>
+        </p:txBody>
+      </p:sp>
+      <p:sp>
+        <p:nvSpPr>
+          <p:cNvPr id="10" name="TextBox 9"/>
+          <p:cNvSpPr txBox="1"/>
+          <p:nvPr/>
+        </p:nvSpPr>
+        <p:spPr>
+          <a:xfrm>
+            <a:off x="914400" y="4160520"/>
+            <a:ext cx="3108960" cy="365760"/>
+          </a:xfrm>
+          <a:prstGeom prst="rect">
+            <a:avLst/>
+          </a:prstGeom>
+          <a:noFill/>
+        </p:spPr>
+        <p:txBody>
+          <a:bodyPr wrap="square" anchor="t" lIns="0" rIns="0" tIns="0" bIns="0">
+            <a:spAutoFit/>
+          </a:bodyPr>
+          <a:lstStyle/>
+          <a:p>
+            <a:pPr algn="l"/>
+            <a:r>
+              <a:rPr sz="1700" b="1">
+                <a:solidFill>
+                  <a:srgbClr val="0F172A"/>
+                </a:solidFill>
+                <a:latin typeface="Calibri"/>
+              </a:rPr>
+              <a:t>CNN</a:t>
+            </a:r>
+          </a:p>
+        </p:txBody>
+      </p:sp>
+      <p:sp>
+        <p:nvSpPr>
+          <p:cNvPr id="11" name="TextBox 10"/>
+          <p:cNvSpPr txBox="1"/>
+          <p:nvPr/>
+        </p:nvSpPr>
+        <p:spPr>
+          <a:xfrm>
+            <a:off x="914400" y="4599431"/>
+            <a:ext cx="3108960" cy="1508760"/>
+          </a:xfrm>
+          <a:prstGeom prst="rect">
+            <a:avLst/>
+          </a:prstGeom>
+          <a:noFill/>
+        </p:spPr>
+        <p:txBody>
+          <a:bodyPr wrap="square" anchor="t" lIns="0" rIns="0" tIns="0" bIns="0">
+            <a:spAutoFit/>
+          </a:bodyPr>
+          <a:lstStyle/>
+          <a:p>
+            <a:pPr algn="l"/>
+            <a:r>
+              <a:rPr sz="1600" b="0">
+                <a:solidFill>
+                  <a:srgbClr val="1E293B"/>
+                </a:solidFill>
+                <a:latin typeface="Calibri"/>
+              </a:rPr>
+              <a:t>2 Conv1D blocks (32 and 64 filters) with batch norm, ReLU, pooling and dropout.</a:t>
+            </a:r>
+          </a:p>
+        </p:txBody>
+      </p:sp>
+      <p:sp>
+        <p:nvSpPr>
+          <p:cNvPr id="12" name="Rounded Rectangle 11"/>
+          <p:cNvSpPr/>
+          <p:nvPr/>
+        </p:nvSpPr>
+        <p:spPr>
+          <a:xfrm>
+            <a:off x="4343400" y="3977639"/>
+            <a:ext cx="3566160" cy="2240280"/>
+          </a:xfrm>
+          <a:prstGeom prst="roundRect">
+            <a:avLst/>
+          </a:prstGeom>
+          <a:solidFill>
+            <a:srgbClr val="EEF2FF"/>
+          </a:solidFill>
+          <a:ln>
+            <a:noFill/>
+          </a:ln>
+          <a:effectLst/>
+        </p:spPr>
+        <p:style>
+          <a:lnRef idx="1">
+            <a:schemeClr val="accent1"/>
+          </a:lnRef>
+          <a:fillRef idx="3">
+            <a:schemeClr val="accent1"/>
+          </a:fillRef>
+          <a:effectRef idx="2">
+            <a:schemeClr val="accent1"/>
+          </a:effectRef>
+          <a:fontRef idx="minor">
+            <a:schemeClr val="lt1"/>
+          </a:fontRef>
+        </p:style>
+        <p:txBody>
+          <a:bodyPr rtlCol="0" anchor="ctr"/>
+          <a:lstStyle/>
+          <a:p>
+            <a:pPr algn="ctr"/>
+          </a:p>
+        </p:txBody>
+      </p:sp>
+      <p:sp>
+        <p:nvSpPr>
+          <p:cNvPr id="13" name="Rectangle 12"/>
+          <p:cNvSpPr/>
+          <p:nvPr/>
+        </p:nvSpPr>
+        <p:spPr>
+          <a:xfrm>
+            <a:off x="4343400" y="4142231"/>
+            <a:ext cx="73152" cy="1911096"/>
           </a:xfrm>
           <a:prstGeom prst="rect">
             <a:avLst/>
@@ -10992,14 +11808,14 @@
       </p:sp>
       <p:sp>
         <p:nvSpPr>
-          <p:cNvPr id="9" name="TextBox 8"/>
+          <p:cNvPr id="14" name="TextBox 13"/>
           <p:cNvSpPr txBox="1"/>
           <p:nvPr/>
         </p:nvSpPr>
         <p:spPr>
           <a:xfrm>
-            <a:off x="914400" y="1920240"/>
-            <a:ext cx="4937760" cy="365760"/>
+            <a:off x="4617720" y="4160520"/>
+            <a:ext cx="3108960" cy="365760"/>
           </a:xfrm>
           <a:prstGeom prst="rect">
             <a:avLst/>
@@ -11020,21 +11836,21 @@
                 </a:solidFill>
                 <a:latin typeface="Calibri"/>
               </a:rPr>
-              <a:t>Deep model</a:t>
-            </a:r>
-          </a:p>
-        </p:txBody>
-      </p:sp>
-      <p:sp>
-        <p:nvSpPr>
-          <p:cNvPr id="10" name="TextBox 9"/>
+              <a:t>BiLSTM</a:t>
+            </a:r>
+          </a:p>
+        </p:txBody>
+      </p:sp>
+      <p:sp>
+        <p:nvSpPr>
+          <p:cNvPr id="15" name="TextBox 14"/>
           <p:cNvSpPr txBox="1"/>
           <p:nvPr/>
         </p:nvSpPr>
         <p:spPr>
           <a:xfrm>
-            <a:off x="914400" y="2359152"/>
-            <a:ext cx="4937760" cy="3566160"/>
+            <a:off x="4617720" y="4599431"/>
+            <a:ext cx="3108960" cy="1508760"/>
           </a:xfrm>
           <a:prstGeom prst="rect">
             <a:avLst/>
@@ -11049,87 +11865,27 @@
           <a:p>
             <a:pPr algn="l"/>
             <a:r>
-              <a:rPr sz="1500" b="0">
+              <a:rPr sz="1600" b="0">
                 <a:solidFill>
                   <a:srgbClr val="1E293B"/>
                 </a:solidFill>
                 <a:latin typeface="Calibri"/>
               </a:rPr>
-              <a:t>Adam, lr 1e-3, ReduceLROnPlateau</a:t>
-            </a:r>
-          </a:p>
-          <a:p>
-            <a:pPr algn="l"/>
-            <a:r>
-              <a:rPr sz="1500" b="0">
-                <a:solidFill>
-                  <a:srgbClr val="1E293B"/>
-                </a:solidFill>
-                <a:latin typeface="Calibri"/>
-              </a:rPr>
-              <a:t>Class-weighted cross-entropy</a:t>
-            </a:r>
-          </a:p>
-          <a:p>
-            <a:pPr algn="l"/>
-            <a:r>
-              <a:rPr sz="1500" b="0">
-                <a:solidFill>
-                  <a:srgbClr val="1E293B"/>
-                </a:solidFill>
-                <a:latin typeface="Calibri"/>
-              </a:rPr>
-              <a:t>Batch 32, up to 30 epochs (ran 27)</a:t>
-            </a:r>
-          </a:p>
-          <a:p>
-            <a:pPr algn="l"/>
-            <a:r>
-              <a:rPr sz="1500" b="0">
-                <a:solidFill>
-                  <a:srgbClr val="1E293B"/>
-                </a:solidFill>
-                <a:latin typeface="Calibri"/>
-              </a:rPr>
-              <a:t>Early stopping on validation loss</a:t>
-            </a:r>
-          </a:p>
-          <a:p>
-            <a:pPr algn="l"/>
-            <a:r>
-              <a:rPr sz="1500" b="0">
-                <a:solidFill>
-                  <a:srgbClr val="1E293B"/>
-                </a:solidFill>
-                <a:latin typeface="Calibri"/>
-              </a:rPr>
-              <a:t>341,064 parameters</a:t>
-            </a:r>
-          </a:p>
-          <a:p>
-            <a:pPr algn="l"/>
-            <a:r>
-              <a:rPr sz="1500" b="0">
-                <a:solidFill>
-                  <a:srgbClr val="1E293B"/>
-                </a:solidFill>
-                <a:latin typeface="Calibri"/>
-              </a:rPr>
-              <a:t>Training time 73 s (CPU)</a:t>
-            </a:r>
-          </a:p>
-        </p:txBody>
-      </p:sp>
-      <p:sp>
-        <p:nvSpPr>
-          <p:cNvPr id="11" name="Rounded Rectangle 10"/>
+              <a:t>48 units per direction read the sequence forwards and backwards.</a:t>
+            </a:r>
+          </a:p>
+        </p:txBody>
+      </p:sp>
+      <p:sp>
+        <p:nvSpPr>
+          <p:cNvPr id="16" name="Rounded Rectangle 15"/>
           <p:cNvSpPr/>
           <p:nvPr/>
         </p:nvSpPr>
         <p:spPr>
           <a:xfrm>
-            <a:off x="6309360" y="1737360"/>
-            <a:ext cx="5257800" cy="2377440"/>
+            <a:off x="8046720" y="3977639"/>
+            <a:ext cx="3566160" cy="2240280"/>
           </a:xfrm>
           <a:prstGeom prst="roundRect">
             <a:avLst/>
@@ -11166,14 +11922,14 @@
       </p:sp>
       <p:sp>
         <p:nvSpPr>
-          <p:cNvPr id="12" name="Rectangle 11"/>
+          <p:cNvPr id="17" name="Rectangle 16"/>
           <p:cNvSpPr/>
           <p:nvPr/>
         </p:nvSpPr>
         <p:spPr>
           <a:xfrm>
-            <a:off x="6309360" y="1901952"/>
-            <a:ext cx="73152" cy="2048256"/>
+            <a:off x="8046720" y="4142231"/>
+            <a:ext cx="73152" cy="1911096"/>
           </a:xfrm>
           <a:prstGeom prst="rect">
             <a:avLst/>
@@ -11210,14 +11966,14 @@
       </p:sp>
       <p:sp>
         <p:nvSpPr>
-          <p:cNvPr id="13" name="TextBox 12"/>
+          <p:cNvPr id="18" name="TextBox 17"/>
           <p:cNvSpPr txBox="1"/>
           <p:nvPr/>
         </p:nvSpPr>
         <p:spPr>
           <a:xfrm>
-            <a:off x="6583680" y="1920240"/>
-            <a:ext cx="4800600" cy="365760"/>
+            <a:off x="8321040" y="4160520"/>
+            <a:ext cx="3108960" cy="365760"/>
           </a:xfrm>
           <a:prstGeom prst="rect">
             <a:avLst/>
@@ -11238,21 +11994,21 @@
                 </a:solidFill>
                 <a:latin typeface="Calibri"/>
               </a:rPr>
-              <a:t>Classical baseline</a:t>
-            </a:r>
-          </a:p>
-        </p:txBody>
-      </p:sp>
-      <p:sp>
-        <p:nvSpPr>
-          <p:cNvPr id="14" name="TextBox 13"/>
+              <a:t>Attention + softmax</a:t>
+            </a:r>
+          </a:p>
+        </p:txBody>
+      </p:sp>
+      <p:sp>
+        <p:nvSpPr>
+          <p:cNvPr id="19" name="TextBox 18"/>
           <p:cNvSpPr txBox="1"/>
           <p:nvPr/>
         </p:nvSpPr>
         <p:spPr>
           <a:xfrm>
-            <a:off x="6583680" y="2359152"/>
-            <a:ext cx="4800600" cy="1645920"/>
+            <a:off x="8321040" y="4599431"/>
+            <a:ext cx="3108960" cy="1508760"/>
           </a:xfrm>
           <a:prstGeom prst="rect">
             <a:avLst/>
@@ -11267,183 +12023,13 @@
           <a:p>
             <a:pPr algn="l"/>
             <a:r>
-              <a:rPr sz="1500" b="0">
+              <a:rPr sz="1600" b="0">
                 <a:solidFill>
                   <a:srgbClr val="1E293B"/>
                 </a:solidFill>
                 <a:latin typeface="Calibri"/>
               </a:rPr>
-              <a:t>RBF-SVM on utterance-level MFCC mean + std</a:t>
-            </a:r>
-          </a:p>
-          <a:p>
-            <a:pPr algn="l"/>
-            <a:r>
-              <a:rPr sz="1500" b="0">
-                <a:solidFill>
-                  <a:srgbClr val="1E293B"/>
-                </a:solidFill>
-                <a:latin typeface="Calibri"/>
-              </a:rPr>
-              <a:t>Tuned on validation actors: C = 100, gamma = 0.001</a:t>
-            </a:r>
-          </a:p>
-        </p:txBody>
-      </p:sp>
-      <p:sp>
-        <p:nvSpPr>
-          <p:cNvPr id="15" name="Rounded Rectangle 14"/>
-          <p:cNvSpPr/>
-          <p:nvPr/>
-        </p:nvSpPr>
-        <p:spPr>
-          <a:xfrm>
-            <a:off x="6309360" y="4297680"/>
-            <a:ext cx="5257800" cy="1737360"/>
-          </a:xfrm>
-          <a:prstGeom prst="roundRect">
-            <a:avLst/>
-          </a:prstGeom>
-          <a:solidFill>
-            <a:srgbClr val="EEF2FF"/>
-          </a:solidFill>
-          <a:ln>
-            <a:noFill/>
-          </a:ln>
-          <a:effectLst/>
-        </p:spPr>
-        <p:style>
-          <a:lnRef idx="1">
-            <a:schemeClr val="accent1"/>
-          </a:lnRef>
-          <a:fillRef idx="3">
-            <a:schemeClr val="accent1"/>
-          </a:fillRef>
-          <a:effectRef idx="2">
-            <a:schemeClr val="accent1"/>
-          </a:effectRef>
-          <a:fontRef idx="minor">
-            <a:schemeClr val="lt1"/>
-          </a:fontRef>
-        </p:style>
-        <p:txBody>
-          <a:bodyPr rtlCol="0" anchor="ctr"/>
-          <a:lstStyle/>
-          <a:p>
-            <a:pPr algn="ctr"/>
-          </a:p>
-        </p:txBody>
-      </p:sp>
-      <p:sp>
-        <p:nvSpPr>
-          <p:cNvPr id="16" name="Rectangle 15"/>
-          <p:cNvSpPr/>
-          <p:nvPr/>
-        </p:nvSpPr>
-        <p:spPr>
-          <a:xfrm>
-            <a:off x="6309360" y="4462272"/>
-            <a:ext cx="73152" cy="1408176"/>
-          </a:xfrm>
-          <a:prstGeom prst="rect">
-            <a:avLst/>
-          </a:prstGeom>
-          <a:solidFill>
-            <a:srgbClr val="06B6D4"/>
-          </a:solidFill>
-          <a:ln>
-            <a:noFill/>
-          </a:ln>
-          <a:effectLst/>
-        </p:spPr>
-        <p:style>
-          <a:lnRef idx="1">
-            <a:schemeClr val="accent1"/>
-          </a:lnRef>
-          <a:fillRef idx="3">
-            <a:schemeClr val="accent1"/>
-          </a:fillRef>
-          <a:effectRef idx="2">
-            <a:schemeClr val="accent1"/>
-          </a:effectRef>
-          <a:fontRef idx="minor">
-            <a:schemeClr val="lt1"/>
-          </a:fontRef>
-        </p:style>
-        <p:txBody>
-          <a:bodyPr rtlCol="0" anchor="ctr"/>
-          <a:lstStyle/>
-          <a:p>
-            <a:pPr algn="ctr"/>
-          </a:p>
-        </p:txBody>
-      </p:sp>
-      <p:sp>
-        <p:nvSpPr>
-          <p:cNvPr id="17" name="TextBox 16"/>
-          <p:cNvSpPr txBox="1"/>
-          <p:nvPr/>
-        </p:nvSpPr>
-        <p:spPr>
-          <a:xfrm>
-            <a:off x="6583680" y="4480560"/>
-            <a:ext cx="4800600" cy="365760"/>
-          </a:xfrm>
-          <a:prstGeom prst="rect">
-            <a:avLst/>
-          </a:prstGeom>
-          <a:noFill/>
-        </p:spPr>
-        <p:txBody>
-          <a:bodyPr wrap="square" anchor="t" lIns="0" rIns="0" tIns="0" bIns="0">
-            <a:spAutoFit/>
-          </a:bodyPr>
-          <a:lstStyle/>
-          <a:p>
-            <a:pPr algn="l"/>
-            <a:r>
-              <a:rPr sz="1700" b="1">
-                <a:solidFill>
-                  <a:srgbClr val="0F172A"/>
-                </a:solidFill>
-                <a:latin typeface="Calibri"/>
-              </a:rPr>
-              <a:t>Regularisation</a:t>
-            </a:r>
-          </a:p>
-        </p:txBody>
-      </p:sp>
-      <p:sp>
-        <p:nvSpPr>
-          <p:cNvPr id="18" name="TextBox 17"/>
-          <p:cNvSpPr txBox="1"/>
-          <p:nvPr/>
-        </p:nvSpPr>
-        <p:spPr>
-          <a:xfrm>
-            <a:off x="6583680" y="4919472"/>
-            <a:ext cx="4800600" cy="1005839"/>
-          </a:xfrm>
-          <a:prstGeom prst="rect">
-            <a:avLst/>
-          </a:prstGeom>
-          <a:noFill/>
-        </p:spPr>
-        <p:txBody>
-          <a:bodyPr wrap="square" anchor="t" lIns="0" rIns="0" tIns="0" bIns="0">
-            <a:spAutoFit/>
-          </a:bodyPr>
-          <a:lstStyle/>
-          <a:p>
-            <a:pPr algn="l"/>
-            <a:r>
-              <a:rPr sz="1500" b="0">
-                <a:solidFill>
-                  <a:srgbClr val="1E293B"/>
-                </a:solidFill>
-                <a:latin typeface="Calibri"/>
-              </a:rPr>
-              <a:t>Dropout, L2, Gaussian noise, augmentation, speaker-independent early stopping.</a:t>
+              <a:t>Learned frame weights give one utterance vector; Dense(64) and softmax output 8 probabilities.</a:t>
             </a:r>
           </a:p>
         </p:txBody>
@@ -11540,7 +12126,7 @@
                 </a:solidFill>
                 <a:latin typeface="Calibri"/>
               </a:rPr>
-              <a:t>EVALUATION</a:t>
+              <a:t>SETUP</a:t>
             </a:r>
           </a:p>
         </p:txBody>
@@ -11575,7 +12161,7 @@
                 </a:solidFill>
                 <a:latin typeface="Calibri"/>
               </a:rPr>
-              <a:t>Evaluation with F1-score</a:t>
+              <a:t>Training and evaluation</a:t>
             </a:r>
           </a:p>
         </p:txBody>
@@ -11652,95 +12238,16 @@
       </p:sp>
       <p:sp>
         <p:nvSpPr>
-          <p:cNvPr id="7" name="Rounded Rectangle 6"/>
+          <p:cNvPr id="7" name="Rectangle 6"/>
           <p:cNvSpPr/>
           <p:nvPr/>
         </p:nvSpPr>
         <p:spPr>
           <a:xfrm>
-            <a:off x="640080" y="1737360"/>
-            <a:ext cx="10972800" cy="1188720"/>
-          </a:xfrm>
-          <a:prstGeom prst="roundRect">
-            <a:avLst/>
-          </a:prstGeom>
-          <a:solidFill>
-            <a:srgbClr val="0F172A"/>
-          </a:solidFill>
-          <a:ln>
-            <a:noFill/>
-          </a:ln>
-          <a:effectLst/>
-        </p:spPr>
-        <p:style>
-          <a:lnRef idx="1">
-            <a:schemeClr val="accent1"/>
-          </a:lnRef>
-          <a:fillRef idx="3">
-            <a:schemeClr val="accent1"/>
-          </a:fillRef>
-          <a:effectRef idx="2">
-            <a:schemeClr val="accent1"/>
-          </a:effectRef>
-          <a:fontRef idx="minor">
-            <a:schemeClr val="lt1"/>
-          </a:fontRef>
-        </p:style>
-        <p:txBody>
-          <a:bodyPr rtlCol="0" anchor="ctr"/>
-          <a:lstStyle/>
-          <a:p>
-            <a:pPr algn="ctr"/>
-          </a:p>
-        </p:txBody>
-      </p:sp>
-      <p:sp>
-        <p:nvSpPr>
-          <p:cNvPr id="8" name="TextBox 7"/>
-          <p:cNvSpPr txBox="1"/>
-          <p:nvPr/>
-        </p:nvSpPr>
-        <p:spPr>
-          <a:xfrm>
-            <a:off x="640080" y="1737360"/>
-            <a:ext cx="10972800" cy="1188720"/>
-          </a:xfrm>
-          <a:prstGeom prst="rect">
-            <a:avLst/>
-          </a:prstGeom>
-          <a:noFill/>
-        </p:spPr>
-        <p:txBody>
-          <a:bodyPr wrap="square" anchor="ctr" lIns="0" rIns="0" tIns="0" bIns="0">
-            <a:spAutoFit/>
-          </a:bodyPr>
-          <a:lstStyle/>
-          <a:p>
-            <a:pPr algn="ctr"/>
-            <a:r>
-              <a:rPr sz="2800" b="1">
-                <a:solidFill>
-                  <a:srgbClr val="FFFFFF"/>
-                </a:solidFill>
-                <a:latin typeface="Calibri"/>
-              </a:rPr>
-              <a:t>F1  =  2 · Precision · Recall  /  (Precision + Recall)</a:t>
-            </a:r>
-          </a:p>
-        </p:txBody>
-      </p:sp>
-      <p:sp>
-        <p:nvSpPr>
-          <p:cNvPr id="9" name="Rounded Rectangle 8"/>
-          <p:cNvSpPr/>
-          <p:nvPr/>
-        </p:nvSpPr>
-        <p:spPr>
-          <a:xfrm>
-            <a:off x="640080" y="3200400"/>
-            <a:ext cx="3520440" cy="2651760"/>
-          </a:xfrm>
-          <a:prstGeom prst="roundRect">
+            <a:off x="640080" y="1645920"/>
+            <a:ext cx="5394960" cy="548640"/>
+          </a:xfrm>
+          <a:prstGeom prst="rect">
             <a:avLst/>
           </a:prstGeom>
           <a:solidFill>
@@ -11775,20 +12282,90 @@
       </p:sp>
       <p:sp>
         <p:nvSpPr>
+          <p:cNvPr id="8" name="TextBox 7"/>
+          <p:cNvSpPr txBox="1"/>
+          <p:nvPr/>
+        </p:nvSpPr>
+        <p:spPr>
+          <a:xfrm>
+            <a:off x="777240" y="1645920"/>
+            <a:ext cx="1920240" cy="548640"/>
+          </a:xfrm>
+          <a:prstGeom prst="rect">
+            <a:avLst/>
+          </a:prstGeom>
+          <a:noFill/>
+        </p:spPr>
+        <p:txBody>
+          <a:bodyPr wrap="square" anchor="ctr" lIns="0" rIns="0" tIns="0" bIns="0">
+            <a:spAutoFit/>
+          </a:bodyPr>
+          <a:lstStyle/>
+          <a:p>
+            <a:pPr algn="l"/>
+            <a:r>
+              <a:rPr sz="1300" b="1">
+                <a:solidFill>
+                  <a:srgbClr val="4F46E5"/>
+                </a:solidFill>
+                <a:latin typeface="Calibri"/>
+              </a:rPr>
+              <a:t>Optimiser</a:t>
+            </a:r>
+          </a:p>
+        </p:txBody>
+      </p:sp>
+      <p:sp>
+        <p:nvSpPr>
+          <p:cNvPr id="9" name="TextBox 8"/>
+          <p:cNvSpPr txBox="1"/>
+          <p:nvPr/>
+        </p:nvSpPr>
+        <p:spPr>
+          <a:xfrm>
+            <a:off x="2651760" y="1645920"/>
+            <a:ext cx="3383280" cy="548640"/>
+          </a:xfrm>
+          <a:prstGeom prst="rect">
+            <a:avLst/>
+          </a:prstGeom>
+          <a:noFill/>
+        </p:spPr>
+        <p:txBody>
+          <a:bodyPr wrap="square" anchor="ctr" lIns="0" rIns="0" tIns="0" bIns="0">
+            <a:spAutoFit/>
+          </a:bodyPr>
+          <a:lstStyle/>
+          <a:p>
+            <a:pPr algn="l"/>
+            <a:r>
+              <a:rPr sz="1300" b="0">
+                <a:solidFill>
+                  <a:srgbClr val="1E293B"/>
+                </a:solidFill>
+                <a:latin typeface="Calibri"/>
+              </a:rPr>
+              <a:t>Adam, lr 1e-3, halved on plateau</a:t>
+            </a:r>
+          </a:p>
+        </p:txBody>
+      </p:sp>
+      <p:sp>
+        <p:nvSpPr>
           <p:cNvPr id="10" name="Rectangle 9"/>
           <p:cNvSpPr/>
           <p:nvPr/>
         </p:nvSpPr>
         <p:spPr>
           <a:xfrm>
-            <a:off x="640080" y="3364992"/>
-            <a:ext cx="73152" cy="2322576"/>
+            <a:off x="640080" y="2267712"/>
+            <a:ext cx="5394960" cy="548640"/>
           </a:xfrm>
           <a:prstGeom prst="rect">
             <a:avLst/>
           </a:prstGeom>
           <a:solidFill>
-            <a:srgbClr val="4F46E5"/>
+            <a:srgbClr val="FFFFFF"/>
           </a:solidFill>
           <a:ln>
             <a:noFill/>
@@ -11825,8 +12402,8 @@
         </p:nvSpPr>
         <p:spPr>
           <a:xfrm>
-            <a:off x="914400" y="3383280"/>
-            <a:ext cx="3063240" cy="365760"/>
+            <a:off x="777240" y="2267712"/>
+            <a:ext cx="1920240" cy="548640"/>
           </a:xfrm>
           <a:prstGeom prst="rect">
             <a:avLst/>
@@ -11834,20 +12411,20 @@
           <a:noFill/>
         </p:spPr>
         <p:txBody>
-          <a:bodyPr wrap="square" anchor="t" lIns="0" rIns="0" tIns="0" bIns="0">
+          <a:bodyPr wrap="square" anchor="ctr" lIns="0" rIns="0" tIns="0" bIns="0">
             <a:spAutoFit/>
           </a:bodyPr>
           <a:lstStyle/>
           <a:p>
             <a:pPr algn="l"/>
             <a:r>
-              <a:rPr sz="1700" b="1">
-                <a:solidFill>
-                  <a:srgbClr val="0F172A"/>
-                </a:solidFill>
-                <a:latin typeface="Calibri"/>
-              </a:rPr>
-              <a:t>Macro-F1</a:t>
+              <a:rPr sz="1300" b="1">
+                <a:solidFill>
+                  <a:srgbClr val="4F46E5"/>
+                </a:solidFill>
+                <a:latin typeface="Calibri"/>
+              </a:rPr>
+              <a:t>Loss</a:t>
             </a:r>
           </a:p>
         </p:txBody>
@@ -11860,8 +12437,8 @@
         </p:nvSpPr>
         <p:spPr>
           <a:xfrm>
-            <a:off x="914400" y="3822191"/>
-            <a:ext cx="3063240" cy="1920239"/>
+            <a:off x="2651760" y="2267712"/>
+            <a:ext cx="3383280" cy="548640"/>
           </a:xfrm>
           <a:prstGeom prst="rect">
             <a:avLst/>
@@ -11869,36 +12446,36 @@
           <a:noFill/>
         </p:spPr>
         <p:txBody>
-          <a:bodyPr wrap="square" anchor="t" lIns="0" rIns="0" tIns="0" bIns="0">
+          <a:bodyPr wrap="square" anchor="ctr" lIns="0" rIns="0" tIns="0" bIns="0">
             <a:spAutoFit/>
           </a:bodyPr>
           <a:lstStyle/>
           <a:p>
             <a:pPr algn="l"/>
             <a:r>
-              <a:rPr sz="1400" b="0">
+              <a:rPr sz="1300" b="0">
                 <a:solidFill>
                   <a:srgbClr val="1E293B"/>
                 </a:solidFill>
                 <a:latin typeface="Calibri"/>
               </a:rPr>
-              <a:t>Mean of per-class F1. Primary metric; penalises ignoring any emotion.</a:t>
-            </a:r>
-          </a:p>
-        </p:txBody>
-      </p:sp>
-      <p:sp>
-        <p:nvSpPr>
-          <p:cNvPr id="13" name="Rounded Rectangle 12"/>
+              <a:t>Cross-entropy + class weights</a:t>
+            </a:r>
+          </a:p>
+        </p:txBody>
+      </p:sp>
+      <p:sp>
+        <p:nvSpPr>
+          <p:cNvPr id="13" name="Rectangle 12"/>
           <p:cNvSpPr/>
           <p:nvPr/>
         </p:nvSpPr>
         <p:spPr>
           <a:xfrm>
-            <a:off x="4343400" y="3200400"/>
-            <a:ext cx="3520440" cy="2651760"/>
-          </a:xfrm>
-          <a:prstGeom prst="roundRect">
+            <a:off x="640080" y="2889504"/>
+            <a:ext cx="5394960" cy="548640"/>
+          </a:xfrm>
+          <a:prstGeom prst="rect">
             <a:avLst/>
           </a:prstGeom>
           <a:solidFill>
@@ -11933,20 +12510,90 @@
       </p:sp>
       <p:sp>
         <p:nvSpPr>
-          <p:cNvPr id="14" name="Rectangle 13"/>
+          <p:cNvPr id="14" name="TextBox 13"/>
+          <p:cNvSpPr txBox="1"/>
+          <p:nvPr/>
+        </p:nvSpPr>
+        <p:spPr>
+          <a:xfrm>
+            <a:off x="777240" y="2889504"/>
+            <a:ext cx="1920240" cy="548640"/>
+          </a:xfrm>
+          <a:prstGeom prst="rect">
+            <a:avLst/>
+          </a:prstGeom>
+          <a:noFill/>
+        </p:spPr>
+        <p:txBody>
+          <a:bodyPr wrap="square" anchor="ctr" lIns="0" rIns="0" tIns="0" bIns="0">
+            <a:spAutoFit/>
+          </a:bodyPr>
+          <a:lstStyle/>
+          <a:p>
+            <a:pPr algn="l"/>
+            <a:r>
+              <a:rPr sz="1300" b="1">
+                <a:solidFill>
+                  <a:srgbClr val="4F46E5"/>
+                </a:solidFill>
+                <a:latin typeface="Calibri"/>
+              </a:rPr>
+              <a:t>Batch / epochs</a:t>
+            </a:r>
+          </a:p>
+        </p:txBody>
+      </p:sp>
+      <p:sp>
+        <p:nvSpPr>
+          <p:cNvPr id="15" name="TextBox 14"/>
+          <p:cNvSpPr txBox="1"/>
+          <p:nvPr/>
+        </p:nvSpPr>
+        <p:spPr>
+          <a:xfrm>
+            <a:off x="2651760" y="2889504"/>
+            <a:ext cx="3383280" cy="548640"/>
+          </a:xfrm>
+          <a:prstGeom prst="rect">
+            <a:avLst/>
+          </a:prstGeom>
+          <a:noFill/>
+        </p:spPr>
+        <p:txBody>
+          <a:bodyPr wrap="square" anchor="ctr" lIns="0" rIns="0" tIns="0" bIns="0">
+            <a:spAutoFit/>
+          </a:bodyPr>
+          <a:lstStyle/>
+          <a:p>
+            <a:pPr algn="l"/>
+            <a:r>
+              <a:rPr sz="1300" b="0">
+                <a:solidFill>
+                  <a:srgbClr val="1E293B"/>
+                </a:solidFill>
+                <a:latin typeface="Calibri"/>
+              </a:rPr>
+              <a:t>32 / up to 60</a:t>
+            </a:r>
+          </a:p>
+        </p:txBody>
+      </p:sp>
+      <p:sp>
+        <p:nvSpPr>
+          <p:cNvPr id="16" name="Rectangle 15"/>
           <p:cNvSpPr/>
           <p:nvPr/>
         </p:nvSpPr>
         <p:spPr>
           <a:xfrm>
-            <a:off x="4343400" y="3364992"/>
-            <a:ext cx="73152" cy="2322576"/>
+            <a:off x="640080" y="3511296"/>
+            <a:ext cx="5394960" cy="548640"/>
           </a:xfrm>
           <a:prstGeom prst="rect">
             <a:avLst/>
           </a:prstGeom>
           <a:solidFill>
-            <a:srgbClr val="06B6D4"/>
+            <a:srgbClr val="FFFFFF"/>
           </a:solidFill>
           <a:ln>
             <a:noFill/>
@@ -11977,14 +12624,14 @@
       </p:sp>
       <p:sp>
         <p:nvSpPr>
-          <p:cNvPr id="15" name="TextBox 14"/>
+          <p:cNvPr id="17" name="TextBox 16"/>
           <p:cNvSpPr txBox="1"/>
           <p:nvPr/>
         </p:nvSpPr>
         <p:spPr>
           <a:xfrm>
-            <a:off x="4617720" y="3383280"/>
-            <a:ext cx="3063240" cy="365760"/>
+            <a:off x="777240" y="3511296"/>
+            <a:ext cx="1920240" cy="548640"/>
           </a:xfrm>
           <a:prstGeom prst="rect">
             <a:avLst/>
@@ -11992,34 +12639,34 @@
           <a:noFill/>
         </p:spPr>
         <p:txBody>
-          <a:bodyPr wrap="square" anchor="t" lIns="0" rIns="0" tIns="0" bIns="0">
+          <a:bodyPr wrap="square" anchor="ctr" lIns="0" rIns="0" tIns="0" bIns="0">
             <a:spAutoFit/>
           </a:bodyPr>
           <a:lstStyle/>
           <a:p>
             <a:pPr algn="l"/>
             <a:r>
-              <a:rPr sz="1700" b="1">
-                <a:solidFill>
-                  <a:srgbClr val="0F172A"/>
-                </a:solidFill>
-                <a:latin typeface="Calibri"/>
-              </a:rPr>
-              <a:t>Weighted / micro-F1</a:t>
-            </a:r>
-          </a:p>
-        </p:txBody>
-      </p:sp>
-      <p:sp>
-        <p:nvSpPr>
-          <p:cNvPr id="16" name="TextBox 15"/>
+              <a:rPr sz="1300" b="1">
+                <a:solidFill>
+                  <a:srgbClr val="4F46E5"/>
+                </a:solidFill>
+                <a:latin typeface="Calibri"/>
+              </a:rPr>
+              <a:t>Early stopping</a:t>
+            </a:r>
+          </a:p>
+        </p:txBody>
+      </p:sp>
+      <p:sp>
+        <p:nvSpPr>
+          <p:cNvPr id="18" name="TextBox 17"/>
           <p:cNvSpPr txBox="1"/>
           <p:nvPr/>
         </p:nvSpPr>
         <p:spPr>
           <a:xfrm>
-            <a:off x="4617720" y="3822191"/>
-            <a:ext cx="3063240" cy="1920239"/>
+            <a:off x="2651760" y="3511296"/>
+            <a:ext cx="3383280" cy="548640"/>
           </a:xfrm>
           <a:prstGeom prst="rect">
             <a:avLst/>
@@ -12027,36 +12674,36 @@
           <a:noFill/>
         </p:spPr>
         <p:txBody>
-          <a:bodyPr wrap="square" anchor="t" lIns="0" rIns="0" tIns="0" bIns="0">
+          <a:bodyPr wrap="square" anchor="ctr" lIns="0" rIns="0" tIns="0" bIns="0">
             <a:spAutoFit/>
           </a:bodyPr>
           <a:lstStyle/>
           <a:p>
             <a:pPr algn="l"/>
             <a:r>
-              <a:rPr sz="1400" b="0">
+              <a:rPr sz="1300" b="0">
                 <a:solidFill>
                   <a:srgbClr val="1E293B"/>
                 </a:solidFill>
                 <a:latin typeface="Calibri"/>
               </a:rPr>
-              <a:t>Weighted by class support; micro pools all decisions (equals accuracy).</a:t>
-            </a:r>
-          </a:p>
-        </p:txBody>
-      </p:sp>
-      <p:sp>
-        <p:nvSpPr>
-          <p:cNvPr id="17" name="Rounded Rectangle 16"/>
+              <a:t>12 epochs on val Macro F1</a:t>
+            </a:r>
+          </a:p>
+        </p:txBody>
+      </p:sp>
+      <p:sp>
+        <p:nvSpPr>
+          <p:cNvPr id="19" name="Rectangle 18"/>
           <p:cNvSpPr/>
           <p:nvPr/>
         </p:nvSpPr>
         <p:spPr>
           <a:xfrm>
-            <a:off x="8046720" y="3200400"/>
-            <a:ext cx="3566160" cy="2651760"/>
-          </a:xfrm>
-          <a:prstGeom prst="roundRect">
+            <a:off x="640080" y="4133088"/>
+            <a:ext cx="5394960" cy="548640"/>
+          </a:xfrm>
+          <a:prstGeom prst="rect">
             <a:avLst/>
           </a:prstGeom>
           <a:solidFill>
@@ -12091,20 +12738,90 @@
       </p:sp>
       <p:sp>
         <p:nvSpPr>
-          <p:cNvPr id="18" name="Rectangle 17"/>
+          <p:cNvPr id="20" name="TextBox 19"/>
+          <p:cNvSpPr txBox="1"/>
+          <p:nvPr/>
+        </p:nvSpPr>
+        <p:spPr>
+          <a:xfrm>
+            <a:off x="777240" y="4133088"/>
+            <a:ext cx="1920240" cy="548640"/>
+          </a:xfrm>
+          <a:prstGeom prst="rect">
+            <a:avLst/>
+          </a:prstGeom>
+          <a:noFill/>
+        </p:spPr>
+        <p:txBody>
+          <a:bodyPr wrap="square" anchor="ctr" lIns="0" rIns="0" tIns="0" bIns="0">
+            <a:spAutoFit/>
+          </a:bodyPr>
+          <a:lstStyle/>
+          <a:p>
+            <a:pPr algn="l"/>
+            <a:r>
+              <a:rPr sz="1300" b="1">
+                <a:solidFill>
+                  <a:srgbClr val="4F46E5"/>
+                </a:solidFill>
+                <a:latin typeface="Calibri"/>
+              </a:rPr>
+              <a:t>Best epoch</a:t>
+            </a:r>
+          </a:p>
+        </p:txBody>
+      </p:sp>
+      <p:sp>
+        <p:nvSpPr>
+          <p:cNvPr id="21" name="TextBox 20"/>
+          <p:cNvSpPr txBox="1"/>
+          <p:nvPr/>
+        </p:nvSpPr>
+        <p:spPr>
+          <a:xfrm>
+            <a:off x="2651760" y="4133088"/>
+            <a:ext cx="3383280" cy="548640"/>
+          </a:xfrm>
+          <a:prstGeom prst="rect">
+            <a:avLst/>
+          </a:prstGeom>
+          <a:noFill/>
+        </p:spPr>
+        <p:txBody>
+          <a:bodyPr wrap="square" anchor="ctr" lIns="0" rIns="0" tIns="0" bIns="0">
+            <a:spAutoFit/>
+          </a:bodyPr>
+          <a:lstStyle/>
+          <a:p>
+            <a:pPr algn="l"/>
+            <a:r>
+              <a:rPr sz="1300" b="0">
+                <a:solidFill>
+                  <a:srgbClr val="1E293B"/>
+                </a:solidFill>
+                <a:latin typeface="Calibri"/>
+              </a:rPr>
+              <a:t>12 of 24 run</a:t>
+            </a:r>
+          </a:p>
+        </p:txBody>
+      </p:sp>
+      <p:sp>
+        <p:nvSpPr>
+          <p:cNvPr id="22" name="Rectangle 21"/>
           <p:cNvSpPr/>
           <p:nvPr/>
         </p:nvSpPr>
         <p:spPr>
           <a:xfrm>
-            <a:off x="8046720" y="3364992"/>
-            <a:ext cx="73152" cy="2322576"/>
+            <a:off x="640080" y="4754880"/>
+            <a:ext cx="5394960" cy="548640"/>
           </a:xfrm>
           <a:prstGeom prst="rect">
             <a:avLst/>
           </a:prstGeom>
           <a:solidFill>
-            <a:srgbClr val="F59E0B"/>
+            <a:srgbClr val="FFFFFF"/>
           </a:solidFill>
           <a:ln>
             <a:noFill/>
@@ -12135,14 +12852,222 @@
       </p:sp>
       <p:sp>
         <p:nvSpPr>
-          <p:cNvPr id="19" name="TextBox 18"/>
+          <p:cNvPr id="23" name="TextBox 22"/>
           <p:cNvSpPr txBox="1"/>
           <p:nvPr/>
         </p:nvSpPr>
         <p:spPr>
           <a:xfrm>
-            <a:off x="8321040" y="3383280"/>
-            <a:ext cx="3108960" cy="365760"/>
+            <a:off x="777240" y="4754880"/>
+            <a:ext cx="1920240" cy="548640"/>
+          </a:xfrm>
+          <a:prstGeom prst="rect">
+            <a:avLst/>
+          </a:prstGeom>
+          <a:noFill/>
+        </p:spPr>
+        <p:txBody>
+          <a:bodyPr wrap="square" anchor="ctr" lIns="0" rIns="0" tIns="0" bIns="0">
+            <a:spAutoFit/>
+          </a:bodyPr>
+          <a:lstStyle/>
+          <a:p>
+            <a:pPr algn="l"/>
+            <a:r>
+              <a:rPr sz="1300" b="1">
+                <a:solidFill>
+                  <a:srgbClr val="4F46E5"/>
+                </a:solidFill>
+                <a:latin typeface="Calibri"/>
+              </a:rPr>
+              <a:t>Seed / time</a:t>
+            </a:r>
+          </a:p>
+        </p:txBody>
+      </p:sp>
+      <p:sp>
+        <p:nvSpPr>
+          <p:cNvPr id="24" name="TextBox 23"/>
+          <p:cNvSpPr txBox="1"/>
+          <p:nvPr/>
+        </p:nvSpPr>
+        <p:spPr>
+          <a:xfrm>
+            <a:off x="2651760" y="4754880"/>
+            <a:ext cx="3383280" cy="548640"/>
+          </a:xfrm>
+          <a:prstGeom prst="rect">
+            <a:avLst/>
+          </a:prstGeom>
+          <a:noFill/>
+        </p:spPr>
+        <p:txBody>
+          <a:bodyPr wrap="square" anchor="ctr" lIns="0" rIns="0" tIns="0" bIns="0">
+            <a:spAutoFit/>
+          </a:bodyPr>
+          <a:lstStyle/>
+          <a:p>
+            <a:pPr algn="l"/>
+            <a:r>
+              <a:rPr sz="1300" b="0">
+                <a:solidFill>
+                  <a:srgbClr val="1E293B"/>
+                </a:solidFill>
+                <a:latin typeface="Calibri"/>
+              </a:rPr>
+              <a:t>42 / 170 s CPU</a:t>
+            </a:r>
+          </a:p>
+        </p:txBody>
+      </p:sp>
+      <p:sp>
+        <p:nvSpPr>
+          <p:cNvPr id="25" name="Rectangle 24"/>
+          <p:cNvSpPr/>
+          <p:nvPr/>
+        </p:nvSpPr>
+        <p:spPr>
+          <a:xfrm>
+            <a:off x="640080" y="5376672"/>
+            <a:ext cx="5394960" cy="548640"/>
+          </a:xfrm>
+          <a:prstGeom prst="rect">
+            <a:avLst/>
+          </a:prstGeom>
+          <a:solidFill>
+            <a:srgbClr val="EEF2FF"/>
+          </a:solidFill>
+          <a:ln>
+            <a:noFill/>
+          </a:ln>
+          <a:effectLst/>
+        </p:spPr>
+        <p:style>
+          <a:lnRef idx="1">
+            <a:schemeClr val="accent1"/>
+          </a:lnRef>
+          <a:fillRef idx="3">
+            <a:schemeClr val="accent1"/>
+          </a:fillRef>
+          <a:effectRef idx="2">
+            <a:schemeClr val="accent1"/>
+          </a:effectRef>
+          <a:fontRef idx="minor">
+            <a:schemeClr val="lt1"/>
+          </a:fontRef>
+        </p:style>
+        <p:txBody>
+          <a:bodyPr rtlCol="0" anchor="ctr"/>
+          <a:lstStyle/>
+          <a:p>
+            <a:pPr algn="ctr"/>
+          </a:p>
+        </p:txBody>
+      </p:sp>
+      <p:sp>
+        <p:nvSpPr>
+          <p:cNvPr id="26" name="TextBox 25"/>
+          <p:cNvSpPr txBox="1"/>
+          <p:nvPr/>
+        </p:nvSpPr>
+        <p:spPr>
+          <a:xfrm>
+            <a:off x="777240" y="5376672"/>
+            <a:ext cx="1920240" cy="548640"/>
+          </a:xfrm>
+          <a:prstGeom prst="rect">
+            <a:avLst/>
+          </a:prstGeom>
+          <a:noFill/>
+        </p:spPr>
+        <p:txBody>
+          <a:bodyPr wrap="square" anchor="ctr" lIns="0" rIns="0" tIns="0" bIns="0">
+            <a:spAutoFit/>
+          </a:bodyPr>
+          <a:lstStyle/>
+          <a:p>
+            <a:pPr algn="l"/>
+            <a:r>
+              <a:rPr sz="1300" b="1">
+                <a:solidFill>
+                  <a:srgbClr val="4F46E5"/>
+                </a:solidFill>
+                <a:latin typeface="Calibri"/>
+              </a:rPr>
+              <a:t>Metrics</a:t>
+            </a:r>
+          </a:p>
+        </p:txBody>
+      </p:sp>
+      <p:sp>
+        <p:nvSpPr>
+          <p:cNvPr id="27" name="TextBox 26"/>
+          <p:cNvSpPr txBox="1"/>
+          <p:nvPr/>
+        </p:nvSpPr>
+        <p:spPr>
+          <a:xfrm>
+            <a:off x="2651760" y="5376672"/>
+            <a:ext cx="3383280" cy="548640"/>
+          </a:xfrm>
+          <a:prstGeom prst="rect">
+            <a:avLst/>
+          </a:prstGeom>
+          <a:noFill/>
+        </p:spPr>
+        <p:txBody>
+          <a:bodyPr wrap="square" anchor="ctr" lIns="0" rIns="0" tIns="0" bIns="0">
+            <a:spAutoFit/>
+          </a:bodyPr>
+          <a:lstStyle/>
+          <a:p>
+            <a:pPr algn="l"/>
+            <a:r>
+              <a:rPr sz="1300" b="0">
+                <a:solidFill>
+                  <a:srgbClr val="1E293B"/>
+                </a:solidFill>
+                <a:latin typeface="Calibri"/>
+              </a:rPr>
+              <a:t>Macro F1 (main), weighted F1, per-class, confusion matrix</a:t>
+            </a:r>
+          </a:p>
+        </p:txBody>
+      </p:sp>
+      <p:pic>
+        <p:nvPicPr>
+          <p:cNvPr id="28" name="Picture 27" descr="training_curves.png"/>
+          <p:cNvPicPr>
+            <a:picLocks noChangeAspect="1"/>
+          </p:cNvPicPr>
+          <p:nvPr/>
+        </p:nvPicPr>
+        <p:blipFill>
+          <a:blip r:embed="rId3"/>
+          <a:stretch>
+            <a:fillRect/>
+          </a:stretch>
+        </p:blipFill>
+        <p:spPr>
+          <a:xfrm>
+            <a:off x="6309360" y="1645920"/>
+            <a:ext cx="5394960" cy="2050085"/>
+          </a:xfrm>
+          <a:prstGeom prst="rect">
+            <a:avLst/>
+          </a:prstGeom>
+        </p:spPr>
+      </p:pic>
+      <p:sp>
+        <p:nvSpPr>
+          <p:cNvPr id="29" name="TextBox 28"/>
+          <p:cNvSpPr txBox="1"/>
+          <p:nvPr/>
+        </p:nvSpPr>
+        <p:spPr>
+          <a:xfrm>
+            <a:off x="6309360" y="3977639"/>
+            <a:ext cx="5394960" cy="1097280"/>
           </a:xfrm>
           <a:prstGeom prst="rect">
             <a:avLst/>
@@ -12157,48 +13082,13 @@
           <a:p>
             <a:pPr algn="l"/>
             <a:r>
-              <a:rPr sz="1700" b="1">
-                <a:solidFill>
-                  <a:srgbClr val="0F172A"/>
-                </a:solidFill>
-                <a:latin typeface="Calibri"/>
-              </a:rPr>
-              <a:t>Per-class + confusion</a:t>
-            </a:r>
-          </a:p>
-        </p:txBody>
-      </p:sp>
-      <p:sp>
-        <p:nvSpPr>
-          <p:cNvPr id="20" name="TextBox 19"/>
-          <p:cNvSpPr txBox="1"/>
-          <p:nvPr/>
-        </p:nvSpPr>
-        <p:spPr>
-          <a:xfrm>
-            <a:off x="8321040" y="3822191"/>
-            <a:ext cx="3108960" cy="1920239"/>
-          </a:xfrm>
-          <a:prstGeom prst="rect">
-            <a:avLst/>
-          </a:prstGeom>
-          <a:noFill/>
-        </p:spPr>
-        <p:txBody>
-          <a:bodyPr wrap="square" anchor="t" lIns="0" rIns="0" tIns="0" bIns="0">
-            <a:spAutoFit/>
-          </a:bodyPr>
-          <a:lstStyle/>
-          <a:p>
-            <a:pPr algn="l"/>
-            <a:r>
               <a:rPr sz="1400" b="0">
                 <a:solidFill>
                   <a:srgbClr val="1E293B"/>
                 </a:solidFill>
                 <a:latin typeface="Calibri"/>
               </a:rPr>
-              <a:t>Precision, recall, F1 for each emotion and row-normalised confusion matrices.</a:t>
+              <a:t>Validation loss stops improving after about epoch 12; the checkpoint from the best validation Macro F1 epoch is kept, which limits over-fitting.</a:t>
             </a:r>
           </a:p>
         </p:txBody>
@@ -12330,7 +13220,7 @@
                 </a:solidFill>
                 <a:latin typeface="Calibri"/>
               </a:rPr>
-              <a:t>Results: overall F1</a:t>
+              <a:t>Results and baseline comparison</a:t>
             </a:r>
           </a:p>
         </p:txBody>
@@ -12405,97 +13295,34 @@
           </a:p>
         </p:txBody>
       </p:sp>
-      <p:sp>
-        <p:nvSpPr>
-          <p:cNvPr id="7" name="Rounded Rectangle 6"/>
+      <p:graphicFrame>
+        <p:nvGraphicFramePr>
+          <p:cNvPr id="7" name="Chart 6"/>
+          <p:cNvGraphicFramePr>
+            <a:graphicFrameLocks noGrp="1"/>
+          </p:cNvGraphicFramePr>
+          <p:nvPr/>
+        </p:nvGraphicFramePr>
+        <p:xfrm>
+          <a:off x="640080" y="1600200"/>
+          <a:ext cx="6766560" cy="4480560"/>
+        </p:xfrm>
+        <a:graphic>
+          <a:graphicData uri="http://schemas.openxmlformats.org/drawingml/2006/chart">
+            <c:chart xmlns:c="http://schemas.openxmlformats.org/drawingml/2006/chart" r:id="rId3"/>
+          </a:graphicData>
+        </a:graphic>
+      </p:graphicFrame>
+      <p:sp>
+        <p:nvSpPr>
+          <p:cNvPr id="8" name="Rounded Rectangle 7"/>
           <p:cNvSpPr/>
           <p:nvPr/>
         </p:nvSpPr>
         <p:spPr>
           <a:xfrm>
-            <a:off x="6583680" y="347472"/>
-            <a:ext cx="4983480" cy="310896"/>
-          </a:xfrm>
-          <a:prstGeom prst="roundRect">
-            <a:avLst/>
-          </a:prstGeom>
-          <a:solidFill>
-            <a:srgbClr val="FEF3C7"/>
-          </a:solidFill>
-          <a:ln w="15875">
-            <a:solidFill>
-              <a:srgbClr val="F59E0B"/>
-            </a:solidFill>
-          </a:ln>
-          <a:effectLst/>
-        </p:spPr>
-        <p:style>
-          <a:lnRef idx="1">
-            <a:schemeClr val="accent1"/>
-          </a:lnRef>
-          <a:fillRef idx="3">
-            <a:schemeClr val="accent1"/>
-          </a:fillRef>
-          <a:effectRef idx="2">
-            <a:schemeClr val="accent1"/>
-          </a:effectRef>
-          <a:fontRef idx="minor">
-            <a:schemeClr val="lt1"/>
-          </a:fontRef>
-        </p:style>
-        <p:txBody>
-          <a:bodyPr rtlCol="0" anchor="ctr"/>
-          <a:lstStyle/>
-          <a:p>
-            <a:pPr algn="ctr"/>
-          </a:p>
-        </p:txBody>
-      </p:sp>
-      <p:sp>
-        <p:nvSpPr>
-          <p:cNvPr id="8" name="TextBox 7"/>
-          <p:cNvSpPr txBox="1"/>
-          <p:nvPr/>
-        </p:nvSpPr>
-        <p:spPr>
-          <a:xfrm>
-            <a:off x="6583680" y="347472"/>
-            <a:ext cx="4983480" cy="310896"/>
-          </a:xfrm>
-          <a:prstGeom prst="rect">
-            <a:avLst/>
-          </a:prstGeom>
-          <a:noFill/>
-        </p:spPr>
-        <p:txBody>
-          <a:bodyPr wrap="square" anchor="ctr" lIns="0" rIns="0" tIns="0" bIns="0">
-            <a:spAutoFit/>
-          </a:bodyPr>
-          <a:lstStyle/>
-          <a:p>
-            <a:pPr algn="ctr"/>
-            <a:r>
-              <a:rPr sz="1100" b="1">
-                <a:solidFill>
-                  <a:srgbClr val="92400E"/>
-                </a:solidFill>
-                <a:latin typeface="Calibri"/>
-              </a:rPr>
-              <a:t>SYNTHETIC SMOKE-TEST DATA - NOT RAVDESS RESULTS</a:t>
-            </a:r>
-          </a:p>
-        </p:txBody>
-      </p:sp>
-      <p:sp>
-        <p:nvSpPr>
-          <p:cNvPr id="9" name="Rounded Rectangle 8"/>
-          <p:cNvSpPr/>
-          <p:nvPr/>
-        </p:nvSpPr>
-        <p:spPr>
-          <a:xfrm>
-            <a:off x="640080" y="1737360"/>
-            <a:ext cx="2651760" cy="1417320"/>
+            <a:off x="7680960" y="1600200"/>
+            <a:ext cx="1920240" cy="1417320"/>
           </a:xfrm>
           <a:prstGeom prst="roundRect">
             <a:avLst/>
@@ -12532,14 +13359,14 @@
       </p:sp>
       <p:sp>
         <p:nvSpPr>
-          <p:cNvPr id="10" name="TextBox 9"/>
+          <p:cNvPr id="9" name="TextBox 8"/>
           <p:cNvSpPr txBox="1"/>
           <p:nvPr/>
         </p:nvSpPr>
         <p:spPr>
           <a:xfrm>
-            <a:off x="640080" y="1920240"/>
-            <a:ext cx="2651760" cy="731520"/>
+            <a:off x="7680960" y="1783080"/>
+            <a:ext cx="1920240" cy="731520"/>
           </a:xfrm>
           <a:prstGeom prst="rect">
             <a:avLst/>
@@ -12560,21 +13387,21 @@
                 </a:solidFill>
                 <a:latin typeface="Calibri"/>
               </a:rPr>
-              <a:t>0.880</a:t>
-            </a:r>
-          </a:p>
-        </p:txBody>
-      </p:sp>
-      <p:sp>
-        <p:nvSpPr>
-          <p:cNvPr id="11" name="TextBox 10"/>
+              <a:t>0.531</a:t>
+            </a:r>
+          </a:p>
+        </p:txBody>
+      </p:sp>
+      <p:sp>
+        <p:nvSpPr>
+          <p:cNvPr id="10" name="TextBox 9"/>
           <p:cNvSpPr txBox="1"/>
           <p:nvPr/>
         </p:nvSpPr>
         <p:spPr>
           <a:xfrm>
-            <a:off x="640080" y="2651760"/>
-            <a:ext cx="2651760" cy="365760"/>
+            <a:off x="7680960" y="2514600"/>
+            <a:ext cx="1920240" cy="365760"/>
           </a:xfrm>
           <a:prstGeom prst="rect">
             <a:avLst/>
@@ -12595,21 +13422,21 @@
                 </a:solidFill>
                 <a:latin typeface="Calibri"/>
               </a:rPr>
-              <a:t>Macro-F1 (proposed)</a:t>
-            </a:r>
-          </a:p>
-        </p:txBody>
-      </p:sp>
-      <p:sp>
-        <p:nvSpPr>
-          <p:cNvPr id="12" name="Rounded Rectangle 11"/>
+              <a:t>Experiment 3 Macro F1</a:t>
+            </a:r>
+          </a:p>
+        </p:txBody>
+      </p:sp>
+      <p:sp>
+        <p:nvSpPr>
+          <p:cNvPr id="11" name="Rounded Rectangle 10"/>
           <p:cNvSpPr/>
           <p:nvPr/>
         </p:nvSpPr>
         <p:spPr>
           <a:xfrm>
-            <a:off x="3474720" y="1737360"/>
-            <a:ext cx="2651760" cy="1417320"/>
+            <a:off x="9692640" y="1600200"/>
+            <a:ext cx="1920240" cy="1417320"/>
           </a:xfrm>
           <a:prstGeom prst="roundRect">
             <a:avLst/>
@@ -12646,14 +13473,14 @@
       </p:sp>
       <p:sp>
         <p:nvSpPr>
-          <p:cNvPr id="13" name="TextBox 12"/>
+          <p:cNvPr id="12" name="TextBox 11"/>
           <p:cNvSpPr txBox="1"/>
           <p:nvPr/>
         </p:nvSpPr>
         <p:spPr>
           <a:xfrm>
-            <a:off x="3474720" y="1920240"/>
-            <a:ext cx="2651760" cy="731520"/>
+            <a:off x="9692640" y="1783080"/>
+            <a:ext cx="1920240" cy="731520"/>
           </a:xfrm>
           <a:prstGeom prst="rect">
             <a:avLst/>
@@ -12674,21 +13501,21 @@
                 </a:solidFill>
                 <a:latin typeface="Calibri"/>
               </a:rPr>
-              <a:t>0.880</a:t>
-            </a:r>
-          </a:p>
-        </p:txBody>
-      </p:sp>
-      <p:sp>
-        <p:nvSpPr>
-          <p:cNvPr id="14" name="TextBox 13"/>
+              <a:t>56.7%</a:t>
+            </a:r>
+          </a:p>
+        </p:txBody>
+      </p:sp>
+      <p:sp>
+        <p:nvSpPr>
+          <p:cNvPr id="13" name="TextBox 12"/>
           <p:cNvSpPr txBox="1"/>
           <p:nvPr/>
         </p:nvSpPr>
         <p:spPr>
           <a:xfrm>
-            <a:off x="3474720" y="2651760"/>
-            <a:ext cx="2651760" cy="365760"/>
+            <a:off x="9692640" y="2514600"/>
+            <a:ext cx="1920240" cy="365760"/>
           </a:xfrm>
           <a:prstGeom prst="rect">
             <a:avLst/>
@@ -12709,21 +13536,135 @@
                 </a:solidFill>
                 <a:latin typeface="Calibri"/>
               </a:rPr>
-              <a:t>Weighted-F1</a:t>
-            </a:r>
-          </a:p>
-        </p:txBody>
-      </p:sp>
-      <p:sp>
-        <p:nvSpPr>
-          <p:cNvPr id="15" name="Rounded Rectangle 14"/>
+              <a:t>test accuracy</a:t>
+            </a:r>
+          </a:p>
+        </p:txBody>
+      </p:sp>
+      <p:sp>
+        <p:nvSpPr>
+          <p:cNvPr id="14" name="Rounded Rectangle 13"/>
           <p:cNvSpPr/>
           <p:nvPr/>
         </p:nvSpPr>
         <p:spPr>
           <a:xfrm>
-            <a:off x="6309360" y="1737360"/>
-            <a:ext cx="2651760" cy="1417320"/>
+            <a:off x="7680960" y="3154680"/>
+            <a:ext cx="1920240" cy="1417320"/>
+          </a:xfrm>
+          <a:prstGeom prst="roundRect">
+            <a:avLst/>
+          </a:prstGeom>
+          <a:solidFill>
+            <a:srgbClr val="64748B"/>
+          </a:solidFill>
+          <a:ln>
+            <a:noFill/>
+          </a:ln>
+          <a:effectLst/>
+        </p:spPr>
+        <p:style>
+          <a:lnRef idx="1">
+            <a:schemeClr val="accent1"/>
+          </a:lnRef>
+          <a:fillRef idx="3">
+            <a:schemeClr val="accent1"/>
+          </a:fillRef>
+          <a:effectRef idx="2">
+            <a:schemeClr val="accent1"/>
+          </a:effectRef>
+          <a:fontRef idx="minor">
+            <a:schemeClr val="lt1"/>
+          </a:fontRef>
+        </p:style>
+        <p:txBody>
+          <a:bodyPr rtlCol="0" anchor="ctr"/>
+          <a:lstStyle/>
+          <a:p>
+            <a:pPr algn="ctr"/>
+          </a:p>
+        </p:txBody>
+      </p:sp>
+      <p:sp>
+        <p:nvSpPr>
+          <p:cNvPr id="15" name="TextBox 14"/>
+          <p:cNvSpPr txBox="1"/>
+          <p:nvPr/>
+        </p:nvSpPr>
+        <p:spPr>
+          <a:xfrm>
+            <a:off x="7680960" y="3337560"/>
+            <a:ext cx="1920240" cy="731520"/>
+          </a:xfrm>
+          <a:prstGeom prst="rect">
+            <a:avLst/>
+          </a:prstGeom>
+          <a:noFill/>
+        </p:spPr>
+        <p:txBody>
+          <a:bodyPr wrap="square" anchor="t" lIns="0" rIns="0" tIns="0" bIns="0">
+            <a:spAutoFit/>
+          </a:bodyPr>
+          <a:lstStyle/>
+          <a:p>
+            <a:pPr algn="ctr"/>
+            <a:r>
+              <a:rPr sz="4000" b="1">
+                <a:solidFill>
+                  <a:srgbClr val="FFFFFF"/>
+                </a:solidFill>
+                <a:latin typeface="Calibri"/>
+              </a:rPr>
+              <a:t>0.446</a:t>
+            </a:r>
+          </a:p>
+        </p:txBody>
+      </p:sp>
+      <p:sp>
+        <p:nvSpPr>
+          <p:cNvPr id="16" name="TextBox 15"/>
+          <p:cNvSpPr txBox="1"/>
+          <p:nvPr/>
+        </p:nvSpPr>
+        <p:spPr>
+          <a:xfrm>
+            <a:off x="7680960" y="4069080"/>
+            <a:ext cx="1920240" cy="365760"/>
+          </a:xfrm>
+          <a:prstGeom prst="rect">
+            <a:avLst/>
+          </a:prstGeom>
+          <a:noFill/>
+        </p:spPr>
+        <p:txBody>
+          <a:bodyPr wrap="square" anchor="t" lIns="0" rIns="0" tIns="0" bIns="0">
+            <a:spAutoFit/>
+          </a:bodyPr>
+          <a:lstStyle/>
+          <a:p>
+            <a:pPr algn="ctr"/>
+            <a:r>
+              <a:rPr sz="1300" b="0">
+                <a:solidFill>
+                  <a:srgbClr val="FFFFFF"/>
+                </a:solidFill>
+                <a:latin typeface="Calibri"/>
+              </a:rPr>
+              <a:t>SVM baseline Macro F1</a:t>
+            </a:r>
+          </a:p>
+        </p:txBody>
+      </p:sp>
+      <p:sp>
+        <p:nvSpPr>
+          <p:cNvPr id="17" name="Rounded Rectangle 16"/>
+          <p:cNvSpPr/>
+          <p:nvPr/>
+        </p:nvSpPr>
+        <p:spPr>
+          <a:xfrm>
+            <a:off x="9692640" y="3154680"/>
+            <a:ext cx="1920240" cy="1417320"/>
           </a:xfrm>
           <a:prstGeom prst="roundRect">
             <a:avLst/>
@@ -12760,14 +13701,14 @@
       </p:sp>
       <p:sp>
         <p:nvSpPr>
-          <p:cNvPr id="16" name="TextBox 15"/>
+          <p:cNvPr id="18" name="TextBox 17"/>
           <p:cNvSpPr txBox="1"/>
           <p:nvPr/>
         </p:nvSpPr>
         <p:spPr>
           <a:xfrm>
-            <a:off x="6309360" y="1920240"/>
-            <a:ext cx="2651760" cy="731520"/>
+            <a:off x="9692640" y="3337560"/>
+            <a:ext cx="1920240" cy="731520"/>
           </a:xfrm>
           <a:prstGeom prst="rect">
             <a:avLst/>
@@ -12788,21 +13729,21 @@
                 </a:solidFill>
                 <a:latin typeface="Calibri"/>
               </a:rPr>
-              <a:t>0.875</a:t>
-            </a:r>
-          </a:p>
-        </p:txBody>
-      </p:sp>
-      <p:sp>
-        <p:nvSpPr>
-          <p:cNvPr id="17" name="TextBox 16"/>
+              <a:t>+0.084</a:t>
+            </a:r>
+          </a:p>
+        </p:txBody>
+      </p:sp>
+      <p:sp>
+        <p:nvSpPr>
+          <p:cNvPr id="19" name="TextBox 18"/>
           <p:cNvSpPr txBox="1"/>
           <p:nvPr/>
         </p:nvSpPr>
         <p:spPr>
           <a:xfrm>
-            <a:off x="6309360" y="2651760"/>
-            <a:ext cx="2651760" cy="365760"/>
+            <a:off x="9692640" y="4069080"/>
+            <a:ext cx="1920240" cy="365760"/>
           </a:xfrm>
           <a:prstGeom prst="rect">
             <a:avLst/>
@@ -12823,65 +13764,21 @@
                 </a:solidFill>
                 <a:latin typeface="Calibri"/>
               </a:rPr>
-              <a:t>Accuracy</a:t>
-            </a:r>
-          </a:p>
-        </p:txBody>
-      </p:sp>
-      <p:sp>
-        <p:nvSpPr>
-          <p:cNvPr id="18" name="Rounded Rectangle 17"/>
-          <p:cNvSpPr/>
-          <p:nvPr/>
-        </p:nvSpPr>
-        <p:spPr>
-          <a:xfrm>
-            <a:off x="9144000" y="1737360"/>
-            <a:ext cx="2423160" cy="1417320"/>
-          </a:xfrm>
-          <a:prstGeom prst="roundRect">
-            <a:avLst/>
-          </a:prstGeom>
-          <a:solidFill>
-            <a:srgbClr val="1E293B"/>
-          </a:solidFill>
-          <a:ln>
-            <a:noFill/>
-          </a:ln>
-          <a:effectLst/>
-        </p:spPr>
-        <p:style>
-          <a:lnRef idx="1">
-            <a:schemeClr val="accent1"/>
-          </a:lnRef>
-          <a:fillRef idx="3">
-            <a:schemeClr val="accent1"/>
-          </a:fillRef>
-          <a:effectRef idx="2">
-            <a:schemeClr val="accent1"/>
-          </a:effectRef>
-          <a:fontRef idx="minor">
-            <a:schemeClr val="lt1"/>
-          </a:fontRef>
-        </p:style>
-        <p:txBody>
-          <a:bodyPr rtlCol="0" anchor="ctr"/>
-          <a:lstStyle/>
-          <a:p>
-            <a:pPr algn="ctr"/>
-          </a:p>
-        </p:txBody>
-      </p:sp>
-      <p:sp>
-        <p:nvSpPr>
-          <p:cNvPr id="19" name="TextBox 18"/>
+              <a:t>Macro F1 vs SVM</a:t>
+            </a:r>
+          </a:p>
+        </p:txBody>
+      </p:sp>
+      <p:sp>
+        <p:nvSpPr>
+          <p:cNvPr id="20" name="TextBox 19"/>
           <p:cNvSpPr txBox="1"/>
           <p:nvPr/>
         </p:nvSpPr>
         <p:spPr>
           <a:xfrm>
-            <a:off x="9144000" y="1920240"/>
-            <a:ext cx="2423160" cy="731520"/>
+            <a:off x="7680960" y="4754880"/>
+            <a:ext cx="3931920" cy="1371600"/>
           </a:xfrm>
           <a:prstGeom prst="rect">
             <a:avLst/>
@@ -12894,72 +13791,31 @@
           </a:bodyPr>
           <a:lstStyle/>
           <a:p>
-            <a:pPr algn="ctr"/>
-            <a:r>
-              <a:rPr sz="4000" b="1">
-                <a:solidFill>
-                  <a:srgbClr val="FFFFFF"/>
-                </a:solidFill>
-                <a:latin typeface="Calibri"/>
-              </a:rPr>
-              <a:t>0.852</a:t>
-            </a:r>
-          </a:p>
-        </p:txBody>
-      </p:sp>
-      <p:sp>
-        <p:nvSpPr>
-          <p:cNvPr id="20" name="TextBox 19"/>
-          <p:cNvSpPr txBox="1"/>
-          <p:nvPr/>
-        </p:nvSpPr>
-        <p:spPr>
-          <a:xfrm>
-            <a:off x="9144000" y="2651760"/>
-            <a:ext cx="2423160" cy="365760"/>
-          </a:xfrm>
-          <a:prstGeom prst="rect">
-            <a:avLst/>
-          </a:prstGeom>
-          <a:noFill/>
-        </p:spPr>
-        <p:txBody>
-          <a:bodyPr wrap="square" anchor="t" lIns="0" rIns="0" tIns="0" bIns="0">
-            <a:spAutoFit/>
-          </a:bodyPr>
-          <a:lstStyle/>
-          <a:p>
-            <a:pPr algn="ctr"/>
-            <a:r>
-              <a:rPr sz="1300" b="0">
-                <a:solidFill>
-                  <a:srgbClr val="FFFFFF"/>
-                </a:solidFill>
-                <a:latin typeface="Calibri"/>
-              </a:rPr>
-              <a:t>SVM baseline macro-F1</a:t>
-            </a:r>
-          </a:p>
-        </p:txBody>
-      </p:sp>
-      <p:graphicFrame>
-        <p:nvGraphicFramePr>
-          <p:cNvPr id="21" name="Chart 20"/>
-          <p:cNvGraphicFramePr>
-            <a:graphicFrameLocks noGrp="1"/>
-          </p:cNvGraphicFramePr>
-          <p:nvPr/>
-        </p:nvGraphicFramePr>
-        <p:xfrm>
-          <a:off x="640080" y="3383280"/>
-          <a:ext cx="10972800" cy="2926080"/>
-        </p:xfrm>
-        <a:graphic>
-          <a:graphicData uri="http://schemas.openxmlformats.org/drawingml/2006/chart">
-            <c:chart xmlns:c="http://schemas.openxmlformats.org/drawingml/2006/chart" r:id="rId3"/>
-          </a:graphicData>
-        </a:graphic>
-      </p:graphicFrame>
+            <a:pPr algn="l"/>
+            <a:r>
+              <a:rPr sz="1200" b="0">
+                <a:solidFill>
+                  <a:srgbClr val="64748B"/>
+                </a:solidFill>
+                <a:latin typeface="Calibri"/>
+              </a:rPr>
+              <a:t>Weighted F1 0.538  |  macro precision 0.574  |  macro recall 0.574</a:t>
+            </a:r>
+          </a:p>
+          <a:p>
+            <a:pPr algn="l"/>
+            <a:r>
+              <a:rPr sz="1200" b="0">
+                <a:solidFill>
+                  <a:srgbClr val="64748B"/>
+                </a:solidFill>
+                <a:latin typeface="Calibri"/>
+              </a:rPr>
+              <a:t>Small test set: differences of a few points between experiments are not conclusive.</a:t>
+            </a:r>
+          </a:p>
+        </p:txBody>
+      </p:sp>
     </p:spTree>
   </p:cSld>
   <p:clrMapOvr>

--- a/Speech Emotion Recognition/Speech_Emotion_Recognition_Presentation.pptx
+++ b/Speech Emotion Recognition/Speech_Emotion_Recognition_Presentation.pptx
@@ -5111,7 +5111,7 @@
                 </a:solidFill>
                 <a:latin typeface="Calibri"/>
               </a:rPr>
-              <a:t>Presented by Ronia Rosario K</a:t>
+              <a:t>Presented by Ronia Rosario K.</a:t>
             </a:r>
           </a:p>
           <a:p>
@@ -6069,7 +6069,7 @@
                 </a:solidFill>
                 <a:latin typeface="Calibri"/>
               </a:rPr>
-              <a:t>Experiments 1-3 compared with test scores visible: mildly optimistic</a:t>
+              <a:t>Test results were examined during comparisons of Experiments 1-3: test performance may be optimistic</a:t>
             </a:r>
           </a:p>
           <a:p>

--- a/Speech Emotion Recognition/Speech_Emotion_Recognition_Presentation.pptx
+++ b/Speech Emotion Recognition/Speech_Emotion_Recognition_Presentation.pptx
@@ -5111,7 +5111,7 @@
                 </a:solidFill>
                 <a:latin typeface="Calibri"/>
               </a:rPr>
-              <a:t>Presented by Ronia Rosario K.</a:t>
+              <a:t>Presented by Ronia Rosario Sam K</a:t>
             </a:r>
           </a:p>
           <a:p>
